--- a/output/wordlabs-fect-3day.pptx
+++ b/output/wordlabs-fect-3day.pptx
@@ -4240,7 +4240,7 @@
                 <a:ea typeface="Calibri" pitchFamily="34" charset="-122"/>
                 <a:cs typeface="Calibri" pitchFamily="34" charset="-120"/>
               </a:rPr>
-              <a:t>"make, do, accomplish"</a:t>
+              <a:t>"do, make, perform"</a:t>
             </a:r>
             <a:endParaRPr lang="en-US" sz="2200" dirty="0"/>
           </a:p>
@@ -5288,7 +5288,7 @@
                 <a:ea typeface="Calibri" pitchFamily="34" charset="-122"/>
                 <a:cs typeface="Calibri" pitchFamily="34" charset="-120"/>
               </a:rPr>
-              <a:t>Word Labs  •  wordlabs.app  •  Root: 'fect' = make, do, accomplish</a:t>
+              <a:t>Word Labs  •  wordlabs.app  •  Root: 'fect' = do, make, perform</a:t>
             </a:r>
             <a:endParaRPr lang="en-US" sz="800" dirty="0"/>
           </a:p>
@@ -5928,7 +5928,7 @@
                 <a:ea typeface="Calibri" pitchFamily="34" charset="-122"/>
                 <a:cs typeface="Calibri" pitchFamily="34" charset="-120"/>
               </a:rPr>
-              <a:t>Word Labs  •  wordlabs.app  •  Root: 'fect' = make, do, accomplish</a:t>
+              <a:t>Word Labs  •  wordlabs.app  •  Root: 'fect' = do, make, perform</a:t>
             </a:r>
             <a:endParaRPr lang="en-US" sz="800" dirty="0"/>
           </a:p>
@@ -6071,7 +6071,7 @@
                 <a:ea typeface="Calibri" pitchFamily="34" charset="-122"/>
                 <a:cs typeface="Calibri" pitchFamily="34" charset="-120"/>
               </a:rPr>
-              <a:t> had a terrible </a:t>
+              <a:t> spread quickly, so the nurse explained how it could </a:t>
             </a:r>
             <a:pPr algn="l" indent="0" marL="0">
               <a:buNone/>
@@ -6088,7 +6088,7 @@
                 <a:ea typeface="Calibri" pitchFamily="34" charset="-122"/>
                 <a:cs typeface="Calibri" pitchFamily="34" charset="-120"/>
               </a:rPr>
-              <a:t>effect</a:t>
+              <a:t>affect</a:t>
             </a:r>
             <a:pPr algn="l" indent="0" marL="0">
               <a:buNone/>
@@ -6102,7 +6102,7 @@
                 <a:ea typeface="Calibri" pitchFamily="34" charset="-122"/>
                 <a:cs typeface="Calibri" pitchFamily="34" charset="-120"/>
               </a:rPr>
-              <a:t> on the whole class, so everyone had to stay home.</a:t>
+              <a:t> everyone in the class.</a:t>
             </a:r>
             <a:endParaRPr lang="en-US" sz="1800" dirty="0"/>
           </a:p>
@@ -6385,7 +6385,7 @@
                 <a:ea typeface="Trebuchet MS" pitchFamily="34" charset="-122"/>
                 <a:cs typeface="Trebuchet MS" pitchFamily="34" charset="-120"/>
               </a:rPr>
-              <a:t>effect</a:t>
+              <a:t>affect</a:t>
             </a:r>
             <a:endParaRPr lang="en-US" sz="1400" dirty="0"/>
           </a:p>
@@ -6716,7 +6716,7 @@
                 <a:ea typeface="Calibri" pitchFamily="34" charset="-122"/>
                 <a:cs typeface="Calibri" pitchFamily="34" charset="-120"/>
               </a:rPr>
-              <a:t>Word Labs  •  wordlabs.app  •  Root: 'fect' = make, do, accomplish</a:t>
+              <a:t>Word Labs  •  wordlabs.app  •  Root: 'fect' = do, make, perform</a:t>
             </a:r>
             <a:endParaRPr lang="en-US" sz="800" dirty="0"/>
           </a:p>
@@ -7543,7 +7543,7 @@
                 <a:ea typeface="Calibri" pitchFamily="34" charset="-122"/>
                 <a:cs typeface="Calibri" pitchFamily="34" charset="-120"/>
               </a:rPr>
-              <a:t>Word Labs  •  wordlabs.app  •  Root: 'fect' = make, do, accomplish</a:t>
+              <a:t>Word Labs  •  wordlabs.app  •  Root: 'fect' = do, make, perform</a:t>
             </a:r>
             <a:endParaRPr lang="en-US" sz="800" dirty="0"/>
           </a:p>
@@ -7860,7 +7860,7 @@
                 <a:ea typeface="Calibri" pitchFamily="34" charset="-122"/>
                 <a:cs typeface="Calibri" pitchFamily="34" charset="-120"/>
               </a:rPr>
-              <a:t>into, upon</a:t>
+              <a:t>into</a:t>
             </a:r>
             <a:endParaRPr lang="en-US" sz="850" dirty="0"/>
           </a:p>
@@ -7972,7 +7972,7 @@
                 <a:ea typeface="Calibri" pitchFamily="34" charset="-122"/>
                 <a:cs typeface="Calibri" pitchFamily="34" charset="-120"/>
               </a:rPr>
-              <a:t>make, do</a:t>
+              <a:t>do, make</a:t>
             </a:r>
             <a:endParaRPr lang="en-US" sz="850" dirty="0"/>
           </a:p>
@@ -8084,7 +8084,7 @@
                 <a:ea typeface="Calibri" pitchFamily="34" charset="-122"/>
                 <a:cs typeface="Calibri" pitchFamily="34" charset="-120"/>
               </a:rPr>
-              <a:t>state or result of</a:t>
+              <a:t>state or process of</a:t>
             </a:r>
             <a:endParaRPr lang="en-US" sz="850" dirty="0"/>
           </a:p>
@@ -8640,7 +8640,7 @@
                 <a:ea typeface="Calibri" pitchFamily="34" charset="-122"/>
                 <a:cs typeface="Calibri" pitchFamily="34" charset="-120"/>
               </a:rPr>
-              <a:t>Word Labs  •  wordlabs.app  •  Root: 'fect' = make, do, accomplish</a:t>
+              <a:t>Word Labs  •  wordlabs.app  •  Root: 'fect' = do, make, perform</a:t>
             </a:r>
             <a:endParaRPr lang="en-US" sz="800" dirty="0"/>
           </a:p>
@@ -8957,7 +8957,7 @@
                 <a:ea typeface="Calibri" pitchFamily="34" charset="-122"/>
                 <a:cs typeface="Calibri" pitchFamily="34" charset="-120"/>
               </a:rPr>
-              <a:t>into, upon</a:t>
+              <a:t>into</a:t>
             </a:r>
             <a:endParaRPr lang="en-US" sz="850" dirty="0"/>
           </a:p>
@@ -9069,7 +9069,7 @@
                 <a:ea typeface="Calibri" pitchFamily="34" charset="-122"/>
                 <a:cs typeface="Calibri" pitchFamily="34" charset="-120"/>
               </a:rPr>
-              <a:t>make, do</a:t>
+              <a:t>do, make</a:t>
             </a:r>
             <a:endParaRPr lang="en-US" sz="850" dirty="0"/>
           </a:p>
@@ -9181,7 +9181,7 @@
                 <a:ea typeface="Calibri" pitchFamily="34" charset="-122"/>
                 <a:cs typeface="Calibri" pitchFamily="34" charset="-120"/>
               </a:rPr>
-              <a:t>state or result of</a:t>
+              <a:t>state or process of</a:t>
             </a:r>
             <a:endParaRPr lang="en-US" sz="850" dirty="0"/>
           </a:p>
@@ -9974,7 +9974,7 @@
                 <a:ea typeface="Calibri" pitchFamily="34" charset="-122"/>
                 <a:cs typeface="Calibri" pitchFamily="34" charset="-120"/>
               </a:rPr>
-              <a:t>Word Labs  •  wordlabs.app  •  Root: 'fect' = make, do, accomplish</a:t>
+              <a:t>Word Labs  •  wordlabs.app  •  Root: 'fect' = do, make, perform</a:t>
             </a:r>
             <a:endParaRPr lang="en-US" sz="800" dirty="0"/>
           </a:p>
@@ -10291,7 +10291,7 @@
                 <a:ea typeface="Calibri" pitchFamily="34" charset="-122"/>
                 <a:cs typeface="Calibri" pitchFamily="34" charset="-120"/>
               </a:rPr>
-              <a:t>into, upon</a:t>
+              <a:t>into</a:t>
             </a:r>
             <a:endParaRPr lang="en-US" sz="850" dirty="0"/>
           </a:p>
@@ -10403,7 +10403,7 @@
                 <a:ea typeface="Calibri" pitchFamily="34" charset="-122"/>
                 <a:cs typeface="Calibri" pitchFamily="34" charset="-120"/>
               </a:rPr>
-              <a:t>make, do</a:t>
+              <a:t>do, make</a:t>
             </a:r>
             <a:endParaRPr lang="en-US" sz="850" dirty="0"/>
           </a:p>
@@ -10515,7 +10515,7 @@
                 <a:ea typeface="Calibri" pitchFamily="34" charset="-122"/>
                 <a:cs typeface="Calibri" pitchFamily="34" charset="-120"/>
               </a:rPr>
-              <a:t>state or result of</a:t>
+              <a:t>state or process of</a:t>
             </a:r>
             <a:endParaRPr lang="en-US" sz="850" dirty="0"/>
           </a:p>
@@ -11809,7 +11809,7 @@
                 <a:ea typeface="Calibri" pitchFamily="34" charset="-122"/>
                 <a:cs typeface="Calibri" pitchFamily="34" charset="-120"/>
               </a:rPr>
-              <a:t>Word Labs  •  wordlabs.app  •  Root: 'fect' = make, do, accomplish</a:t>
+              <a:t>Word Labs  •  wordlabs.app  •  Root: 'fect' = do, make, perform</a:t>
             </a:r>
             <a:endParaRPr lang="en-US" sz="800" dirty="0"/>
           </a:p>
@@ -11948,7 +11948,7 @@
                 <a:ea typeface="Trebuchet MS" pitchFamily="34" charset="-122"/>
                 <a:cs typeface="Trebuchet MS" pitchFamily="34" charset="-120"/>
               </a:rPr>
-              <a:t>effect</a:t>
+              <a:t>affect</a:t>
             </a:r>
             <a:endParaRPr lang="en-US" sz="2800" dirty="0"/>
           </a:p>
@@ -12636,7 +12636,7 @@
                 <a:ea typeface="Calibri" pitchFamily="34" charset="-122"/>
                 <a:cs typeface="Calibri" pitchFamily="34" charset="-120"/>
               </a:rPr>
-              <a:t>Word Labs  •  wordlabs.app  •  Root: 'fect' = make, do, accomplish</a:t>
+              <a:t>Word Labs  •  wordlabs.app  •  Root: 'fect' = do, make, perform</a:t>
             </a:r>
             <a:endParaRPr lang="en-US" sz="800" dirty="0"/>
           </a:p>
@@ -12775,7 +12775,7 @@
                 <a:ea typeface="Trebuchet MS" pitchFamily="34" charset="-122"/>
                 <a:cs typeface="Trebuchet MS" pitchFamily="34" charset="-120"/>
               </a:rPr>
-              <a:t>effect</a:t>
+              <a:t>affect</a:t>
             </a:r>
             <a:endParaRPr lang="en-US" sz="2800" dirty="0"/>
           </a:p>
@@ -12914,7 +12914,7 @@
                 <a:ea typeface="Trebuchet MS" pitchFamily="34" charset="-122"/>
                 <a:cs typeface="Trebuchet MS" pitchFamily="34" charset="-120"/>
               </a:rPr>
-              <a:t>ef</a:t>
+              <a:t>af</a:t>
             </a:r>
             <a:endParaRPr lang="en-US" sz="1300" dirty="0"/>
           </a:p>
@@ -12953,7 +12953,7 @@
                 <a:ea typeface="Calibri" pitchFamily="34" charset="-122"/>
                 <a:cs typeface="Calibri" pitchFamily="34" charset="-120"/>
               </a:rPr>
-              <a:t>out, from</a:t>
+              <a:t>to, towards</a:t>
             </a:r>
             <a:endParaRPr lang="en-US" sz="850" dirty="0"/>
           </a:p>
@@ -12992,7 +12992,7 @@
                 <a:ea typeface="Calibri" pitchFamily="34" charset="-122"/>
                 <a:cs typeface="Calibri" pitchFamily="34" charset="-120"/>
               </a:rPr>
-              <a:t>ex → ef before 'f'</a:t>
+              <a:t>ad → af before 'f'</a:t>
             </a:r>
             <a:endParaRPr lang="en-US" sz="700" dirty="0"/>
           </a:p>
@@ -13104,7 +13104,7 @@
                 <a:ea typeface="Calibri" pitchFamily="34" charset="-122"/>
                 <a:cs typeface="Calibri" pitchFamily="34" charset="-120"/>
               </a:rPr>
-              <a:t>make, do</a:t>
+              <a:t>do, make</a:t>
             </a:r>
             <a:endParaRPr lang="en-US" sz="850" dirty="0"/>
           </a:p>
@@ -13660,7 +13660,7 @@
                 <a:ea typeface="Calibri" pitchFamily="34" charset="-122"/>
                 <a:cs typeface="Calibri" pitchFamily="34" charset="-120"/>
               </a:rPr>
-              <a:t>Word Labs  •  wordlabs.app  •  Root: 'fect' = make, do, accomplish</a:t>
+              <a:t>Word Labs  •  wordlabs.app  •  Root: 'fect' = do, make, perform</a:t>
             </a:r>
             <a:endParaRPr lang="en-US" sz="800" dirty="0"/>
           </a:p>
@@ -13799,7 +13799,7 @@
                 <a:ea typeface="Trebuchet MS" pitchFamily="34" charset="-122"/>
                 <a:cs typeface="Trebuchet MS" pitchFamily="34" charset="-120"/>
               </a:rPr>
-              <a:t>effect</a:t>
+              <a:t>affect</a:t>
             </a:r>
             <a:endParaRPr lang="en-US" sz="2800" dirty="0"/>
           </a:p>
@@ -13938,7 +13938,7 @@
                 <a:ea typeface="Trebuchet MS" pitchFamily="34" charset="-122"/>
                 <a:cs typeface="Trebuchet MS" pitchFamily="34" charset="-120"/>
               </a:rPr>
-              <a:t>ef</a:t>
+              <a:t>af</a:t>
             </a:r>
             <a:endParaRPr lang="en-US" sz="1300" dirty="0"/>
           </a:p>
@@ -13977,7 +13977,7 @@
                 <a:ea typeface="Calibri" pitchFamily="34" charset="-122"/>
                 <a:cs typeface="Calibri" pitchFamily="34" charset="-120"/>
               </a:rPr>
-              <a:t>out, from</a:t>
+              <a:t>to, towards</a:t>
             </a:r>
             <a:endParaRPr lang="en-US" sz="850" dirty="0"/>
           </a:p>
@@ -14016,7 +14016,7 @@
                 <a:ea typeface="Calibri" pitchFamily="34" charset="-122"/>
                 <a:cs typeface="Calibri" pitchFamily="34" charset="-120"/>
               </a:rPr>
-              <a:t>ex → ef before 'f'</a:t>
+              <a:t>ad → af before 'f'</a:t>
             </a:r>
             <a:endParaRPr lang="en-US" sz="700" dirty="0"/>
           </a:p>
@@ -14128,7 +14128,7 @@
                 <a:ea typeface="Calibri" pitchFamily="34" charset="-122"/>
                 <a:cs typeface="Calibri" pitchFamily="34" charset="-120"/>
               </a:rPr>
-              <a:t>make, do</a:t>
+              <a:t>do, make</a:t>
             </a:r>
             <a:endParaRPr lang="en-US" sz="850" dirty="0"/>
           </a:p>
@@ -14287,7 +14287,7 @@
                 <a:ea typeface="Trebuchet MS" pitchFamily="34" charset="-122"/>
                 <a:cs typeface="Trebuchet MS" pitchFamily="34" charset="-120"/>
               </a:rPr>
-              <a:t>ef</a:t>
+              <a:t>af</a:t>
             </a:r>
             <a:endParaRPr lang="en-US" sz="1400" dirty="0"/>
           </a:p>
@@ -14725,7 +14725,7 @@
                 <a:ea typeface="Calibri" pitchFamily="34" charset="-122"/>
                 <a:cs typeface="Calibri" pitchFamily="34" charset="-120"/>
               </a:rPr>
-              <a:t>Root 'fect' — make, do, accomplish</a:t>
+              <a:t>Root 'fect' — do, make, perform</a:t>
             </a:r>
             <a:endParaRPr lang="en-US" sz="1600" dirty="0"/>
           </a:p>
@@ -15081,7 +15081,7 @@
                 <a:ea typeface="Calibri" pitchFamily="34" charset="-122"/>
                 <a:cs typeface="Calibri" pitchFamily="34" charset="-120"/>
               </a:rPr>
-              <a:t>Word Labs  •  wordlabs.app  •  Root: 'fect' = make, do, accomplish</a:t>
+              <a:t>Word Labs  •  wordlabs.app  •  Root: 'fect' = do, make, perform</a:t>
             </a:r>
             <a:endParaRPr lang="en-US" sz="800" dirty="0"/>
           </a:p>
@@ -15220,7 +15220,7 @@
                 <a:ea typeface="Trebuchet MS" pitchFamily="34" charset="-122"/>
                 <a:cs typeface="Trebuchet MS" pitchFamily="34" charset="-120"/>
               </a:rPr>
-              <a:t>effect</a:t>
+              <a:t>affect</a:t>
             </a:r>
             <a:endParaRPr lang="en-US" sz="2800" dirty="0"/>
           </a:p>
@@ -15359,7 +15359,7 @@
                 <a:ea typeface="Trebuchet MS" pitchFamily="34" charset="-122"/>
                 <a:cs typeface="Trebuchet MS" pitchFamily="34" charset="-120"/>
               </a:rPr>
-              <a:t>ef</a:t>
+              <a:t>af</a:t>
             </a:r>
             <a:endParaRPr lang="en-US" sz="1300" dirty="0"/>
           </a:p>
@@ -15398,7 +15398,7 @@
                 <a:ea typeface="Calibri" pitchFamily="34" charset="-122"/>
                 <a:cs typeface="Calibri" pitchFamily="34" charset="-120"/>
               </a:rPr>
-              <a:t>out, from</a:t>
+              <a:t>to, towards</a:t>
             </a:r>
             <a:endParaRPr lang="en-US" sz="850" dirty="0"/>
           </a:p>
@@ -15437,7 +15437,7 @@
                 <a:ea typeface="Calibri" pitchFamily="34" charset="-122"/>
                 <a:cs typeface="Calibri" pitchFamily="34" charset="-120"/>
               </a:rPr>
-              <a:t>ex → ef before 'f'</a:t>
+              <a:t>ad → af before 'f'</a:t>
             </a:r>
             <a:endParaRPr lang="en-US" sz="700" dirty="0"/>
           </a:p>
@@ -15549,7 +15549,7 @@
                 <a:ea typeface="Calibri" pitchFamily="34" charset="-122"/>
                 <a:cs typeface="Calibri" pitchFamily="34" charset="-120"/>
               </a:rPr>
-              <a:t>make, do</a:t>
+              <a:t>do, make</a:t>
             </a:r>
             <a:endParaRPr lang="en-US" sz="850" dirty="0"/>
           </a:p>
@@ -15708,7 +15708,7 @@
                 <a:ea typeface="Trebuchet MS" pitchFamily="34" charset="-122"/>
                 <a:cs typeface="Trebuchet MS" pitchFamily="34" charset="-120"/>
               </a:rPr>
-              <a:t>ef</a:t>
+              <a:t>af</a:t>
             </a:r>
             <a:endParaRPr lang="en-US" sz="1400" dirty="0"/>
           </a:p>
@@ -15972,7 +15972,7 @@
                 <a:ea typeface="Trebuchet MS" pitchFamily="34" charset="-122"/>
                 <a:cs typeface="Trebuchet MS" pitchFamily="34" charset="-120"/>
               </a:rPr>
-              <a:t>e</a:t>
+              <a:t>a</a:t>
             </a:r>
             <a:endParaRPr lang="en-US" sz="900" dirty="0"/>
           </a:p>
@@ -16849,7 +16849,7 @@
                 <a:ea typeface="Calibri" pitchFamily="34" charset="-122"/>
                 <a:cs typeface="Calibri" pitchFamily="34" charset="-120"/>
               </a:rPr>
-              <a:t>Word Labs  •  wordlabs.app  •  Root: 'fect' = make, do, accomplish</a:t>
+              <a:t>Word Labs  •  wordlabs.app  •  Root: 'fect' = do, make, perform</a:t>
             </a:r>
             <a:endParaRPr lang="en-US" sz="800" dirty="0"/>
           </a:p>
@@ -17183,7 +17183,7 @@
                 <a:ea typeface="Trebuchet MS" pitchFamily="34" charset="-122"/>
                 <a:cs typeface="Trebuchet MS" pitchFamily="34" charset="-120"/>
               </a:rPr>
-              <a:t>2</a:t>
+              <a:t>1</a:t>
             </a:r>
             <a:pPr algn="ctr" indent="0" marL="0">
               <a:buNone/>
@@ -17197,7 +17197,7 @@
                 <a:ea typeface="Trebuchet MS" pitchFamily="34" charset="-122"/>
                 <a:cs typeface="Trebuchet MS" pitchFamily="34" charset="-120"/>
               </a:rPr>
-              <a:t>  punctuation marks</a:t>
+              <a:t>  punctuation mark</a:t>
             </a:r>
             <a:endParaRPr lang="en-US" sz="2800" dirty="0"/>
           </a:p>
@@ -17489,7 +17489,7 @@
                 <a:ea typeface="Calibri" pitchFamily="34" charset="-122"/>
                 <a:cs typeface="Calibri" pitchFamily="34" charset="-120"/>
               </a:rPr>
-              <a:t>Word Labs  •  wordlabs.app  •  Root: 'fect' = make, do, accomplish</a:t>
+              <a:t>Word Labs  •  wordlabs.app  •  Root: 'fect' = do, make, perform</a:t>
             </a:r>
             <a:endParaRPr lang="en-US" sz="800" dirty="0"/>
           </a:p>
@@ -17601,7 +17601,7 @@
                 <a:ea typeface="Calibri" pitchFamily="34" charset="-122"/>
                 <a:cs typeface="Calibri" pitchFamily="34" charset="-120"/>
               </a:rPr>
-              <a:t>It is </a:t>
+              <a:t>She worked hard to achieve </a:t>
             </a:r>
             <a:pPr algn="l" indent="0" marL="0">
               <a:buNone/>
@@ -17618,7 +17618,7 @@
                 <a:ea typeface="Calibri" pitchFamily="34" charset="-122"/>
                 <a:cs typeface="Calibri" pitchFamily="34" charset="-120"/>
               </a:rPr>
-              <a:t>effective</a:t>
+              <a:t>perfection</a:t>
             </a:r>
             <a:pPr algn="l" indent="0" marL="0">
               <a:buNone/>
@@ -17632,7 +17632,7 @@
                 <a:ea typeface="Calibri" pitchFamily="34" charset="-122"/>
                 <a:cs typeface="Calibri" pitchFamily="34" charset="-120"/>
               </a:rPr>
-              <a:t> to wash your hands </a:t>
+              <a:t>, but the </a:t>
             </a:r>
             <a:pPr algn="l" indent="0" marL="0">
               <a:buNone/>
@@ -17649,7 +17649,7 @@
                 <a:ea typeface="Calibri" pitchFamily="34" charset="-122"/>
                 <a:cs typeface="Calibri" pitchFamily="34" charset="-120"/>
               </a:rPr>
-              <a:t>perfectly</a:t>
+              <a:t>defect</a:t>
             </a:r>
             <a:pPr algn="l" indent="0" marL="0">
               <a:buNone/>
@@ -17663,7 +17663,7 @@
                 <a:ea typeface="Calibri" pitchFamily="34" charset="-122"/>
                 <a:cs typeface="Calibri" pitchFamily="34" charset="-120"/>
               </a:rPr>
-              <a:t>, because this helps prevent the spread of </a:t>
+              <a:t> in the material made the project </a:t>
             </a:r>
             <a:pPr algn="l" indent="0" marL="0">
               <a:buNone/>
@@ -17680,7 +17680,7 @@
                 <a:ea typeface="Calibri" pitchFamily="34" charset="-122"/>
                 <a:cs typeface="Calibri" pitchFamily="34" charset="-120"/>
               </a:rPr>
-              <a:t>infection</a:t>
+              <a:t>ineffective</a:t>
             </a:r>
             <a:pPr algn="l" indent="0" marL="0">
               <a:buNone/>
@@ -17849,7 +17849,7 @@
                 <a:ea typeface="Trebuchet MS" pitchFamily="34" charset="-122"/>
                 <a:cs typeface="Trebuchet MS" pitchFamily="34" charset="-120"/>
               </a:rPr>
-              <a:t>effective</a:t>
+              <a:t>perfection</a:t>
             </a:r>
             <a:endParaRPr lang="en-US" sz="1400" dirty="0"/>
           </a:p>
@@ -17977,7 +17977,7 @@
                 <a:ea typeface="Trebuchet MS" pitchFamily="34" charset="-122"/>
                 <a:cs typeface="Trebuchet MS" pitchFamily="34" charset="-120"/>
               </a:rPr>
-              <a:t>perfectly</a:t>
+              <a:t>defect</a:t>
             </a:r>
             <a:endParaRPr lang="en-US" sz="1400" dirty="0"/>
           </a:p>
@@ -18105,7 +18105,7 @@
                 <a:ea typeface="Trebuchet MS" pitchFamily="34" charset="-122"/>
                 <a:cs typeface="Trebuchet MS" pitchFamily="34" charset="-120"/>
               </a:rPr>
-              <a:t>infection</a:t>
+              <a:t>ineffective</a:t>
             </a:r>
             <a:endParaRPr lang="en-US" sz="1400" dirty="0"/>
           </a:p>
@@ -18436,7 +18436,7 @@
                 <a:ea typeface="Calibri" pitchFamily="34" charset="-122"/>
                 <a:cs typeface="Calibri" pitchFamily="34" charset="-120"/>
               </a:rPr>
-              <a:t>Word Labs  •  wordlabs.app  •  Root: 'fect' = make, do, accomplish</a:t>
+              <a:t>Word Labs  •  wordlabs.app  •  Root: 'fect' = do, make, perform</a:t>
             </a:r>
             <a:endParaRPr lang="en-US" sz="800" dirty="0"/>
           </a:p>
@@ -18575,7 +18575,7 @@
                 <a:ea typeface="Trebuchet MS" pitchFamily="34" charset="-122"/>
                 <a:cs typeface="Trebuchet MS" pitchFamily="34" charset="-120"/>
               </a:rPr>
-              <a:t>effective</a:t>
+              <a:t>perfection</a:t>
             </a:r>
             <a:endParaRPr lang="en-US" sz="2800" dirty="0"/>
           </a:p>
@@ -19263,7 +19263,7 @@
                 <a:ea typeface="Calibri" pitchFamily="34" charset="-122"/>
                 <a:cs typeface="Calibri" pitchFamily="34" charset="-120"/>
               </a:rPr>
-              <a:t>Word Labs  •  wordlabs.app  •  Root: 'fect' = make, do, accomplish</a:t>
+              <a:t>Word Labs  •  wordlabs.app  •  Root: 'fect' = do, make, perform</a:t>
             </a:r>
             <a:endParaRPr lang="en-US" sz="800" dirty="0"/>
           </a:p>
@@ -19402,7 +19402,7 @@
                 <a:ea typeface="Trebuchet MS" pitchFamily="34" charset="-122"/>
                 <a:cs typeface="Trebuchet MS" pitchFamily="34" charset="-120"/>
               </a:rPr>
-              <a:t>effective</a:t>
+              <a:t>perfection</a:t>
             </a:r>
             <a:endParaRPr lang="en-US" sz="2800" dirty="0"/>
           </a:p>
@@ -19541,7 +19541,7 @@
                 <a:ea typeface="Trebuchet MS" pitchFamily="34" charset="-122"/>
                 <a:cs typeface="Trebuchet MS" pitchFamily="34" charset="-120"/>
               </a:rPr>
-              <a:t>ef</a:t>
+              <a:t>per</a:t>
             </a:r>
             <a:endParaRPr lang="en-US" sz="1300" dirty="0"/>
           </a:p>
@@ -19580,7 +19580,7 @@
                 <a:ea typeface="Calibri" pitchFamily="34" charset="-122"/>
                 <a:cs typeface="Calibri" pitchFamily="34" charset="-120"/>
               </a:rPr>
-              <a:t>out, from</a:t>
+              <a:t>through, completely</a:t>
             </a:r>
             <a:endParaRPr lang="en-US" sz="850" dirty="0"/>
           </a:p>
@@ -19588,46 +19588,7 @@
       </p:sp>
       <p:sp>
         <p:nvSpPr>
-          <p:cNvPr id="19" name="Text 17"/>
-          <p:cNvSpPr/>
-          <p:nvPr/>
-        </p:nvSpPr>
-        <p:spPr>
-          <a:xfrm>
-            <a:off x="2221992" y="2752344"/>
-            <a:ext cx="1828800" cy="182880"/>
-          </a:xfrm>
-          <a:prstGeom prst="rect">
-            <a:avLst/>
-          </a:prstGeom>
-          <a:noFill/>
-          <a:ln/>
-        </p:spPr>
-        <p:txBody>
-          <a:bodyPr wrap="square" lIns="0" tIns="0" rIns="0" bIns="0" rtlCol="0" anchor="t"/>
-          <a:lstStyle/>
-          <a:p>
-            <a:pPr algn="ctr" indent="0" marL="0">
-              <a:buNone/>
-            </a:pPr>
-            <a:r>
-              <a:rPr lang="en-US" sz="700" i="1" dirty="0">
-                <a:solidFill>
-                  <a:srgbClr val="94A3B8"/>
-                </a:solidFill>
-                <a:latin typeface="Calibri" pitchFamily="34" charset="0"/>
-                <a:ea typeface="Calibri" pitchFamily="34" charset="-122"/>
-                <a:cs typeface="Calibri" pitchFamily="34" charset="-120"/>
-              </a:rPr>
-              <a:t>ex → ef before 'f'</a:t>
-            </a:r>
-            <a:endParaRPr lang="en-US" sz="700" dirty="0"/>
-          </a:p>
-        </p:txBody>
-      </p:sp>
-      <p:sp>
-        <p:nvSpPr>
-          <p:cNvPr id="20" name="Shape 18"/>
+          <p:cNvPr id="19" name="Shape 17"/>
           <p:cNvSpPr/>
           <p:nvPr/>
         </p:nvSpPr>
@@ -19661,7 +19622,7 @@
       </p:sp>
       <p:sp>
         <p:nvSpPr>
-          <p:cNvPr id="21" name="Text 19"/>
+          <p:cNvPr id="20" name="Text 18"/>
           <p:cNvSpPr/>
           <p:nvPr/>
         </p:nvSpPr>
@@ -19700,7 +19661,7 @@
       </p:sp>
       <p:sp>
         <p:nvSpPr>
-          <p:cNvPr id="22" name="Text 20"/>
+          <p:cNvPr id="21" name="Text 19"/>
           <p:cNvSpPr/>
           <p:nvPr/>
         </p:nvSpPr>
@@ -19731,7 +19692,7 @@
                 <a:ea typeface="Calibri" pitchFamily="34" charset="-122"/>
                 <a:cs typeface="Calibri" pitchFamily="34" charset="-120"/>
               </a:rPr>
-              <a:t>make, do</a:t>
+              <a:t>do, make</a:t>
             </a:r>
             <a:endParaRPr lang="en-US" sz="850" dirty="0"/>
           </a:p>
@@ -19739,7 +19700,7 @@
       </p:sp>
       <p:sp>
         <p:nvSpPr>
-          <p:cNvPr id="23" name="Shape 21"/>
+          <p:cNvPr id="22" name="Shape 20"/>
           <p:cNvSpPr/>
           <p:nvPr/>
         </p:nvSpPr>
@@ -19773,7 +19734,7 @@
       </p:sp>
       <p:sp>
         <p:nvSpPr>
-          <p:cNvPr id="24" name="Text 22"/>
+          <p:cNvPr id="23" name="Text 21"/>
           <p:cNvSpPr/>
           <p:nvPr/>
         </p:nvSpPr>
@@ -19804,7 +19765,7 @@
                 <a:ea typeface="Trebuchet MS" pitchFamily="34" charset="-122"/>
                 <a:cs typeface="Trebuchet MS" pitchFamily="34" charset="-120"/>
               </a:rPr>
-              <a:t>ive</a:t>
+              <a:t>ion</a:t>
             </a:r>
             <a:endParaRPr lang="en-US" sz="1300" dirty="0"/>
           </a:p>
@@ -19812,7 +19773,7 @@
       </p:sp>
       <p:sp>
         <p:nvSpPr>
-          <p:cNvPr id="25" name="Text 23"/>
+          <p:cNvPr id="24" name="Text 22"/>
           <p:cNvSpPr/>
           <p:nvPr/>
         </p:nvSpPr>
@@ -19843,7 +19804,7 @@
                 <a:ea typeface="Calibri" pitchFamily="34" charset="-122"/>
                 <a:cs typeface="Calibri" pitchFamily="34" charset="-120"/>
               </a:rPr>
-              <a:t>having the quality of</a:t>
+              <a:t>state or process of</a:t>
             </a:r>
             <a:endParaRPr lang="en-US" sz="850" dirty="0"/>
           </a:p>
@@ -19851,7 +19812,7 @@
       </p:sp>
       <p:sp>
         <p:nvSpPr>
-          <p:cNvPr id="26" name="Shape 24"/>
+          <p:cNvPr id="25" name="Shape 23"/>
           <p:cNvSpPr/>
           <p:nvPr/>
         </p:nvSpPr>
@@ -19878,7 +19839,7 @@
       </p:sp>
       <p:sp>
         <p:nvSpPr>
-          <p:cNvPr id="27" name="Text 25"/>
+          <p:cNvPr id="26" name="Text 24"/>
           <p:cNvSpPr/>
           <p:nvPr/>
         </p:nvSpPr>
@@ -19917,7 +19878,7 @@
       </p:sp>
       <p:sp>
         <p:nvSpPr>
-          <p:cNvPr id="28" name="Shape 26"/>
+          <p:cNvPr id="27" name="Shape 25"/>
           <p:cNvSpPr/>
           <p:nvPr/>
         </p:nvSpPr>
@@ -19944,7 +19905,7 @@
       </p:sp>
       <p:sp>
         <p:nvSpPr>
-          <p:cNvPr id="29" name="Text 27"/>
+          <p:cNvPr id="28" name="Text 26"/>
           <p:cNvSpPr/>
           <p:nvPr/>
         </p:nvSpPr>
@@ -19983,7 +19944,7 @@
       </p:sp>
       <p:sp>
         <p:nvSpPr>
-          <p:cNvPr id="30" name="Shape 28"/>
+          <p:cNvPr id="29" name="Shape 27"/>
           <p:cNvSpPr/>
           <p:nvPr/>
         </p:nvSpPr>
@@ -20010,7 +19971,7 @@
       </p:sp>
       <p:sp>
         <p:nvSpPr>
-          <p:cNvPr id="31" name="Text 29"/>
+          <p:cNvPr id="30" name="Text 28"/>
           <p:cNvSpPr/>
           <p:nvPr/>
         </p:nvSpPr>
@@ -20049,7 +20010,7 @@
       </p:sp>
       <p:sp>
         <p:nvSpPr>
-          <p:cNvPr id="32" name="Shape 30"/>
+          <p:cNvPr id="31" name="Shape 29"/>
           <p:cNvSpPr/>
           <p:nvPr/>
         </p:nvSpPr>
@@ -20076,7 +20037,7 @@
       </p:sp>
       <p:sp>
         <p:nvSpPr>
-          <p:cNvPr id="33" name="Text 31"/>
+          <p:cNvPr id="32" name="Text 30"/>
           <p:cNvSpPr/>
           <p:nvPr/>
         </p:nvSpPr>
@@ -20399,7 +20360,7 @@
                 <a:ea typeface="Calibri" pitchFamily="34" charset="-122"/>
                 <a:cs typeface="Calibri" pitchFamily="34" charset="-120"/>
               </a:rPr>
-              <a:t>Word Labs  •  wordlabs.app  •  Root: 'fect' = make, do, accomplish</a:t>
+              <a:t>Word Labs  •  wordlabs.app  •  Root: 'fect' = do, make, perform</a:t>
             </a:r>
             <a:endParaRPr lang="en-US" sz="800" dirty="0"/>
           </a:p>
@@ -20538,7 +20499,7 @@
                 <a:ea typeface="Trebuchet MS" pitchFamily="34" charset="-122"/>
                 <a:cs typeface="Trebuchet MS" pitchFamily="34" charset="-120"/>
               </a:rPr>
-              <a:t>effective</a:t>
+              <a:t>perfection</a:t>
             </a:r>
             <a:endParaRPr lang="en-US" sz="2800" dirty="0"/>
           </a:p>
@@ -20677,7 +20638,7 @@
                 <a:ea typeface="Trebuchet MS" pitchFamily="34" charset="-122"/>
                 <a:cs typeface="Trebuchet MS" pitchFamily="34" charset="-120"/>
               </a:rPr>
-              <a:t>ef</a:t>
+              <a:t>per</a:t>
             </a:r>
             <a:endParaRPr lang="en-US" sz="1300" dirty="0"/>
           </a:p>
@@ -20716,7 +20677,7 @@
                 <a:ea typeface="Calibri" pitchFamily="34" charset="-122"/>
                 <a:cs typeface="Calibri" pitchFamily="34" charset="-120"/>
               </a:rPr>
-              <a:t>out, from</a:t>
+              <a:t>through, completely</a:t>
             </a:r>
             <a:endParaRPr lang="en-US" sz="850" dirty="0"/>
           </a:p>
@@ -20724,46 +20685,7 @@
       </p:sp>
       <p:sp>
         <p:nvSpPr>
-          <p:cNvPr id="19" name="Text 17"/>
-          <p:cNvSpPr/>
-          <p:nvPr/>
-        </p:nvSpPr>
-        <p:spPr>
-          <a:xfrm>
-            <a:off x="2221992" y="2752344"/>
-            <a:ext cx="1828800" cy="182880"/>
-          </a:xfrm>
-          <a:prstGeom prst="rect">
-            <a:avLst/>
-          </a:prstGeom>
-          <a:noFill/>
-          <a:ln/>
-        </p:spPr>
-        <p:txBody>
-          <a:bodyPr wrap="square" lIns="0" tIns="0" rIns="0" bIns="0" rtlCol="0" anchor="t"/>
-          <a:lstStyle/>
-          <a:p>
-            <a:pPr algn="ctr" indent="0" marL="0">
-              <a:buNone/>
-            </a:pPr>
-            <a:r>
-              <a:rPr lang="en-US" sz="700" i="1" dirty="0">
-                <a:solidFill>
-                  <a:srgbClr val="94A3B8"/>
-                </a:solidFill>
-                <a:latin typeface="Calibri" pitchFamily="34" charset="0"/>
-                <a:ea typeface="Calibri" pitchFamily="34" charset="-122"/>
-                <a:cs typeface="Calibri" pitchFamily="34" charset="-120"/>
-              </a:rPr>
-              <a:t>ex → ef before 'f'</a:t>
-            </a:r>
-            <a:endParaRPr lang="en-US" sz="700" dirty="0"/>
-          </a:p>
-        </p:txBody>
-      </p:sp>
-      <p:sp>
-        <p:nvSpPr>
-          <p:cNvPr id="20" name="Shape 18"/>
+          <p:cNvPr id="19" name="Shape 17"/>
           <p:cNvSpPr/>
           <p:nvPr/>
         </p:nvSpPr>
@@ -20797,7 +20719,7 @@
       </p:sp>
       <p:sp>
         <p:nvSpPr>
-          <p:cNvPr id="21" name="Text 19"/>
+          <p:cNvPr id="20" name="Text 18"/>
           <p:cNvSpPr/>
           <p:nvPr/>
         </p:nvSpPr>
@@ -20836,7 +20758,7 @@
       </p:sp>
       <p:sp>
         <p:nvSpPr>
-          <p:cNvPr id="22" name="Text 20"/>
+          <p:cNvPr id="21" name="Text 19"/>
           <p:cNvSpPr/>
           <p:nvPr/>
         </p:nvSpPr>
@@ -20867,7 +20789,7 @@
                 <a:ea typeface="Calibri" pitchFamily="34" charset="-122"/>
                 <a:cs typeface="Calibri" pitchFamily="34" charset="-120"/>
               </a:rPr>
-              <a:t>make, do</a:t>
+              <a:t>do, make</a:t>
             </a:r>
             <a:endParaRPr lang="en-US" sz="850" dirty="0"/>
           </a:p>
@@ -20875,7 +20797,7 @@
       </p:sp>
       <p:sp>
         <p:nvSpPr>
-          <p:cNvPr id="23" name="Shape 21"/>
+          <p:cNvPr id="22" name="Shape 20"/>
           <p:cNvSpPr/>
           <p:nvPr/>
         </p:nvSpPr>
@@ -20909,7 +20831,7 @@
       </p:sp>
       <p:sp>
         <p:nvSpPr>
-          <p:cNvPr id="24" name="Text 22"/>
+          <p:cNvPr id="23" name="Text 21"/>
           <p:cNvSpPr/>
           <p:nvPr/>
         </p:nvSpPr>
@@ -20940,7 +20862,7 @@
                 <a:ea typeface="Trebuchet MS" pitchFamily="34" charset="-122"/>
                 <a:cs typeface="Trebuchet MS" pitchFamily="34" charset="-120"/>
               </a:rPr>
-              <a:t>ive</a:t>
+              <a:t>ion</a:t>
             </a:r>
             <a:endParaRPr lang="en-US" sz="1300" dirty="0"/>
           </a:p>
@@ -20948,7 +20870,7 @@
       </p:sp>
       <p:sp>
         <p:nvSpPr>
-          <p:cNvPr id="25" name="Text 23"/>
+          <p:cNvPr id="24" name="Text 22"/>
           <p:cNvSpPr/>
           <p:nvPr/>
         </p:nvSpPr>
@@ -20979,7 +20901,7 @@
                 <a:ea typeface="Calibri" pitchFamily="34" charset="-122"/>
                 <a:cs typeface="Calibri" pitchFamily="34" charset="-120"/>
               </a:rPr>
-              <a:t>having the quality of</a:t>
+              <a:t>state or process of</a:t>
             </a:r>
             <a:endParaRPr lang="en-US" sz="850" dirty="0"/>
           </a:p>
@@ -20987,7 +20909,7 @@
       </p:sp>
       <p:sp>
         <p:nvSpPr>
-          <p:cNvPr id="26" name="Shape 24"/>
+          <p:cNvPr id="25" name="Shape 23"/>
           <p:cNvSpPr/>
           <p:nvPr/>
         </p:nvSpPr>
@@ -21014,7 +20936,7 @@
       </p:sp>
       <p:sp>
         <p:nvSpPr>
-          <p:cNvPr id="27" name="Text 25"/>
+          <p:cNvPr id="26" name="Text 24"/>
           <p:cNvSpPr/>
           <p:nvPr/>
         </p:nvSpPr>
@@ -21053,7 +20975,7 @@
       </p:sp>
       <p:sp>
         <p:nvSpPr>
-          <p:cNvPr id="28" name="Shape 26"/>
+          <p:cNvPr id="27" name="Shape 25"/>
           <p:cNvSpPr/>
           <p:nvPr/>
         </p:nvSpPr>
@@ -21080,7 +21002,7 @@
       </p:sp>
       <p:sp>
         <p:nvSpPr>
-          <p:cNvPr id="29" name="Shape 27"/>
+          <p:cNvPr id="28" name="Shape 26"/>
           <p:cNvSpPr/>
           <p:nvPr/>
         </p:nvSpPr>
@@ -21107,7 +21029,7 @@
       </p:sp>
       <p:sp>
         <p:nvSpPr>
-          <p:cNvPr id="30" name="Text 28"/>
+          <p:cNvPr id="29" name="Text 27"/>
           <p:cNvSpPr/>
           <p:nvPr/>
         </p:nvSpPr>
@@ -21138,7 +21060,7 @@
                 <a:ea typeface="Trebuchet MS" pitchFamily="34" charset="-122"/>
                 <a:cs typeface="Trebuchet MS" pitchFamily="34" charset="-120"/>
               </a:rPr>
-              <a:t>ef</a:t>
+              <a:t>per</a:t>
             </a:r>
             <a:endParaRPr lang="en-US" sz="1400" dirty="0"/>
           </a:p>
@@ -21146,7 +21068,7 @@
       </p:sp>
       <p:sp>
         <p:nvSpPr>
-          <p:cNvPr id="31" name="Text 29"/>
+          <p:cNvPr id="30" name="Text 28"/>
           <p:cNvSpPr/>
           <p:nvPr/>
         </p:nvSpPr>
@@ -21185,7 +21107,7 @@
       </p:sp>
       <p:sp>
         <p:nvSpPr>
-          <p:cNvPr id="32" name="Shape 30"/>
+          <p:cNvPr id="31" name="Shape 29"/>
           <p:cNvSpPr/>
           <p:nvPr/>
         </p:nvSpPr>
@@ -21212,7 +21134,7 @@
       </p:sp>
       <p:sp>
         <p:nvSpPr>
-          <p:cNvPr id="33" name="Text 31"/>
+          <p:cNvPr id="32" name="Text 30"/>
           <p:cNvSpPr/>
           <p:nvPr/>
         </p:nvSpPr>
@@ -21251,7 +21173,7 @@
       </p:sp>
       <p:sp>
         <p:nvSpPr>
-          <p:cNvPr id="34" name="Text 32"/>
+          <p:cNvPr id="33" name="Text 31"/>
           <p:cNvSpPr/>
           <p:nvPr/>
         </p:nvSpPr>
@@ -21290,7 +21212,7 @@
       </p:sp>
       <p:sp>
         <p:nvSpPr>
-          <p:cNvPr id="35" name="Shape 33"/>
+          <p:cNvPr id="34" name="Shape 32"/>
           <p:cNvSpPr/>
           <p:nvPr/>
         </p:nvSpPr>
@@ -21317,7 +21239,7 @@
       </p:sp>
       <p:sp>
         <p:nvSpPr>
-          <p:cNvPr id="36" name="Text 34"/>
+          <p:cNvPr id="35" name="Text 33"/>
           <p:cNvSpPr/>
           <p:nvPr/>
         </p:nvSpPr>
@@ -21348,7 +21270,7 @@
                 <a:ea typeface="Trebuchet MS" pitchFamily="34" charset="-122"/>
                 <a:cs typeface="Trebuchet MS" pitchFamily="34" charset="-120"/>
               </a:rPr>
-              <a:t>tive</a:t>
+              <a:t>tion</a:t>
             </a:r>
             <a:endParaRPr lang="en-US" sz="1400" dirty="0"/>
           </a:p>
@@ -21356,7 +21278,7 @@
       </p:sp>
       <p:sp>
         <p:nvSpPr>
-          <p:cNvPr id="37" name="Shape 35"/>
+          <p:cNvPr id="36" name="Shape 34"/>
           <p:cNvSpPr/>
           <p:nvPr/>
         </p:nvSpPr>
@@ -21383,7 +21305,7 @@
       </p:sp>
       <p:sp>
         <p:nvSpPr>
-          <p:cNvPr id="38" name="Text 36"/>
+          <p:cNvPr id="37" name="Text 35"/>
           <p:cNvSpPr/>
           <p:nvPr/>
         </p:nvSpPr>
@@ -21422,7 +21344,7 @@
       </p:sp>
       <p:sp>
         <p:nvSpPr>
-          <p:cNvPr id="39" name="Shape 37"/>
+          <p:cNvPr id="38" name="Shape 36"/>
           <p:cNvSpPr/>
           <p:nvPr/>
         </p:nvSpPr>
@@ -21449,7 +21371,7 @@
       </p:sp>
       <p:sp>
         <p:nvSpPr>
-          <p:cNvPr id="40" name="Text 38"/>
+          <p:cNvPr id="39" name="Text 37"/>
           <p:cNvSpPr/>
           <p:nvPr/>
         </p:nvSpPr>
@@ -21772,7 +21694,7 @@
                 <a:ea typeface="Calibri" pitchFamily="34" charset="-122"/>
                 <a:cs typeface="Calibri" pitchFamily="34" charset="-120"/>
               </a:rPr>
-              <a:t>Word Labs  •  wordlabs.app  •  Root: 'fect' = make, do, accomplish</a:t>
+              <a:t>Word Labs  •  wordlabs.app  •  Root: 'fect' = do, make, perform</a:t>
             </a:r>
             <a:endParaRPr lang="en-US" sz="800" dirty="0"/>
           </a:p>
@@ -21911,7 +21833,7 @@
                 <a:ea typeface="Trebuchet MS" pitchFamily="34" charset="-122"/>
                 <a:cs typeface="Trebuchet MS" pitchFamily="34" charset="-120"/>
               </a:rPr>
-              <a:t>effective</a:t>
+              <a:t>perfection</a:t>
             </a:r>
             <a:endParaRPr lang="en-US" sz="2800" dirty="0"/>
           </a:p>
@@ -22050,7 +21972,7 @@
                 <a:ea typeface="Trebuchet MS" pitchFamily="34" charset="-122"/>
                 <a:cs typeface="Trebuchet MS" pitchFamily="34" charset="-120"/>
               </a:rPr>
-              <a:t>ef</a:t>
+              <a:t>per</a:t>
             </a:r>
             <a:endParaRPr lang="en-US" sz="1300" dirty="0"/>
           </a:p>
@@ -22089,7 +22011,7 @@
                 <a:ea typeface="Calibri" pitchFamily="34" charset="-122"/>
                 <a:cs typeface="Calibri" pitchFamily="34" charset="-120"/>
               </a:rPr>
-              <a:t>out, from</a:t>
+              <a:t>through, completely</a:t>
             </a:r>
             <a:endParaRPr lang="en-US" sz="850" dirty="0"/>
           </a:p>
@@ -22097,46 +22019,7 @@
       </p:sp>
       <p:sp>
         <p:nvSpPr>
-          <p:cNvPr id="19" name="Text 17"/>
-          <p:cNvSpPr/>
-          <p:nvPr/>
-        </p:nvSpPr>
-        <p:spPr>
-          <a:xfrm>
-            <a:off x="2221992" y="2752344"/>
-            <a:ext cx="1828800" cy="182880"/>
-          </a:xfrm>
-          <a:prstGeom prst="rect">
-            <a:avLst/>
-          </a:prstGeom>
-          <a:noFill/>
-          <a:ln/>
-        </p:spPr>
-        <p:txBody>
-          <a:bodyPr wrap="square" lIns="0" tIns="0" rIns="0" bIns="0" rtlCol="0" anchor="t"/>
-          <a:lstStyle/>
-          <a:p>
-            <a:pPr algn="ctr" indent="0" marL="0">
-              <a:buNone/>
-            </a:pPr>
-            <a:r>
-              <a:rPr lang="en-US" sz="700" i="1" dirty="0">
-                <a:solidFill>
-                  <a:srgbClr val="94A3B8"/>
-                </a:solidFill>
-                <a:latin typeface="Calibri" pitchFamily="34" charset="0"/>
-                <a:ea typeface="Calibri" pitchFamily="34" charset="-122"/>
-                <a:cs typeface="Calibri" pitchFamily="34" charset="-120"/>
-              </a:rPr>
-              <a:t>ex → ef before 'f'</a:t>
-            </a:r>
-            <a:endParaRPr lang="en-US" sz="700" dirty="0"/>
-          </a:p>
-        </p:txBody>
-      </p:sp>
-      <p:sp>
-        <p:nvSpPr>
-          <p:cNvPr id="20" name="Shape 18"/>
+          <p:cNvPr id="19" name="Shape 17"/>
           <p:cNvSpPr/>
           <p:nvPr/>
         </p:nvSpPr>
@@ -22170,7 +22053,7 @@
       </p:sp>
       <p:sp>
         <p:nvSpPr>
-          <p:cNvPr id="21" name="Text 19"/>
+          <p:cNvPr id="20" name="Text 18"/>
           <p:cNvSpPr/>
           <p:nvPr/>
         </p:nvSpPr>
@@ -22209,7 +22092,7 @@
       </p:sp>
       <p:sp>
         <p:nvSpPr>
-          <p:cNvPr id="22" name="Text 20"/>
+          <p:cNvPr id="21" name="Text 19"/>
           <p:cNvSpPr/>
           <p:nvPr/>
         </p:nvSpPr>
@@ -22240,7 +22123,7 @@
                 <a:ea typeface="Calibri" pitchFamily="34" charset="-122"/>
                 <a:cs typeface="Calibri" pitchFamily="34" charset="-120"/>
               </a:rPr>
-              <a:t>make, do</a:t>
+              <a:t>do, make</a:t>
             </a:r>
             <a:endParaRPr lang="en-US" sz="850" dirty="0"/>
           </a:p>
@@ -22248,7 +22131,7 @@
       </p:sp>
       <p:sp>
         <p:nvSpPr>
-          <p:cNvPr id="23" name="Shape 21"/>
+          <p:cNvPr id="22" name="Shape 20"/>
           <p:cNvSpPr/>
           <p:nvPr/>
         </p:nvSpPr>
@@ -22282,7 +22165,7 @@
       </p:sp>
       <p:sp>
         <p:nvSpPr>
-          <p:cNvPr id="24" name="Text 22"/>
+          <p:cNvPr id="23" name="Text 21"/>
           <p:cNvSpPr/>
           <p:nvPr/>
         </p:nvSpPr>
@@ -22313,7 +22196,7 @@
                 <a:ea typeface="Trebuchet MS" pitchFamily="34" charset="-122"/>
                 <a:cs typeface="Trebuchet MS" pitchFamily="34" charset="-120"/>
               </a:rPr>
-              <a:t>ive</a:t>
+              <a:t>ion</a:t>
             </a:r>
             <a:endParaRPr lang="en-US" sz="1300" dirty="0"/>
           </a:p>
@@ -22321,7 +22204,7 @@
       </p:sp>
       <p:sp>
         <p:nvSpPr>
-          <p:cNvPr id="25" name="Text 23"/>
+          <p:cNvPr id="24" name="Text 22"/>
           <p:cNvSpPr/>
           <p:nvPr/>
         </p:nvSpPr>
@@ -22352,7 +22235,7 @@
                 <a:ea typeface="Calibri" pitchFamily="34" charset="-122"/>
                 <a:cs typeface="Calibri" pitchFamily="34" charset="-120"/>
               </a:rPr>
-              <a:t>having the quality of</a:t>
+              <a:t>state or process of</a:t>
             </a:r>
             <a:endParaRPr lang="en-US" sz="850" dirty="0"/>
           </a:p>
@@ -22360,7 +22243,7 @@
       </p:sp>
       <p:sp>
         <p:nvSpPr>
-          <p:cNvPr id="26" name="Shape 24"/>
+          <p:cNvPr id="25" name="Shape 23"/>
           <p:cNvSpPr/>
           <p:nvPr/>
         </p:nvSpPr>
@@ -22387,7 +22270,7 @@
       </p:sp>
       <p:sp>
         <p:nvSpPr>
-          <p:cNvPr id="27" name="Text 25"/>
+          <p:cNvPr id="26" name="Text 24"/>
           <p:cNvSpPr/>
           <p:nvPr/>
         </p:nvSpPr>
@@ -22426,7 +22309,7 @@
       </p:sp>
       <p:sp>
         <p:nvSpPr>
-          <p:cNvPr id="28" name="Shape 26"/>
+          <p:cNvPr id="27" name="Shape 25"/>
           <p:cNvSpPr/>
           <p:nvPr/>
         </p:nvSpPr>
@@ -22453,7 +22336,7 @@
       </p:sp>
       <p:sp>
         <p:nvSpPr>
-          <p:cNvPr id="29" name="Shape 27"/>
+          <p:cNvPr id="28" name="Shape 26"/>
           <p:cNvSpPr/>
           <p:nvPr/>
         </p:nvSpPr>
@@ -22480,7 +22363,7 @@
       </p:sp>
       <p:sp>
         <p:nvSpPr>
-          <p:cNvPr id="30" name="Text 28"/>
+          <p:cNvPr id="29" name="Text 27"/>
           <p:cNvSpPr/>
           <p:nvPr/>
         </p:nvSpPr>
@@ -22511,7 +22394,7 @@
                 <a:ea typeface="Trebuchet MS" pitchFamily="34" charset="-122"/>
                 <a:cs typeface="Trebuchet MS" pitchFamily="34" charset="-120"/>
               </a:rPr>
-              <a:t>ef</a:t>
+              <a:t>per</a:t>
             </a:r>
             <a:endParaRPr lang="en-US" sz="1400" dirty="0"/>
           </a:p>
@@ -22519,7 +22402,7 @@
       </p:sp>
       <p:sp>
         <p:nvSpPr>
-          <p:cNvPr id="31" name="Text 29"/>
+          <p:cNvPr id="30" name="Text 28"/>
           <p:cNvSpPr/>
           <p:nvPr/>
         </p:nvSpPr>
@@ -22558,7 +22441,7 @@
       </p:sp>
       <p:sp>
         <p:nvSpPr>
-          <p:cNvPr id="32" name="Shape 30"/>
+          <p:cNvPr id="31" name="Shape 29"/>
           <p:cNvSpPr/>
           <p:nvPr/>
         </p:nvSpPr>
@@ -22585,7 +22468,7 @@
       </p:sp>
       <p:sp>
         <p:nvSpPr>
-          <p:cNvPr id="33" name="Text 31"/>
+          <p:cNvPr id="32" name="Text 30"/>
           <p:cNvSpPr/>
           <p:nvPr/>
         </p:nvSpPr>
@@ -22624,7 +22507,7 @@
       </p:sp>
       <p:sp>
         <p:nvSpPr>
-          <p:cNvPr id="34" name="Text 32"/>
+          <p:cNvPr id="33" name="Text 31"/>
           <p:cNvSpPr/>
           <p:nvPr/>
         </p:nvSpPr>
@@ -22663,7 +22546,7 @@
       </p:sp>
       <p:sp>
         <p:nvSpPr>
-          <p:cNvPr id="35" name="Shape 33"/>
+          <p:cNvPr id="34" name="Shape 32"/>
           <p:cNvSpPr/>
           <p:nvPr/>
         </p:nvSpPr>
@@ -22690,7 +22573,7 @@
       </p:sp>
       <p:sp>
         <p:nvSpPr>
-          <p:cNvPr id="36" name="Text 34"/>
+          <p:cNvPr id="35" name="Text 33"/>
           <p:cNvSpPr/>
           <p:nvPr/>
         </p:nvSpPr>
@@ -22721,7 +22604,7 @@
                 <a:ea typeface="Trebuchet MS" pitchFamily="34" charset="-122"/>
                 <a:cs typeface="Trebuchet MS" pitchFamily="34" charset="-120"/>
               </a:rPr>
-              <a:t>tive</a:t>
+              <a:t>tion</a:t>
             </a:r>
             <a:endParaRPr lang="en-US" sz="1400" dirty="0"/>
           </a:p>
@@ -22729,7 +22612,7 @@
       </p:sp>
       <p:sp>
         <p:nvSpPr>
-          <p:cNvPr id="37" name="Shape 35"/>
+          <p:cNvPr id="36" name="Shape 34"/>
           <p:cNvSpPr/>
           <p:nvPr/>
         </p:nvSpPr>
@@ -22756,7 +22639,7 @@
       </p:sp>
       <p:sp>
         <p:nvSpPr>
-          <p:cNvPr id="38" name="Text 36"/>
+          <p:cNvPr id="37" name="Text 35"/>
           <p:cNvSpPr/>
           <p:nvPr/>
         </p:nvSpPr>
@@ -22795,7 +22678,7 @@
       </p:sp>
       <p:sp>
         <p:nvSpPr>
-          <p:cNvPr id="39" name="Shape 37"/>
+          <p:cNvPr id="38" name="Shape 36"/>
           <p:cNvSpPr/>
           <p:nvPr/>
         </p:nvSpPr>
@@ -22822,7 +22705,7 @@
       </p:sp>
       <p:sp>
         <p:nvSpPr>
-          <p:cNvPr id="40" name="Shape 38"/>
+          <p:cNvPr id="39" name="Shape 37"/>
           <p:cNvSpPr/>
           <p:nvPr/>
         </p:nvSpPr>
@@ -22849,7 +22732,7 @@
       </p:sp>
       <p:sp>
         <p:nvSpPr>
-          <p:cNvPr id="41" name="Text 39"/>
+          <p:cNvPr id="40" name="Text 38"/>
           <p:cNvSpPr/>
           <p:nvPr/>
         </p:nvSpPr>
@@ -22880,7 +22763,7 @@
                 <a:ea typeface="Trebuchet MS" pitchFamily="34" charset="-122"/>
                 <a:cs typeface="Trebuchet MS" pitchFamily="34" charset="-120"/>
               </a:rPr>
-              <a:t>e</a:t>
+              <a:t>p</a:t>
             </a:r>
             <a:endParaRPr lang="en-US" sz="900" dirty="0"/>
           </a:p>
@@ -22888,7 +22771,7 @@
       </p:sp>
       <p:sp>
         <p:nvSpPr>
-          <p:cNvPr id="42" name="Shape 40"/>
+          <p:cNvPr id="41" name="Shape 39"/>
           <p:cNvSpPr/>
           <p:nvPr/>
         </p:nvSpPr>
@@ -22915,7 +22798,7 @@
       </p:sp>
       <p:sp>
         <p:nvSpPr>
-          <p:cNvPr id="43" name="Text 41"/>
+          <p:cNvPr id="42" name="Text 40"/>
           <p:cNvSpPr/>
           <p:nvPr/>
         </p:nvSpPr>
@@ -22946,7 +22829,7 @@
                 <a:ea typeface="Trebuchet MS" pitchFamily="34" charset="-122"/>
                 <a:cs typeface="Trebuchet MS" pitchFamily="34" charset="-120"/>
               </a:rPr>
-              <a:t>ff</a:t>
+              <a:t>er</a:t>
             </a:r>
             <a:endParaRPr lang="en-US" sz="900" dirty="0"/>
           </a:p>
@@ -22954,7 +22837,7 @@
       </p:sp>
       <p:sp>
         <p:nvSpPr>
-          <p:cNvPr id="44" name="Shape 42"/>
+          <p:cNvPr id="43" name="Shape 41"/>
           <p:cNvSpPr/>
           <p:nvPr/>
         </p:nvSpPr>
@@ -22981,7 +22864,7 @@
       </p:sp>
       <p:sp>
         <p:nvSpPr>
-          <p:cNvPr id="45" name="Text 43"/>
+          <p:cNvPr id="44" name="Text 42"/>
           <p:cNvSpPr/>
           <p:nvPr/>
         </p:nvSpPr>
@@ -23012,7 +22895,7 @@
                 <a:ea typeface="Trebuchet MS" pitchFamily="34" charset="-122"/>
                 <a:cs typeface="Trebuchet MS" pitchFamily="34" charset="-120"/>
               </a:rPr>
-              <a:t>e</a:t>
+              <a:t>f</a:t>
             </a:r>
             <a:endParaRPr lang="en-US" sz="900" dirty="0"/>
           </a:p>
@@ -23020,7 +22903,7 @@
       </p:sp>
       <p:sp>
         <p:nvSpPr>
-          <p:cNvPr id="46" name="Shape 44"/>
+          <p:cNvPr id="45" name="Shape 43"/>
           <p:cNvSpPr/>
           <p:nvPr/>
         </p:nvSpPr>
@@ -23047,7 +22930,7 @@
       </p:sp>
       <p:sp>
         <p:nvSpPr>
-          <p:cNvPr id="47" name="Text 45"/>
+          <p:cNvPr id="46" name="Text 44"/>
           <p:cNvSpPr/>
           <p:nvPr/>
         </p:nvSpPr>
@@ -23078,6 +22961,72 @@
                 <a:ea typeface="Trebuchet MS" pitchFamily="34" charset="-122"/>
                 <a:cs typeface="Trebuchet MS" pitchFamily="34" charset="-120"/>
               </a:rPr>
+              <a:t>e</a:t>
+            </a:r>
+            <a:endParaRPr lang="en-US" sz="900" dirty="0"/>
+          </a:p>
+        </p:txBody>
+      </p:sp>
+      <p:sp>
+        <p:nvSpPr>
+          <p:cNvPr id="47" name="Shape 45"/>
+          <p:cNvSpPr/>
+          <p:nvPr/>
+        </p:nvSpPr>
+        <p:spPr>
+          <a:xfrm>
+            <a:off x="5759577" y="4169664"/>
+            <a:ext cx="685800" cy="384048"/>
+          </a:xfrm>
+          <a:prstGeom prst="rect">
+            <a:avLst>
+              <a:gd name="adj" fmla="val 9524"/>
+            </a:avLst>
+          </a:prstGeom>
+          <a:solidFill>
+            <a:srgbClr val="FFFFFF"/>
+          </a:solidFill>
+          <a:ln w="12700">
+            <a:solidFill>
+              <a:srgbClr val="DB2777"/>
+            </a:solidFill>
+            <a:prstDash val="solid"/>
+          </a:ln>
+        </p:spPr>
+      </p:sp>
+      <p:sp>
+        <p:nvSpPr>
+          <p:cNvPr id="48" name="Text 46"/>
+          <p:cNvSpPr/>
+          <p:nvPr/>
+        </p:nvSpPr>
+        <p:spPr>
+          <a:xfrm>
+            <a:off x="5759577" y="4169664"/>
+            <a:ext cx="685800" cy="384048"/>
+          </a:xfrm>
+          <a:prstGeom prst="rect">
+            <a:avLst/>
+          </a:prstGeom>
+          <a:noFill/>
+          <a:ln/>
+        </p:spPr>
+        <p:txBody>
+          <a:bodyPr wrap="square" lIns="0" tIns="0" rIns="0" bIns="0" rtlCol="0" anchor="ctr"/>
+          <a:lstStyle/>
+          <a:p>
+            <a:pPr algn="ctr" indent="0" marL="0">
+              <a:buNone/>
+            </a:pPr>
+            <a:r>
+              <a:rPr lang="en-US" sz="900" b="1" dirty="0">
+                <a:solidFill>
+                  <a:srgbClr val="9D174D"/>
+                </a:solidFill>
+                <a:latin typeface="Trebuchet MS" pitchFamily="34" charset="0"/>
+                <a:ea typeface="Trebuchet MS" pitchFamily="34" charset="-122"/>
+                <a:cs typeface="Trebuchet MS" pitchFamily="34" charset="-120"/>
+              </a:rPr>
               <a:t>c</a:t>
             </a:r>
             <a:endParaRPr lang="en-US" sz="900" dirty="0"/>
@@ -23086,13 +23035,13 @@
       </p:sp>
       <p:sp>
         <p:nvSpPr>
-          <p:cNvPr id="48" name="Text 46"/>
-          <p:cNvSpPr/>
-          <p:nvPr/>
-        </p:nvSpPr>
-        <p:spPr>
-          <a:xfrm>
-            <a:off x="4850892" y="4572000"/>
+          <p:cNvPr id="49" name="Text 47"/>
+          <p:cNvSpPr/>
+          <p:nvPr/>
+        </p:nvSpPr>
+        <p:spPr>
+          <a:xfrm>
+            <a:off x="5759577" y="4572000"/>
             <a:ext cx="685800" cy="219456"/>
           </a:xfrm>
           <a:prstGeom prst="rect">
@@ -23125,13 +23074,13 @@
       </p:sp>
       <p:sp>
         <p:nvSpPr>
-          <p:cNvPr id="49" name="Shape 47"/>
-          <p:cNvSpPr/>
-          <p:nvPr/>
-        </p:nvSpPr>
-        <p:spPr>
-          <a:xfrm>
-            <a:off x="5759577" y="4169664"/>
+          <p:cNvPr id="50" name="Shape 48"/>
+          <p:cNvSpPr/>
+          <p:nvPr/>
+        </p:nvSpPr>
+        <p:spPr>
+          <a:xfrm>
+            <a:off x="6668262" y="4169664"/>
             <a:ext cx="685800" cy="384048"/>
           </a:xfrm>
           <a:prstGeom prst="rect">
@@ -23152,13 +23101,13 @@
       </p:sp>
       <p:sp>
         <p:nvSpPr>
-          <p:cNvPr id="50" name="Text 48"/>
-          <p:cNvSpPr/>
-          <p:nvPr/>
-        </p:nvSpPr>
-        <p:spPr>
-          <a:xfrm>
-            <a:off x="5759577" y="4169664"/>
+          <p:cNvPr id="51" name="Text 49"/>
+          <p:cNvSpPr/>
+          <p:nvPr/>
+        </p:nvSpPr>
+        <p:spPr>
+          <a:xfrm>
+            <a:off x="6668262" y="4169664"/>
             <a:ext cx="685800" cy="384048"/>
           </a:xfrm>
           <a:prstGeom prst="rect">
@@ -23191,13 +23140,13 @@
       </p:sp>
       <p:sp>
         <p:nvSpPr>
-          <p:cNvPr id="51" name="Shape 49"/>
-          <p:cNvSpPr/>
-          <p:nvPr/>
-        </p:nvSpPr>
-        <p:spPr>
-          <a:xfrm>
-            <a:off x="6668262" y="4169664"/>
+          <p:cNvPr id="52" name="Shape 50"/>
+          <p:cNvSpPr/>
+          <p:nvPr/>
+        </p:nvSpPr>
+        <p:spPr>
+          <a:xfrm>
+            <a:off x="7576947" y="4169664"/>
             <a:ext cx="685800" cy="384048"/>
           </a:xfrm>
           <a:prstGeom prst="rect">
@@ -23218,13 +23167,13 @@
       </p:sp>
       <p:sp>
         <p:nvSpPr>
-          <p:cNvPr id="52" name="Text 50"/>
-          <p:cNvSpPr/>
-          <p:nvPr/>
-        </p:nvSpPr>
-        <p:spPr>
-          <a:xfrm>
-            <a:off x="6668262" y="4169664"/>
+          <p:cNvPr id="53" name="Text 51"/>
+          <p:cNvSpPr/>
+          <p:nvPr/>
+        </p:nvSpPr>
+        <p:spPr>
+          <a:xfrm>
+            <a:off x="7576947" y="4169664"/>
             <a:ext cx="685800" cy="384048"/>
           </a:xfrm>
           <a:prstGeom prst="rect">
@@ -23249,7 +23198,7 @@
                 <a:ea typeface="Trebuchet MS" pitchFamily="34" charset="-122"/>
                 <a:cs typeface="Trebuchet MS" pitchFamily="34" charset="-120"/>
               </a:rPr>
-              <a:t>i</a:t>
+              <a:t>ion</a:t>
             </a:r>
             <a:endParaRPr lang="en-US" sz="900" dirty="0"/>
           </a:p>
@@ -23257,73 +23206,7 @@
       </p:sp>
       <p:sp>
         <p:nvSpPr>
-          <p:cNvPr id="53" name="Shape 51"/>
-          <p:cNvSpPr/>
-          <p:nvPr/>
-        </p:nvSpPr>
-        <p:spPr>
-          <a:xfrm>
-            <a:off x="7576947" y="4169664"/>
-            <a:ext cx="685800" cy="384048"/>
-          </a:xfrm>
-          <a:prstGeom prst="rect">
-            <a:avLst>
-              <a:gd name="adj" fmla="val 9524"/>
-            </a:avLst>
-          </a:prstGeom>
-          <a:solidFill>
-            <a:srgbClr val="FFFFFF"/>
-          </a:solidFill>
-          <a:ln w="12700">
-            <a:solidFill>
-              <a:srgbClr val="DB2777"/>
-            </a:solidFill>
-            <a:prstDash val="solid"/>
-          </a:ln>
-        </p:spPr>
-      </p:sp>
-      <p:sp>
-        <p:nvSpPr>
           <p:cNvPr id="54" name="Text 52"/>
-          <p:cNvSpPr/>
-          <p:nvPr/>
-        </p:nvSpPr>
-        <p:spPr>
-          <a:xfrm>
-            <a:off x="7576947" y="4169664"/>
-            <a:ext cx="685800" cy="384048"/>
-          </a:xfrm>
-          <a:prstGeom prst="rect">
-            <a:avLst/>
-          </a:prstGeom>
-          <a:noFill/>
-          <a:ln/>
-        </p:spPr>
-        <p:txBody>
-          <a:bodyPr wrap="square" lIns="0" tIns="0" rIns="0" bIns="0" rtlCol="0" anchor="ctr"/>
-          <a:lstStyle/>
-          <a:p>
-            <a:pPr algn="ctr" indent="0" marL="0">
-              <a:buNone/>
-            </a:pPr>
-            <a:r>
-              <a:rPr lang="en-US" sz="900" b="1" dirty="0">
-                <a:solidFill>
-                  <a:srgbClr val="9D174D"/>
-                </a:solidFill>
-                <a:latin typeface="Trebuchet MS" pitchFamily="34" charset="0"/>
-                <a:ea typeface="Trebuchet MS" pitchFamily="34" charset="-122"/>
-                <a:cs typeface="Trebuchet MS" pitchFamily="34" charset="-120"/>
-              </a:rPr>
-              <a:t>ve</a:t>
-            </a:r>
-            <a:endParaRPr lang="en-US" sz="900" dirty="0"/>
-          </a:p>
-        </p:txBody>
-      </p:sp>
-      <p:sp>
-        <p:nvSpPr>
-          <p:cNvPr id="55" name="Text 53"/>
           <p:cNvSpPr/>
           <p:nvPr/>
         </p:nvSpPr>
@@ -23354,7 +23237,7 @@
                 <a:ea typeface="Calibri" pitchFamily="34" charset="-122"/>
                 <a:cs typeface="Calibri" pitchFamily="34" charset="-120"/>
               </a:rPr>
-              <a:t>/v/</a:t>
+              <a:t>/shun/</a:t>
             </a:r>
             <a:endParaRPr lang="en-US" sz="750" dirty="0"/>
           </a:p>
@@ -23646,7 +23529,7 @@
                 <a:ea typeface="Calibri" pitchFamily="34" charset="-122"/>
                 <a:cs typeface="Calibri" pitchFamily="34" charset="-120"/>
               </a:rPr>
-              <a:t>Word Labs  •  wordlabs.app  •  Root: 'fect' = make, do, accomplish</a:t>
+              <a:t>Word Labs  •  wordlabs.app  •  Root: 'fect' = do, make, perform</a:t>
             </a:r>
             <a:endParaRPr lang="en-US" sz="800" dirty="0"/>
           </a:p>
@@ -23785,7 +23668,7 @@
                 <a:ea typeface="Trebuchet MS" pitchFamily="34" charset="-122"/>
                 <a:cs typeface="Trebuchet MS" pitchFamily="34" charset="-120"/>
               </a:rPr>
-              <a:t>perfectly</a:t>
+              <a:t>defect</a:t>
             </a:r>
             <a:endParaRPr lang="en-US" sz="2800" dirty="0"/>
           </a:p>
@@ -24473,7 +24356,7 @@
                 <a:ea typeface="Calibri" pitchFamily="34" charset="-122"/>
                 <a:cs typeface="Calibri" pitchFamily="34" charset="-120"/>
               </a:rPr>
-              <a:t>Word Labs  •  wordlabs.app  •  Root: 'fect' = make, do, accomplish</a:t>
+              <a:t>Word Labs  •  wordlabs.app  •  Root: 'fect' = do, make, perform</a:t>
             </a:r>
             <a:endParaRPr lang="en-US" sz="800" dirty="0"/>
           </a:p>
@@ -24612,7 +24495,7 @@
                 <a:ea typeface="Trebuchet MS" pitchFamily="34" charset="-122"/>
                 <a:cs typeface="Trebuchet MS" pitchFamily="34" charset="-120"/>
               </a:rPr>
-              <a:t>perfectly</a:t>
+              <a:t>defect</a:t>
             </a:r>
             <a:endParaRPr lang="en-US" sz="2800" dirty="0"/>
           </a:p>
@@ -24692,7 +24575,7 @@
         </p:nvSpPr>
         <p:spPr>
           <a:xfrm>
-            <a:off x="2221992" y="2258568"/>
+            <a:off x="2938272" y="2258568"/>
             <a:ext cx="1828800" cy="292608"/>
           </a:xfrm>
           <a:prstGeom prst="rect">
@@ -24726,7 +24609,7 @@
         </p:nvSpPr>
         <p:spPr>
           <a:xfrm>
-            <a:off x="2221992" y="2258568"/>
+            <a:off x="2938272" y="2258568"/>
             <a:ext cx="1828800" cy="292608"/>
           </a:xfrm>
           <a:prstGeom prst="rect">
@@ -24751,7 +24634,7 @@
                 <a:ea typeface="Trebuchet MS" pitchFamily="34" charset="-122"/>
                 <a:cs typeface="Trebuchet MS" pitchFamily="34" charset="-120"/>
               </a:rPr>
-              <a:t>per</a:t>
+              <a:t>de</a:t>
             </a:r>
             <a:endParaRPr lang="en-US" sz="1300" dirty="0"/>
           </a:p>
@@ -24765,7 +24648,7 @@
         </p:nvSpPr>
         <p:spPr>
           <a:xfrm>
-            <a:off x="2221992" y="2569464"/>
+            <a:off x="2938272" y="2569464"/>
             <a:ext cx="1828800" cy="201168"/>
           </a:xfrm>
           <a:prstGeom prst="rect">
@@ -24790,7 +24673,7 @@
                 <a:ea typeface="Calibri" pitchFamily="34" charset="-122"/>
                 <a:cs typeface="Calibri" pitchFamily="34" charset="-120"/>
               </a:rPr>
-              <a:t>through, completely</a:t>
+              <a:t>away from, down</a:t>
             </a:r>
             <a:endParaRPr lang="en-US" sz="850" dirty="0"/>
           </a:p>
@@ -24804,7 +24687,7 @@
         </p:nvSpPr>
         <p:spPr>
           <a:xfrm>
-            <a:off x="4370832" y="2258568"/>
+            <a:off x="5803392" y="2258568"/>
             <a:ext cx="1828800" cy="292608"/>
           </a:xfrm>
           <a:prstGeom prst="rect">
@@ -24838,7 +24721,7 @@
         </p:nvSpPr>
         <p:spPr>
           <a:xfrm>
-            <a:off x="4370832" y="2258568"/>
+            <a:off x="5803392" y="2258568"/>
             <a:ext cx="1828800" cy="292608"/>
           </a:xfrm>
           <a:prstGeom prst="rect">
@@ -24877,7 +24760,7 @@
         </p:nvSpPr>
         <p:spPr>
           <a:xfrm>
-            <a:off x="4370832" y="2569464"/>
+            <a:off x="5803392" y="2569464"/>
             <a:ext cx="1828800" cy="201168"/>
           </a:xfrm>
           <a:prstGeom prst="rect">
@@ -24902,7 +24785,7 @@
                 <a:ea typeface="Calibri" pitchFamily="34" charset="-122"/>
                 <a:cs typeface="Calibri" pitchFamily="34" charset="-120"/>
               </a:rPr>
-              <a:t>make, do</a:t>
+              <a:t>do, make</a:t>
             </a:r>
             <a:endParaRPr lang="en-US" sz="850" dirty="0"/>
           </a:p>
@@ -24916,30 +24799,23 @@
         </p:nvSpPr>
         <p:spPr>
           <a:xfrm>
-            <a:off x="6519672" y="2258568"/>
-            <a:ext cx="1828800" cy="292608"/>
+            <a:off x="365760" y="3273552"/>
+            <a:ext cx="1371600" cy="658368"/>
           </a:xfrm>
           <a:prstGeom prst="rect">
             <a:avLst>
-              <a:gd name="adj" fmla="val 25000"/>
+              <a:gd name="adj" fmla="val 8333"/>
             </a:avLst>
           </a:prstGeom>
           <a:solidFill>
-            <a:srgbClr val="FCE7F3"/>
-          </a:solidFill>
-          <a:ln w="19050">
-            <a:solidFill>
-              <a:srgbClr val="DB2777"/>
-            </a:solidFill>
-            <a:prstDash val="solid"/>
-          </a:ln>
-          <a:effectLst>
-            <a:outerShdw sx="100000" sy="100000" kx="0" ky="0" algn="bl" rotWithShape="0" blurRad="101600" dist="38100" dir="8100000">
-              <a:srgbClr val="000000">
-                <a:alpha val="12000"/>
-              </a:srgbClr>
-            </a:outerShdw>
-          </a:effectLst>
+            <a:srgbClr val="E2E8F0"/>
+          </a:solidFill>
+          <a:ln w="12700">
+            <a:solidFill>
+              <a:srgbClr val="E2E8F0"/>
+            </a:solidFill>
+            <a:prstDash val="solid"/>
+          </a:ln>
         </p:spPr>
       </p:sp>
       <p:sp>
@@ -24950,8 +24826,8 @@
         </p:nvSpPr>
         <p:spPr>
           <a:xfrm>
-            <a:off x="6519672" y="2258568"/>
-            <a:ext cx="1828800" cy="292608"/>
+            <a:off x="365760" y="3273552"/>
+            <a:ext cx="1371600" cy="658368"/>
           </a:xfrm>
           <a:prstGeom prst="rect">
             <a:avLst/>
@@ -24967,73 +24843,100 @@
               <a:buNone/>
             </a:pPr>
             <a:r>
-              <a:rPr lang="en-US" sz="1300" b="1" dirty="0">
-                <a:solidFill>
-                  <a:srgbClr val="9D174D"/>
+              <a:rPr lang="en-US" sz="1100" b="1" dirty="0">
+                <a:solidFill>
+                  <a:srgbClr val="475569"/>
                 </a:solidFill>
                 <a:latin typeface="Trebuchet MS" pitchFamily="34" charset="0"/>
                 <a:ea typeface="Trebuchet MS" pitchFamily="34" charset="-122"/>
                 <a:cs typeface="Trebuchet MS" pitchFamily="34" charset="-120"/>
               </a:rPr>
-              <a:t>ly</a:t>
-            </a:r>
-            <a:endParaRPr lang="en-US" sz="1300" dirty="0"/>
-          </a:p>
-        </p:txBody>
-      </p:sp>
-      <p:sp>
-        <p:nvSpPr>
-          <p:cNvPr id="24" name="Text 22"/>
-          <p:cNvSpPr/>
-          <p:nvPr/>
-        </p:nvSpPr>
-        <p:spPr>
-          <a:xfrm>
-            <a:off x="6519672" y="2569464"/>
-            <a:ext cx="1828800" cy="201168"/>
-          </a:xfrm>
-          <a:prstGeom prst="rect">
-            <a:avLst/>
-          </a:prstGeom>
-          <a:noFill/>
-          <a:ln/>
-        </p:spPr>
-        <p:txBody>
-          <a:bodyPr wrap="square" lIns="0" tIns="0" rIns="0" bIns="0" rtlCol="0" anchor="t"/>
-          <a:lstStyle/>
-          <a:p>
-            <a:pPr algn="ctr" indent="0" marL="0">
-              <a:buNone/>
-            </a:pPr>
-            <a:r>
-              <a:rPr lang="en-US" sz="850" dirty="0">
-                <a:solidFill>
-                  <a:srgbClr val="475569"/>
+              <a:t>Syllables</a:t>
+            </a:r>
+            <a:endParaRPr lang="en-US" sz="1100" dirty="0"/>
+          </a:p>
+        </p:txBody>
+      </p:sp>
+      <p:sp>
+        <p:nvSpPr>
+          <p:cNvPr id="24" name="Shape 22"/>
+          <p:cNvSpPr/>
+          <p:nvPr/>
+        </p:nvSpPr>
+        <p:spPr>
+          <a:xfrm>
+            <a:off x="1874520" y="3273552"/>
+            <a:ext cx="6903720" cy="658368"/>
+          </a:xfrm>
+          <a:prstGeom prst="rect">
+            <a:avLst>
+              <a:gd name="adj" fmla="val 8333"/>
+            </a:avLst>
+          </a:prstGeom>
+          <a:solidFill>
+            <a:srgbClr val="F8FAFC"/>
+          </a:solidFill>
+          <a:ln w="12700">
+            <a:solidFill>
+              <a:srgbClr val="E2E8F0"/>
+            </a:solidFill>
+            <a:prstDash val="dash"/>
+          </a:ln>
+        </p:spPr>
+      </p:sp>
+      <p:sp>
+        <p:nvSpPr>
+          <p:cNvPr id="25" name="Text 23"/>
+          <p:cNvSpPr/>
+          <p:nvPr/>
+        </p:nvSpPr>
+        <p:spPr>
+          <a:xfrm>
+            <a:off x="1874520" y="3273552"/>
+            <a:ext cx="6903720" cy="658368"/>
+          </a:xfrm>
+          <a:prstGeom prst="rect">
+            <a:avLst/>
+          </a:prstGeom>
+          <a:noFill/>
+          <a:ln/>
+        </p:spPr>
+        <p:txBody>
+          <a:bodyPr wrap="square" rtlCol="0" anchor="ctr"/>
+          <a:lstStyle/>
+          <a:p>
+            <a:pPr algn="ctr" indent="0" marL="0">
+              <a:buNone/>
+            </a:pPr>
+            <a:r>
+              <a:rPr lang="en-US" sz="1100" i="1" dirty="0">
+                <a:solidFill>
+                  <a:srgbClr val="CBD5E1"/>
                 </a:solidFill>
                 <a:latin typeface="Calibri" pitchFamily="34" charset="0"/>
                 <a:ea typeface="Calibri" pitchFamily="34" charset="-122"/>
                 <a:cs typeface="Calibri" pitchFamily="34" charset="-120"/>
               </a:rPr>
-              <a:t>in a certain way</a:t>
-            </a:r>
-            <a:endParaRPr lang="en-US" sz="850" dirty="0"/>
-          </a:p>
-        </p:txBody>
-      </p:sp>
-      <p:sp>
-        <p:nvSpPr>
-          <p:cNvPr id="25" name="Shape 23"/>
-          <p:cNvSpPr/>
-          <p:nvPr/>
-        </p:nvSpPr>
-        <p:spPr>
-          <a:xfrm>
-            <a:off x="365760" y="3273552"/>
-            <a:ext cx="1371600" cy="658368"/>
+              <a:t>Write here...</a:t>
+            </a:r>
+            <a:endParaRPr lang="en-US" sz="1100" dirty="0"/>
+          </a:p>
+        </p:txBody>
+      </p:sp>
+      <p:sp>
+        <p:nvSpPr>
+          <p:cNvPr id="26" name="Shape 24"/>
+          <p:cNvSpPr/>
+          <p:nvPr/>
+        </p:nvSpPr>
+        <p:spPr>
+          <a:xfrm>
+            <a:off x="365760" y="4096512"/>
+            <a:ext cx="1371600" cy="804672"/>
           </a:xfrm>
           <a:prstGeom prst="rect">
             <a:avLst>
-              <a:gd name="adj" fmla="val 8333"/>
+              <a:gd name="adj" fmla="val 6818"/>
             </a:avLst>
           </a:prstGeom>
           <a:solidFill>
@@ -25049,14 +24952,14 @@
       </p:sp>
       <p:sp>
         <p:nvSpPr>
-          <p:cNvPr id="26" name="Text 24"/>
-          <p:cNvSpPr/>
-          <p:nvPr/>
-        </p:nvSpPr>
-        <p:spPr>
-          <a:xfrm>
-            <a:off x="365760" y="3273552"/>
-            <a:ext cx="1371600" cy="658368"/>
+          <p:cNvPr id="27" name="Text 25"/>
+          <p:cNvSpPr/>
+          <p:nvPr/>
+        </p:nvSpPr>
+        <p:spPr>
+          <a:xfrm>
+            <a:off x="365760" y="4096512"/>
+            <a:ext cx="1371600" cy="804672"/>
           </a:xfrm>
           <a:prstGeom prst="rect">
             <a:avLst/>
@@ -25080,7 +24983,7 @@
                 <a:ea typeface="Trebuchet MS" pitchFamily="34" charset="-122"/>
                 <a:cs typeface="Trebuchet MS" pitchFamily="34" charset="-120"/>
               </a:rPr>
-              <a:t>Syllables</a:t>
+              <a:t>Phonemes</a:t>
             </a:r>
             <a:endParaRPr lang="en-US" sz="1100" dirty="0"/>
           </a:p>
@@ -25088,80 +24991,14 @@
       </p:sp>
       <p:sp>
         <p:nvSpPr>
-          <p:cNvPr id="27" name="Shape 25"/>
-          <p:cNvSpPr/>
-          <p:nvPr/>
-        </p:nvSpPr>
-        <p:spPr>
-          <a:xfrm>
-            <a:off x="1874520" y="3273552"/>
-            <a:ext cx="6903720" cy="658368"/>
-          </a:xfrm>
-          <a:prstGeom prst="rect">
-            <a:avLst>
-              <a:gd name="adj" fmla="val 8333"/>
-            </a:avLst>
-          </a:prstGeom>
-          <a:solidFill>
-            <a:srgbClr val="F8FAFC"/>
-          </a:solidFill>
-          <a:ln w="12700">
-            <a:solidFill>
-              <a:srgbClr val="E2E8F0"/>
-            </a:solidFill>
-            <a:prstDash val="dash"/>
-          </a:ln>
-        </p:spPr>
-      </p:sp>
-      <p:sp>
-        <p:nvSpPr>
-          <p:cNvPr id="28" name="Text 26"/>
-          <p:cNvSpPr/>
-          <p:nvPr/>
-        </p:nvSpPr>
-        <p:spPr>
-          <a:xfrm>
-            <a:off x="1874520" y="3273552"/>
-            <a:ext cx="6903720" cy="658368"/>
-          </a:xfrm>
-          <a:prstGeom prst="rect">
-            <a:avLst/>
-          </a:prstGeom>
-          <a:noFill/>
-          <a:ln/>
-        </p:spPr>
-        <p:txBody>
-          <a:bodyPr wrap="square" rtlCol="0" anchor="ctr"/>
-          <a:lstStyle/>
-          <a:p>
-            <a:pPr algn="ctr" indent="0" marL="0">
-              <a:buNone/>
-            </a:pPr>
-            <a:r>
-              <a:rPr lang="en-US" sz="1100" i="1" dirty="0">
-                <a:solidFill>
-                  <a:srgbClr val="CBD5E1"/>
-                </a:solidFill>
-                <a:latin typeface="Calibri" pitchFamily="34" charset="0"/>
-                <a:ea typeface="Calibri" pitchFamily="34" charset="-122"/>
-                <a:cs typeface="Calibri" pitchFamily="34" charset="-120"/>
-              </a:rPr>
-              <a:t>Write here...</a:t>
-            </a:r>
-            <a:endParaRPr lang="en-US" sz="1100" dirty="0"/>
-          </a:p>
-        </p:txBody>
-      </p:sp>
-      <p:sp>
-        <p:nvSpPr>
-          <p:cNvPr id="29" name="Shape 27"/>
-          <p:cNvSpPr/>
-          <p:nvPr/>
-        </p:nvSpPr>
-        <p:spPr>
-          <a:xfrm>
-            <a:off x="365760" y="4096512"/>
-            <a:ext cx="1371600" cy="804672"/>
+          <p:cNvPr id="28" name="Shape 26"/>
+          <p:cNvSpPr/>
+          <p:nvPr/>
+        </p:nvSpPr>
+        <p:spPr>
+          <a:xfrm>
+            <a:off x="1874520" y="4096512"/>
+            <a:ext cx="6903720" cy="804672"/>
           </a:xfrm>
           <a:prstGeom prst="rect">
             <a:avLst>
@@ -25169,85 +25006,19 @@
             </a:avLst>
           </a:prstGeom>
           <a:solidFill>
-            <a:srgbClr val="E2E8F0"/>
+            <a:srgbClr val="F8FAFC"/>
           </a:solidFill>
           <a:ln w="12700">
             <a:solidFill>
               <a:srgbClr val="E2E8F0"/>
             </a:solidFill>
-            <a:prstDash val="solid"/>
-          </a:ln>
-        </p:spPr>
-      </p:sp>
-      <p:sp>
-        <p:nvSpPr>
-          <p:cNvPr id="30" name="Text 28"/>
-          <p:cNvSpPr/>
-          <p:nvPr/>
-        </p:nvSpPr>
-        <p:spPr>
-          <a:xfrm>
-            <a:off x="365760" y="4096512"/>
-            <a:ext cx="1371600" cy="804672"/>
-          </a:xfrm>
-          <a:prstGeom prst="rect">
-            <a:avLst/>
-          </a:prstGeom>
-          <a:noFill/>
-          <a:ln/>
-        </p:spPr>
-        <p:txBody>
-          <a:bodyPr wrap="square" lIns="0" tIns="0" rIns="0" bIns="0" rtlCol="0" anchor="ctr"/>
-          <a:lstStyle/>
-          <a:p>
-            <a:pPr algn="ctr" indent="0" marL="0">
-              <a:buNone/>
-            </a:pPr>
-            <a:r>
-              <a:rPr lang="en-US" sz="1100" b="1" dirty="0">
-                <a:solidFill>
-                  <a:srgbClr val="475569"/>
-                </a:solidFill>
-                <a:latin typeface="Trebuchet MS" pitchFamily="34" charset="0"/>
-                <a:ea typeface="Trebuchet MS" pitchFamily="34" charset="-122"/>
-                <a:cs typeface="Trebuchet MS" pitchFamily="34" charset="-120"/>
-              </a:rPr>
-              <a:t>Phonemes</a:t>
-            </a:r>
-            <a:endParaRPr lang="en-US" sz="1100" dirty="0"/>
-          </a:p>
-        </p:txBody>
-      </p:sp>
-      <p:sp>
-        <p:nvSpPr>
-          <p:cNvPr id="31" name="Shape 29"/>
-          <p:cNvSpPr/>
-          <p:nvPr/>
-        </p:nvSpPr>
-        <p:spPr>
-          <a:xfrm>
-            <a:off x="1874520" y="4096512"/>
-            <a:ext cx="6903720" cy="804672"/>
-          </a:xfrm>
-          <a:prstGeom prst="rect">
-            <a:avLst>
-              <a:gd name="adj" fmla="val 6818"/>
-            </a:avLst>
-          </a:prstGeom>
-          <a:solidFill>
-            <a:srgbClr val="F8FAFC"/>
-          </a:solidFill>
-          <a:ln w="12700">
-            <a:solidFill>
-              <a:srgbClr val="E2E8F0"/>
-            </a:solidFill>
             <a:prstDash val="dash"/>
           </a:ln>
         </p:spPr>
       </p:sp>
       <p:sp>
         <p:nvSpPr>
-          <p:cNvPr id="32" name="Text 30"/>
+          <p:cNvPr id="29" name="Text 27"/>
           <p:cNvSpPr/>
           <p:nvPr/>
         </p:nvSpPr>
@@ -25570,7 +25341,7 @@
                 <a:ea typeface="Calibri" pitchFamily="34" charset="-122"/>
                 <a:cs typeface="Calibri" pitchFamily="34" charset="-120"/>
               </a:rPr>
-              <a:t>Word Labs  •  wordlabs.app  •  Root: 'fect' = make, do, accomplish</a:t>
+              <a:t>Word Labs  •  wordlabs.app  •  Root: 'fect' = do, make, perform</a:t>
             </a:r>
             <a:endParaRPr lang="en-US" sz="800" dirty="0"/>
           </a:p>
@@ -25643,7 +25414,7 @@
                 <a:ea typeface="Trebuchet MS" pitchFamily="34" charset="-122"/>
                 <a:cs typeface="Trebuchet MS" pitchFamily="34" charset="-120"/>
               </a:rPr>
-              <a:t>We are learning that the root 'fect' means 'make, do, accomplish'.</a:t>
+              <a:t>We are learning that the root 'fect' means 'do, make, perform'.</a:t>
             </a:r>
             <a:endParaRPr lang="en-US" sz="2000" dirty="0"/>
           </a:p>
@@ -26289,7 +26060,7 @@
                 <a:ea typeface="Calibri" pitchFamily="34" charset="-122"/>
                 <a:cs typeface="Calibri" pitchFamily="34" charset="-120"/>
               </a:rPr>
-              <a:t>Word Labs  •  wordlabs.app  •  Root: 'fect' = make, do, accomplish</a:t>
+              <a:t>Word Labs  •  wordlabs.app  •  Root: 'fect' = do, make, perform</a:t>
             </a:r>
             <a:endParaRPr lang="en-US" sz="800" dirty="0"/>
           </a:p>
@@ -26428,7 +26199,7 @@
                 <a:ea typeface="Trebuchet MS" pitchFamily="34" charset="-122"/>
                 <a:cs typeface="Trebuchet MS" pitchFamily="34" charset="-120"/>
               </a:rPr>
-              <a:t>perfectly</a:t>
+              <a:t>defect</a:t>
             </a:r>
             <a:endParaRPr lang="en-US" sz="2800" dirty="0"/>
           </a:p>
@@ -26508,7 +26279,7 @@
         </p:nvSpPr>
         <p:spPr>
           <a:xfrm>
-            <a:off x="2221992" y="2258568"/>
+            <a:off x="2938272" y="2258568"/>
             <a:ext cx="1828800" cy="292608"/>
           </a:xfrm>
           <a:prstGeom prst="rect">
@@ -26542,7 +26313,7 @@
         </p:nvSpPr>
         <p:spPr>
           <a:xfrm>
-            <a:off x="2221992" y="2258568"/>
+            <a:off x="2938272" y="2258568"/>
             <a:ext cx="1828800" cy="292608"/>
           </a:xfrm>
           <a:prstGeom prst="rect">
@@ -26567,7 +26338,7 @@
                 <a:ea typeface="Trebuchet MS" pitchFamily="34" charset="-122"/>
                 <a:cs typeface="Trebuchet MS" pitchFamily="34" charset="-120"/>
               </a:rPr>
-              <a:t>per</a:t>
+              <a:t>de</a:t>
             </a:r>
             <a:endParaRPr lang="en-US" sz="1300" dirty="0"/>
           </a:p>
@@ -26581,7 +26352,7 @@
         </p:nvSpPr>
         <p:spPr>
           <a:xfrm>
-            <a:off x="2221992" y="2569464"/>
+            <a:off x="2938272" y="2569464"/>
             <a:ext cx="1828800" cy="201168"/>
           </a:xfrm>
           <a:prstGeom prst="rect">
@@ -26606,7 +26377,7 @@
                 <a:ea typeface="Calibri" pitchFamily="34" charset="-122"/>
                 <a:cs typeface="Calibri" pitchFamily="34" charset="-120"/>
               </a:rPr>
-              <a:t>through, completely</a:t>
+              <a:t>away from, down</a:t>
             </a:r>
             <a:endParaRPr lang="en-US" sz="850" dirty="0"/>
           </a:p>
@@ -26620,7 +26391,7 @@
         </p:nvSpPr>
         <p:spPr>
           <a:xfrm>
-            <a:off x="4370832" y="2258568"/>
+            <a:off x="5803392" y="2258568"/>
             <a:ext cx="1828800" cy="292608"/>
           </a:xfrm>
           <a:prstGeom prst="rect">
@@ -26654,7 +26425,7 @@
         </p:nvSpPr>
         <p:spPr>
           <a:xfrm>
-            <a:off x="4370832" y="2258568"/>
+            <a:off x="5803392" y="2258568"/>
             <a:ext cx="1828800" cy="292608"/>
           </a:xfrm>
           <a:prstGeom prst="rect">
@@ -26693,7 +26464,7 @@
         </p:nvSpPr>
         <p:spPr>
           <a:xfrm>
-            <a:off x="4370832" y="2569464"/>
+            <a:off x="5803392" y="2569464"/>
             <a:ext cx="1828800" cy="201168"/>
           </a:xfrm>
           <a:prstGeom prst="rect">
@@ -26718,7 +26489,7 @@
                 <a:ea typeface="Calibri" pitchFamily="34" charset="-122"/>
                 <a:cs typeface="Calibri" pitchFamily="34" charset="-120"/>
               </a:rPr>
-              <a:t>make, do</a:t>
+              <a:t>do, make</a:t>
             </a:r>
             <a:endParaRPr lang="en-US" sz="850" dirty="0"/>
           </a:p>
@@ -26732,30 +26503,23 @@
         </p:nvSpPr>
         <p:spPr>
           <a:xfrm>
-            <a:off x="6519672" y="2258568"/>
-            <a:ext cx="1828800" cy="292608"/>
+            <a:off x="365760" y="3273552"/>
+            <a:ext cx="1371600" cy="658368"/>
           </a:xfrm>
           <a:prstGeom prst="rect">
             <a:avLst>
-              <a:gd name="adj" fmla="val 25000"/>
+              <a:gd name="adj" fmla="val 8333"/>
             </a:avLst>
           </a:prstGeom>
           <a:solidFill>
-            <a:srgbClr val="FCE7F3"/>
-          </a:solidFill>
-          <a:ln w="19050">
-            <a:solidFill>
-              <a:srgbClr val="DB2777"/>
-            </a:solidFill>
-            <a:prstDash val="solid"/>
-          </a:ln>
-          <a:effectLst>
-            <a:outerShdw sx="100000" sy="100000" kx="0" ky="0" algn="bl" rotWithShape="0" blurRad="101600" dist="38100" dir="8100000">
-              <a:srgbClr val="000000">
-                <a:alpha val="12000"/>
-              </a:srgbClr>
-            </a:outerShdw>
-          </a:effectLst>
+            <a:srgbClr val="E2E8F0"/>
+          </a:solidFill>
+          <a:ln w="12700">
+            <a:solidFill>
+              <a:srgbClr val="E2E8F0"/>
+            </a:solidFill>
+            <a:prstDash val="solid"/>
+          </a:ln>
         </p:spPr>
       </p:sp>
       <p:sp>
@@ -26766,8 +26530,8 @@
         </p:nvSpPr>
         <p:spPr>
           <a:xfrm>
-            <a:off x="6519672" y="2258568"/>
-            <a:ext cx="1828800" cy="292608"/>
+            <a:off x="365760" y="3273552"/>
+            <a:ext cx="1371600" cy="658368"/>
           </a:xfrm>
           <a:prstGeom prst="rect">
             <a:avLst/>
@@ -26783,69 +26547,30 @@
               <a:buNone/>
             </a:pPr>
             <a:r>
-              <a:rPr lang="en-US" sz="1300" b="1" dirty="0">
-                <a:solidFill>
-                  <a:srgbClr val="9D174D"/>
+              <a:rPr lang="en-US" sz="1100" b="1" dirty="0">
+                <a:solidFill>
+                  <a:srgbClr val="475569"/>
                 </a:solidFill>
                 <a:latin typeface="Trebuchet MS" pitchFamily="34" charset="0"/>
                 <a:ea typeface="Trebuchet MS" pitchFamily="34" charset="-122"/>
                 <a:cs typeface="Trebuchet MS" pitchFamily="34" charset="-120"/>
               </a:rPr>
-              <a:t>ly</a:t>
-            </a:r>
-            <a:endParaRPr lang="en-US" sz="1300" dirty="0"/>
-          </a:p>
-        </p:txBody>
-      </p:sp>
-      <p:sp>
-        <p:nvSpPr>
-          <p:cNvPr id="24" name="Text 22"/>
-          <p:cNvSpPr/>
-          <p:nvPr/>
-        </p:nvSpPr>
-        <p:spPr>
-          <a:xfrm>
-            <a:off x="6519672" y="2569464"/>
-            <a:ext cx="1828800" cy="201168"/>
-          </a:xfrm>
-          <a:prstGeom prst="rect">
-            <a:avLst/>
-          </a:prstGeom>
-          <a:noFill/>
-          <a:ln/>
-        </p:spPr>
-        <p:txBody>
-          <a:bodyPr wrap="square" lIns="0" tIns="0" rIns="0" bIns="0" rtlCol="0" anchor="t"/>
-          <a:lstStyle/>
-          <a:p>
-            <a:pPr algn="ctr" indent="0" marL="0">
-              <a:buNone/>
-            </a:pPr>
-            <a:r>
-              <a:rPr lang="en-US" sz="850" dirty="0">
-                <a:solidFill>
-                  <a:srgbClr val="475569"/>
-                </a:solidFill>
-                <a:latin typeface="Calibri" pitchFamily="34" charset="0"/>
-                <a:ea typeface="Calibri" pitchFamily="34" charset="-122"/>
-                <a:cs typeface="Calibri" pitchFamily="34" charset="-120"/>
-              </a:rPr>
-              <a:t>in a certain way</a:t>
-            </a:r>
-            <a:endParaRPr lang="en-US" sz="850" dirty="0"/>
-          </a:p>
-        </p:txBody>
-      </p:sp>
-      <p:sp>
-        <p:nvSpPr>
-          <p:cNvPr id="25" name="Shape 23"/>
-          <p:cNvSpPr/>
-          <p:nvPr/>
-        </p:nvSpPr>
-        <p:spPr>
-          <a:xfrm>
-            <a:off x="365760" y="3273552"/>
-            <a:ext cx="1371600" cy="658368"/>
+              <a:t>Syllables</a:t>
+            </a:r>
+            <a:endParaRPr lang="en-US" sz="1100" dirty="0"/>
+          </a:p>
+        </p:txBody>
+      </p:sp>
+      <p:sp>
+        <p:nvSpPr>
+          <p:cNvPr id="24" name="Shape 22"/>
+          <p:cNvSpPr/>
+          <p:nvPr/>
+        </p:nvSpPr>
+        <p:spPr>
+          <a:xfrm>
+            <a:off x="1874520" y="3273552"/>
+            <a:ext cx="6903720" cy="658368"/>
           </a:xfrm>
           <a:prstGeom prst="rect">
             <a:avLst>
@@ -26853,11 +26578,38 @@
             </a:avLst>
           </a:prstGeom>
           <a:solidFill>
-            <a:srgbClr val="E2E8F0"/>
-          </a:solidFill>
-          <a:ln w="12700">
-            <a:solidFill>
-              <a:srgbClr val="E2E8F0"/>
+            <a:srgbClr val="CCFBF1"/>
+          </a:solidFill>
+          <a:ln w="12700">
+            <a:solidFill>
+              <a:srgbClr val="0D9488"/>
+            </a:solidFill>
+            <a:prstDash val="solid"/>
+          </a:ln>
+        </p:spPr>
+      </p:sp>
+      <p:sp>
+        <p:nvSpPr>
+          <p:cNvPr id="25" name="Shape 23"/>
+          <p:cNvSpPr/>
+          <p:nvPr/>
+        </p:nvSpPr>
+        <p:spPr>
+          <a:xfrm>
+            <a:off x="2999232" y="3364992"/>
+            <a:ext cx="1645920" cy="475488"/>
+          </a:xfrm>
+          <a:prstGeom prst="rect">
+            <a:avLst>
+              <a:gd name="adj" fmla="val 9615"/>
+            </a:avLst>
+          </a:prstGeom>
+          <a:solidFill>
+            <a:srgbClr val="FFFFFF"/>
+          </a:solidFill>
+          <a:ln w="12700">
+            <a:solidFill>
+              <a:srgbClr val="0D9488"/>
             </a:solidFill>
             <a:prstDash val="solid"/>
           </a:ln>
@@ -26871,8 +26623,8 @@
         </p:nvSpPr>
         <p:spPr>
           <a:xfrm>
-            <a:off x="365760" y="3273552"/>
-            <a:ext cx="1371600" cy="658368"/>
+            <a:off x="2999232" y="3364992"/>
+            <a:ext cx="1645920" cy="475488"/>
           </a:xfrm>
           <a:prstGeom prst="rect">
             <a:avLst/>
@@ -26888,46 +26640,58 @@
               <a:buNone/>
             </a:pPr>
             <a:r>
-              <a:rPr lang="en-US" sz="1100" b="1" dirty="0">
-                <a:solidFill>
-                  <a:srgbClr val="475569"/>
+              <a:rPr lang="en-US" sz="1400" b="1" dirty="0">
+                <a:solidFill>
+                  <a:srgbClr val="0D9488"/>
                 </a:solidFill>
                 <a:latin typeface="Trebuchet MS" pitchFamily="34" charset="0"/>
                 <a:ea typeface="Trebuchet MS" pitchFamily="34" charset="-122"/>
                 <a:cs typeface="Trebuchet MS" pitchFamily="34" charset="-120"/>
               </a:rPr>
-              <a:t>Syllables</a:t>
-            </a:r>
-            <a:endParaRPr lang="en-US" sz="1100" dirty="0"/>
-          </a:p>
-        </p:txBody>
-      </p:sp>
-      <p:sp>
-        <p:nvSpPr>
-          <p:cNvPr id="27" name="Shape 25"/>
-          <p:cNvSpPr/>
-          <p:nvPr/>
-        </p:nvSpPr>
-        <p:spPr>
-          <a:xfrm>
-            <a:off x="1874520" y="3273552"/>
-            <a:ext cx="6903720" cy="658368"/>
-          </a:xfrm>
-          <a:prstGeom prst="rect">
-            <a:avLst>
-              <a:gd name="adj" fmla="val 8333"/>
-            </a:avLst>
-          </a:prstGeom>
-          <a:solidFill>
-            <a:srgbClr val="CCFBF1"/>
-          </a:solidFill>
-          <a:ln w="12700">
-            <a:solidFill>
-              <a:srgbClr val="0D9488"/>
-            </a:solidFill>
-            <a:prstDash val="solid"/>
-          </a:ln>
-        </p:spPr>
+              <a:t>de</a:t>
+            </a:r>
+            <a:endParaRPr lang="en-US" sz="1400" dirty="0"/>
+          </a:p>
+        </p:txBody>
+      </p:sp>
+      <p:sp>
+        <p:nvSpPr>
+          <p:cNvPr id="27" name="Text 25"/>
+          <p:cNvSpPr/>
+          <p:nvPr/>
+        </p:nvSpPr>
+        <p:spPr>
+          <a:xfrm>
+            <a:off x="4645152" y="3364992"/>
+            <a:ext cx="1097280" cy="475488"/>
+          </a:xfrm>
+          <a:prstGeom prst="rect">
+            <a:avLst/>
+          </a:prstGeom>
+          <a:noFill/>
+          <a:ln/>
+        </p:spPr>
+        <p:txBody>
+          <a:bodyPr wrap="square" lIns="0" tIns="0" rIns="0" bIns="0" rtlCol="0" anchor="ctr"/>
+          <a:lstStyle/>
+          <a:p>
+            <a:pPr algn="ctr" indent="0" marL="0">
+              <a:buNone/>
+            </a:pPr>
+            <a:r>
+              <a:rPr lang="en-US" sz="1600" b="1" dirty="0">
+                <a:solidFill>
+                  <a:srgbClr val="0D9488"/>
+                </a:solidFill>
+                <a:latin typeface="Trebuchet MS" pitchFamily="34" charset="0"/>
+                <a:ea typeface="Trebuchet MS" pitchFamily="34" charset="-122"/>
+                <a:cs typeface="Trebuchet MS" pitchFamily="34" charset="-120"/>
+              </a:rPr>
+              <a:t>·</a:t>
+            </a:r>
+            <a:endParaRPr lang="en-US" sz="1600" dirty="0"/>
+          </a:p>
+        </p:txBody>
       </p:sp>
       <p:sp>
         <p:nvSpPr>
@@ -26937,7 +26701,7 @@
         </p:nvSpPr>
         <p:spPr>
           <a:xfrm>
-            <a:off x="2313432" y="3364992"/>
+            <a:off x="5742432" y="3364992"/>
             <a:ext cx="1645920" cy="475488"/>
           </a:xfrm>
           <a:prstGeom prst="rect">
@@ -26964,7 +26728,7 @@
         </p:nvSpPr>
         <p:spPr>
           <a:xfrm>
-            <a:off x="2313432" y="3364992"/>
+            <a:off x="5742432" y="3364992"/>
             <a:ext cx="1645920" cy="475488"/>
           </a:xfrm>
           <a:prstGeom prst="rect">
@@ -26989,7 +26753,7 @@
                 <a:ea typeface="Trebuchet MS" pitchFamily="34" charset="-122"/>
                 <a:cs typeface="Trebuchet MS" pitchFamily="34" charset="-120"/>
               </a:rPr>
-              <a:t>per</a:t>
+              <a:t>fect</a:t>
             </a:r>
             <a:endParaRPr lang="en-US" sz="1400" dirty="0"/>
           </a:p>
@@ -26997,14 +26761,41 @@
       </p:sp>
       <p:sp>
         <p:nvSpPr>
-          <p:cNvPr id="30" name="Text 28"/>
-          <p:cNvSpPr/>
-          <p:nvPr/>
-        </p:nvSpPr>
-        <p:spPr>
-          <a:xfrm>
-            <a:off x="3959352" y="3364992"/>
-            <a:ext cx="411480" cy="475488"/>
+          <p:cNvPr id="30" name="Shape 28"/>
+          <p:cNvSpPr/>
+          <p:nvPr/>
+        </p:nvSpPr>
+        <p:spPr>
+          <a:xfrm>
+            <a:off x="365760" y="4096512"/>
+            <a:ext cx="1371600" cy="804672"/>
+          </a:xfrm>
+          <a:prstGeom prst="rect">
+            <a:avLst>
+              <a:gd name="adj" fmla="val 6818"/>
+            </a:avLst>
+          </a:prstGeom>
+          <a:solidFill>
+            <a:srgbClr val="E2E8F0"/>
+          </a:solidFill>
+          <a:ln w="12700">
+            <a:solidFill>
+              <a:srgbClr val="E2E8F0"/>
+            </a:solidFill>
+            <a:prstDash val="solid"/>
+          </a:ln>
+        </p:spPr>
+      </p:sp>
+      <p:sp>
+        <p:nvSpPr>
+          <p:cNvPr id="31" name="Text 29"/>
+          <p:cNvSpPr/>
+          <p:nvPr/>
+        </p:nvSpPr>
+        <p:spPr>
+          <a:xfrm>
+            <a:off x="365760" y="4096512"/>
+            <a:ext cx="1371600" cy="804672"/>
           </a:xfrm>
           <a:prstGeom prst="rect">
             <a:avLst/>
@@ -27020,201 +26811,30 @@
               <a:buNone/>
             </a:pPr>
             <a:r>
-              <a:rPr lang="en-US" sz="1600" b="1" dirty="0">
-                <a:solidFill>
-                  <a:srgbClr val="0D9488"/>
+              <a:rPr lang="en-US" sz="1100" b="1" dirty="0">
+                <a:solidFill>
+                  <a:srgbClr val="475569"/>
                 </a:solidFill>
                 <a:latin typeface="Trebuchet MS" pitchFamily="34" charset="0"/>
                 <a:ea typeface="Trebuchet MS" pitchFamily="34" charset="-122"/>
                 <a:cs typeface="Trebuchet MS" pitchFamily="34" charset="-120"/>
               </a:rPr>
-              <a:t>·</a:t>
-            </a:r>
-            <a:endParaRPr lang="en-US" sz="1600" dirty="0"/>
-          </a:p>
-        </p:txBody>
-      </p:sp>
-      <p:sp>
-        <p:nvSpPr>
-          <p:cNvPr id="31" name="Shape 29"/>
-          <p:cNvSpPr/>
-          <p:nvPr/>
-        </p:nvSpPr>
-        <p:spPr>
-          <a:xfrm>
-            <a:off x="4370832" y="3364992"/>
-            <a:ext cx="1645920" cy="475488"/>
-          </a:xfrm>
-          <a:prstGeom prst="rect">
-            <a:avLst>
-              <a:gd name="adj" fmla="val 9615"/>
-            </a:avLst>
-          </a:prstGeom>
-          <a:solidFill>
-            <a:srgbClr val="FFFFFF"/>
-          </a:solidFill>
-          <a:ln w="12700">
-            <a:solidFill>
-              <a:srgbClr val="0D9488"/>
-            </a:solidFill>
-            <a:prstDash val="solid"/>
-          </a:ln>
-        </p:spPr>
-      </p:sp>
-      <p:sp>
-        <p:nvSpPr>
-          <p:cNvPr id="32" name="Text 30"/>
-          <p:cNvSpPr/>
-          <p:nvPr/>
-        </p:nvSpPr>
-        <p:spPr>
-          <a:xfrm>
-            <a:off x="4370832" y="3364992"/>
-            <a:ext cx="1645920" cy="475488"/>
-          </a:xfrm>
-          <a:prstGeom prst="rect">
-            <a:avLst/>
-          </a:prstGeom>
-          <a:noFill/>
-          <a:ln/>
-        </p:spPr>
-        <p:txBody>
-          <a:bodyPr wrap="square" lIns="0" tIns="0" rIns="0" bIns="0" rtlCol="0" anchor="ctr"/>
-          <a:lstStyle/>
-          <a:p>
-            <a:pPr algn="ctr" indent="0" marL="0">
-              <a:buNone/>
-            </a:pPr>
-            <a:r>
-              <a:rPr lang="en-US" sz="1400" b="1" dirty="0">
-                <a:solidFill>
-                  <a:srgbClr val="0D9488"/>
-                </a:solidFill>
-                <a:latin typeface="Trebuchet MS" pitchFamily="34" charset="0"/>
-                <a:ea typeface="Trebuchet MS" pitchFamily="34" charset="-122"/>
-                <a:cs typeface="Trebuchet MS" pitchFamily="34" charset="-120"/>
-              </a:rPr>
-              <a:t>fect</a:t>
-            </a:r>
-            <a:endParaRPr lang="en-US" sz="1400" dirty="0"/>
-          </a:p>
-        </p:txBody>
-      </p:sp>
-      <p:sp>
-        <p:nvSpPr>
-          <p:cNvPr id="33" name="Text 31"/>
-          <p:cNvSpPr/>
-          <p:nvPr/>
-        </p:nvSpPr>
-        <p:spPr>
-          <a:xfrm>
-            <a:off x="6016752" y="3364992"/>
-            <a:ext cx="411480" cy="475488"/>
-          </a:xfrm>
-          <a:prstGeom prst="rect">
-            <a:avLst/>
-          </a:prstGeom>
-          <a:noFill/>
-          <a:ln/>
-        </p:spPr>
-        <p:txBody>
-          <a:bodyPr wrap="square" lIns="0" tIns="0" rIns="0" bIns="0" rtlCol="0" anchor="ctr"/>
-          <a:lstStyle/>
-          <a:p>
-            <a:pPr algn="ctr" indent="0" marL="0">
-              <a:buNone/>
-            </a:pPr>
-            <a:r>
-              <a:rPr lang="en-US" sz="1600" b="1" dirty="0">
-                <a:solidFill>
-                  <a:srgbClr val="0D9488"/>
-                </a:solidFill>
-                <a:latin typeface="Trebuchet MS" pitchFamily="34" charset="0"/>
-                <a:ea typeface="Trebuchet MS" pitchFamily="34" charset="-122"/>
-                <a:cs typeface="Trebuchet MS" pitchFamily="34" charset="-120"/>
-              </a:rPr>
-              <a:t>·</a:t>
-            </a:r>
-            <a:endParaRPr lang="en-US" sz="1600" dirty="0"/>
-          </a:p>
-        </p:txBody>
-      </p:sp>
-      <p:sp>
-        <p:nvSpPr>
-          <p:cNvPr id="34" name="Shape 32"/>
-          <p:cNvSpPr/>
-          <p:nvPr/>
-        </p:nvSpPr>
-        <p:spPr>
-          <a:xfrm>
-            <a:off x="6428232" y="3364992"/>
-            <a:ext cx="1645920" cy="475488"/>
-          </a:xfrm>
-          <a:prstGeom prst="rect">
-            <a:avLst>
-              <a:gd name="adj" fmla="val 9615"/>
-            </a:avLst>
-          </a:prstGeom>
-          <a:solidFill>
-            <a:srgbClr val="FFFFFF"/>
-          </a:solidFill>
-          <a:ln w="12700">
-            <a:solidFill>
-              <a:srgbClr val="0D9488"/>
-            </a:solidFill>
-            <a:prstDash val="solid"/>
-          </a:ln>
-        </p:spPr>
-      </p:sp>
-      <p:sp>
-        <p:nvSpPr>
-          <p:cNvPr id="35" name="Text 33"/>
-          <p:cNvSpPr/>
-          <p:nvPr/>
-        </p:nvSpPr>
-        <p:spPr>
-          <a:xfrm>
-            <a:off x="6428232" y="3364992"/>
-            <a:ext cx="1645920" cy="475488"/>
-          </a:xfrm>
-          <a:prstGeom prst="rect">
-            <a:avLst/>
-          </a:prstGeom>
-          <a:noFill/>
-          <a:ln/>
-        </p:spPr>
-        <p:txBody>
-          <a:bodyPr wrap="square" lIns="0" tIns="0" rIns="0" bIns="0" rtlCol="0" anchor="ctr"/>
-          <a:lstStyle/>
-          <a:p>
-            <a:pPr algn="ctr" indent="0" marL="0">
-              <a:buNone/>
-            </a:pPr>
-            <a:r>
-              <a:rPr lang="en-US" sz="1400" b="1" dirty="0">
-                <a:solidFill>
-                  <a:srgbClr val="0D9488"/>
-                </a:solidFill>
-                <a:latin typeface="Trebuchet MS" pitchFamily="34" charset="0"/>
-                <a:ea typeface="Trebuchet MS" pitchFamily="34" charset="-122"/>
-                <a:cs typeface="Trebuchet MS" pitchFamily="34" charset="-120"/>
-              </a:rPr>
-              <a:t>ly</a:t>
-            </a:r>
-            <a:endParaRPr lang="en-US" sz="1400" dirty="0"/>
-          </a:p>
-        </p:txBody>
-      </p:sp>
-      <p:sp>
-        <p:nvSpPr>
-          <p:cNvPr id="36" name="Shape 34"/>
-          <p:cNvSpPr/>
-          <p:nvPr/>
-        </p:nvSpPr>
-        <p:spPr>
-          <a:xfrm>
-            <a:off x="365760" y="4096512"/>
-            <a:ext cx="1371600" cy="804672"/>
+              <a:t>Phonemes</a:t>
+            </a:r>
+            <a:endParaRPr lang="en-US" sz="1100" dirty="0"/>
+          </a:p>
+        </p:txBody>
+      </p:sp>
+      <p:sp>
+        <p:nvSpPr>
+          <p:cNvPr id="32" name="Shape 30"/>
+          <p:cNvSpPr/>
+          <p:nvPr/>
+        </p:nvSpPr>
+        <p:spPr>
+          <a:xfrm>
+            <a:off x="1874520" y="4096512"/>
+            <a:ext cx="6903720" cy="804672"/>
           </a:xfrm>
           <a:prstGeom prst="rect">
             <a:avLst>
@@ -27222,85 +26842,19 @@
             </a:avLst>
           </a:prstGeom>
           <a:solidFill>
-            <a:srgbClr val="E2E8F0"/>
+            <a:srgbClr val="F8FAFC"/>
           </a:solidFill>
           <a:ln w="12700">
             <a:solidFill>
               <a:srgbClr val="E2E8F0"/>
             </a:solidFill>
-            <a:prstDash val="solid"/>
-          </a:ln>
-        </p:spPr>
-      </p:sp>
-      <p:sp>
-        <p:nvSpPr>
-          <p:cNvPr id="37" name="Text 35"/>
-          <p:cNvSpPr/>
-          <p:nvPr/>
-        </p:nvSpPr>
-        <p:spPr>
-          <a:xfrm>
-            <a:off x="365760" y="4096512"/>
-            <a:ext cx="1371600" cy="804672"/>
-          </a:xfrm>
-          <a:prstGeom prst="rect">
-            <a:avLst/>
-          </a:prstGeom>
-          <a:noFill/>
-          <a:ln/>
-        </p:spPr>
-        <p:txBody>
-          <a:bodyPr wrap="square" lIns="0" tIns="0" rIns="0" bIns="0" rtlCol="0" anchor="ctr"/>
-          <a:lstStyle/>
-          <a:p>
-            <a:pPr algn="ctr" indent="0" marL="0">
-              <a:buNone/>
-            </a:pPr>
-            <a:r>
-              <a:rPr lang="en-US" sz="1100" b="1" dirty="0">
-                <a:solidFill>
-                  <a:srgbClr val="475569"/>
-                </a:solidFill>
-                <a:latin typeface="Trebuchet MS" pitchFamily="34" charset="0"/>
-                <a:ea typeface="Trebuchet MS" pitchFamily="34" charset="-122"/>
-                <a:cs typeface="Trebuchet MS" pitchFamily="34" charset="-120"/>
-              </a:rPr>
-              <a:t>Phonemes</a:t>
-            </a:r>
-            <a:endParaRPr lang="en-US" sz="1100" dirty="0"/>
-          </a:p>
-        </p:txBody>
-      </p:sp>
-      <p:sp>
-        <p:nvSpPr>
-          <p:cNvPr id="38" name="Shape 36"/>
-          <p:cNvSpPr/>
-          <p:nvPr/>
-        </p:nvSpPr>
-        <p:spPr>
-          <a:xfrm>
-            <a:off x="1874520" y="4096512"/>
-            <a:ext cx="6903720" cy="804672"/>
-          </a:xfrm>
-          <a:prstGeom prst="rect">
-            <a:avLst>
-              <a:gd name="adj" fmla="val 6818"/>
-            </a:avLst>
-          </a:prstGeom>
-          <a:solidFill>
-            <a:srgbClr val="F8FAFC"/>
-          </a:solidFill>
-          <a:ln w="12700">
-            <a:solidFill>
-              <a:srgbClr val="E2E8F0"/>
-            </a:solidFill>
             <a:prstDash val="dash"/>
           </a:ln>
         </p:spPr>
       </p:sp>
       <p:sp>
         <p:nvSpPr>
-          <p:cNvPr id="39" name="Text 37"/>
+          <p:cNvPr id="33" name="Text 31"/>
           <p:cNvSpPr/>
           <p:nvPr/>
         </p:nvSpPr>
@@ -27623,7 +27177,7 @@
                 <a:ea typeface="Calibri" pitchFamily="34" charset="-122"/>
                 <a:cs typeface="Calibri" pitchFamily="34" charset="-120"/>
               </a:rPr>
-              <a:t>Word Labs  •  wordlabs.app  •  Root: 'fect' = make, do, accomplish</a:t>
+              <a:t>Word Labs  •  wordlabs.app  •  Root: 'fect' = do, make, perform</a:t>
             </a:r>
             <a:endParaRPr lang="en-US" sz="800" dirty="0"/>
           </a:p>
@@ -27762,7 +27316,7 @@
                 <a:ea typeface="Trebuchet MS" pitchFamily="34" charset="-122"/>
                 <a:cs typeface="Trebuchet MS" pitchFamily="34" charset="-120"/>
               </a:rPr>
-              <a:t>perfectly</a:t>
+              <a:t>defect</a:t>
             </a:r>
             <a:endParaRPr lang="en-US" sz="2800" dirty="0"/>
           </a:p>
@@ -27842,7 +27396,7 @@
         </p:nvSpPr>
         <p:spPr>
           <a:xfrm>
-            <a:off x="2221992" y="2258568"/>
+            <a:off x="2938272" y="2258568"/>
             <a:ext cx="1828800" cy="292608"/>
           </a:xfrm>
           <a:prstGeom prst="rect">
@@ -27876,7 +27430,7 @@
         </p:nvSpPr>
         <p:spPr>
           <a:xfrm>
-            <a:off x="2221992" y="2258568"/>
+            <a:off x="2938272" y="2258568"/>
             <a:ext cx="1828800" cy="292608"/>
           </a:xfrm>
           <a:prstGeom prst="rect">
@@ -27901,7 +27455,7 @@
                 <a:ea typeface="Trebuchet MS" pitchFamily="34" charset="-122"/>
                 <a:cs typeface="Trebuchet MS" pitchFamily="34" charset="-120"/>
               </a:rPr>
-              <a:t>per</a:t>
+              <a:t>de</a:t>
             </a:r>
             <a:endParaRPr lang="en-US" sz="1300" dirty="0"/>
           </a:p>
@@ -27915,7 +27469,7 @@
         </p:nvSpPr>
         <p:spPr>
           <a:xfrm>
-            <a:off x="2221992" y="2569464"/>
+            <a:off x="2938272" y="2569464"/>
             <a:ext cx="1828800" cy="201168"/>
           </a:xfrm>
           <a:prstGeom prst="rect">
@@ -27940,7 +27494,7 @@
                 <a:ea typeface="Calibri" pitchFamily="34" charset="-122"/>
                 <a:cs typeface="Calibri" pitchFamily="34" charset="-120"/>
               </a:rPr>
-              <a:t>through, completely</a:t>
+              <a:t>away from, down</a:t>
             </a:r>
             <a:endParaRPr lang="en-US" sz="850" dirty="0"/>
           </a:p>
@@ -27954,7 +27508,7 @@
         </p:nvSpPr>
         <p:spPr>
           <a:xfrm>
-            <a:off x="4370832" y="2258568"/>
+            <a:off x="5803392" y="2258568"/>
             <a:ext cx="1828800" cy="292608"/>
           </a:xfrm>
           <a:prstGeom prst="rect">
@@ -27988,7 +27542,7 @@
         </p:nvSpPr>
         <p:spPr>
           <a:xfrm>
-            <a:off x="4370832" y="2258568"/>
+            <a:off x="5803392" y="2258568"/>
             <a:ext cx="1828800" cy="292608"/>
           </a:xfrm>
           <a:prstGeom prst="rect">
@@ -28027,7 +27581,7 @@
         </p:nvSpPr>
         <p:spPr>
           <a:xfrm>
-            <a:off x="4370832" y="2569464"/>
+            <a:off x="5803392" y="2569464"/>
             <a:ext cx="1828800" cy="201168"/>
           </a:xfrm>
           <a:prstGeom prst="rect">
@@ -28052,7 +27606,7 @@
                 <a:ea typeface="Calibri" pitchFamily="34" charset="-122"/>
                 <a:cs typeface="Calibri" pitchFamily="34" charset="-120"/>
               </a:rPr>
-              <a:t>make, do</a:t>
+              <a:t>do, make</a:t>
             </a:r>
             <a:endParaRPr lang="en-US" sz="850" dirty="0"/>
           </a:p>
@@ -28066,30 +27620,23 @@
         </p:nvSpPr>
         <p:spPr>
           <a:xfrm>
-            <a:off x="6519672" y="2258568"/>
-            <a:ext cx="1828800" cy="292608"/>
+            <a:off x="365760" y="3273552"/>
+            <a:ext cx="1371600" cy="658368"/>
           </a:xfrm>
           <a:prstGeom prst="rect">
             <a:avLst>
-              <a:gd name="adj" fmla="val 25000"/>
+              <a:gd name="adj" fmla="val 8333"/>
             </a:avLst>
           </a:prstGeom>
           <a:solidFill>
-            <a:srgbClr val="FCE7F3"/>
-          </a:solidFill>
-          <a:ln w="19050">
-            <a:solidFill>
-              <a:srgbClr val="DB2777"/>
-            </a:solidFill>
-            <a:prstDash val="solid"/>
-          </a:ln>
-          <a:effectLst>
-            <a:outerShdw sx="100000" sy="100000" kx="0" ky="0" algn="bl" rotWithShape="0" blurRad="101600" dist="38100" dir="8100000">
-              <a:srgbClr val="000000">
-                <a:alpha val="12000"/>
-              </a:srgbClr>
-            </a:outerShdw>
-          </a:effectLst>
+            <a:srgbClr val="E2E8F0"/>
+          </a:solidFill>
+          <a:ln w="12700">
+            <a:solidFill>
+              <a:srgbClr val="E2E8F0"/>
+            </a:solidFill>
+            <a:prstDash val="solid"/>
+          </a:ln>
         </p:spPr>
       </p:sp>
       <p:sp>
@@ -28100,8 +27647,8 @@
         </p:nvSpPr>
         <p:spPr>
           <a:xfrm>
-            <a:off x="6519672" y="2258568"/>
-            <a:ext cx="1828800" cy="292608"/>
+            <a:off x="365760" y="3273552"/>
+            <a:ext cx="1371600" cy="658368"/>
           </a:xfrm>
           <a:prstGeom prst="rect">
             <a:avLst/>
@@ -28117,30 +27664,651 @@
               <a:buNone/>
             </a:pPr>
             <a:r>
-              <a:rPr lang="en-US" sz="1300" b="1" dirty="0">
-                <a:solidFill>
-                  <a:srgbClr val="9D174D"/>
+              <a:rPr lang="en-US" sz="1100" b="1" dirty="0">
+                <a:solidFill>
+                  <a:srgbClr val="475569"/>
                 </a:solidFill>
                 <a:latin typeface="Trebuchet MS" pitchFamily="34" charset="0"/>
                 <a:ea typeface="Trebuchet MS" pitchFamily="34" charset="-122"/>
                 <a:cs typeface="Trebuchet MS" pitchFamily="34" charset="-120"/>
               </a:rPr>
-              <a:t>ly</a:t>
-            </a:r>
-            <a:endParaRPr lang="en-US" sz="1300" dirty="0"/>
-          </a:p>
-        </p:txBody>
-      </p:sp>
-      <p:sp>
-        <p:nvSpPr>
-          <p:cNvPr id="24" name="Text 22"/>
-          <p:cNvSpPr/>
-          <p:nvPr/>
-        </p:nvSpPr>
-        <p:spPr>
-          <a:xfrm>
-            <a:off x="6519672" y="2569464"/>
-            <a:ext cx="1828800" cy="201168"/>
+              <a:t>Syllables</a:t>
+            </a:r>
+            <a:endParaRPr lang="en-US" sz="1100" dirty="0"/>
+          </a:p>
+        </p:txBody>
+      </p:sp>
+      <p:sp>
+        <p:nvSpPr>
+          <p:cNvPr id="24" name="Shape 22"/>
+          <p:cNvSpPr/>
+          <p:nvPr/>
+        </p:nvSpPr>
+        <p:spPr>
+          <a:xfrm>
+            <a:off x="1874520" y="3273552"/>
+            <a:ext cx="6903720" cy="658368"/>
+          </a:xfrm>
+          <a:prstGeom prst="rect">
+            <a:avLst>
+              <a:gd name="adj" fmla="val 8333"/>
+            </a:avLst>
+          </a:prstGeom>
+          <a:solidFill>
+            <a:srgbClr val="CCFBF1"/>
+          </a:solidFill>
+          <a:ln w="12700">
+            <a:solidFill>
+              <a:srgbClr val="0D9488"/>
+            </a:solidFill>
+            <a:prstDash val="solid"/>
+          </a:ln>
+        </p:spPr>
+      </p:sp>
+      <p:sp>
+        <p:nvSpPr>
+          <p:cNvPr id="25" name="Shape 23"/>
+          <p:cNvSpPr/>
+          <p:nvPr/>
+        </p:nvSpPr>
+        <p:spPr>
+          <a:xfrm>
+            <a:off x="2999232" y="3364992"/>
+            <a:ext cx="1645920" cy="475488"/>
+          </a:xfrm>
+          <a:prstGeom prst="rect">
+            <a:avLst>
+              <a:gd name="adj" fmla="val 9615"/>
+            </a:avLst>
+          </a:prstGeom>
+          <a:solidFill>
+            <a:srgbClr val="FFFFFF"/>
+          </a:solidFill>
+          <a:ln w="12700">
+            <a:solidFill>
+              <a:srgbClr val="0D9488"/>
+            </a:solidFill>
+            <a:prstDash val="solid"/>
+          </a:ln>
+        </p:spPr>
+      </p:sp>
+      <p:sp>
+        <p:nvSpPr>
+          <p:cNvPr id="26" name="Text 24"/>
+          <p:cNvSpPr/>
+          <p:nvPr/>
+        </p:nvSpPr>
+        <p:spPr>
+          <a:xfrm>
+            <a:off x="2999232" y="3364992"/>
+            <a:ext cx="1645920" cy="475488"/>
+          </a:xfrm>
+          <a:prstGeom prst="rect">
+            <a:avLst/>
+          </a:prstGeom>
+          <a:noFill/>
+          <a:ln/>
+        </p:spPr>
+        <p:txBody>
+          <a:bodyPr wrap="square" lIns="0" tIns="0" rIns="0" bIns="0" rtlCol="0" anchor="ctr"/>
+          <a:lstStyle/>
+          <a:p>
+            <a:pPr algn="ctr" indent="0" marL="0">
+              <a:buNone/>
+            </a:pPr>
+            <a:r>
+              <a:rPr lang="en-US" sz="1400" b="1" dirty="0">
+                <a:solidFill>
+                  <a:srgbClr val="0D9488"/>
+                </a:solidFill>
+                <a:latin typeface="Trebuchet MS" pitchFamily="34" charset="0"/>
+                <a:ea typeface="Trebuchet MS" pitchFamily="34" charset="-122"/>
+                <a:cs typeface="Trebuchet MS" pitchFamily="34" charset="-120"/>
+              </a:rPr>
+              <a:t>de</a:t>
+            </a:r>
+            <a:endParaRPr lang="en-US" sz="1400" dirty="0"/>
+          </a:p>
+        </p:txBody>
+      </p:sp>
+      <p:sp>
+        <p:nvSpPr>
+          <p:cNvPr id="27" name="Text 25"/>
+          <p:cNvSpPr/>
+          <p:nvPr/>
+        </p:nvSpPr>
+        <p:spPr>
+          <a:xfrm>
+            <a:off x="4645152" y="3364992"/>
+            <a:ext cx="1097280" cy="475488"/>
+          </a:xfrm>
+          <a:prstGeom prst="rect">
+            <a:avLst/>
+          </a:prstGeom>
+          <a:noFill/>
+          <a:ln/>
+        </p:spPr>
+        <p:txBody>
+          <a:bodyPr wrap="square" lIns="0" tIns="0" rIns="0" bIns="0" rtlCol="0" anchor="ctr"/>
+          <a:lstStyle/>
+          <a:p>
+            <a:pPr algn="ctr" indent="0" marL="0">
+              <a:buNone/>
+            </a:pPr>
+            <a:r>
+              <a:rPr lang="en-US" sz="1600" b="1" dirty="0">
+                <a:solidFill>
+                  <a:srgbClr val="0D9488"/>
+                </a:solidFill>
+                <a:latin typeface="Trebuchet MS" pitchFamily="34" charset="0"/>
+                <a:ea typeface="Trebuchet MS" pitchFamily="34" charset="-122"/>
+                <a:cs typeface="Trebuchet MS" pitchFamily="34" charset="-120"/>
+              </a:rPr>
+              <a:t>·</a:t>
+            </a:r>
+            <a:endParaRPr lang="en-US" sz="1600" dirty="0"/>
+          </a:p>
+        </p:txBody>
+      </p:sp>
+      <p:sp>
+        <p:nvSpPr>
+          <p:cNvPr id="28" name="Shape 26"/>
+          <p:cNvSpPr/>
+          <p:nvPr/>
+        </p:nvSpPr>
+        <p:spPr>
+          <a:xfrm>
+            <a:off x="5742432" y="3364992"/>
+            <a:ext cx="1645920" cy="475488"/>
+          </a:xfrm>
+          <a:prstGeom prst="rect">
+            <a:avLst>
+              <a:gd name="adj" fmla="val 9615"/>
+            </a:avLst>
+          </a:prstGeom>
+          <a:solidFill>
+            <a:srgbClr val="FFFFFF"/>
+          </a:solidFill>
+          <a:ln w="12700">
+            <a:solidFill>
+              <a:srgbClr val="0D9488"/>
+            </a:solidFill>
+            <a:prstDash val="solid"/>
+          </a:ln>
+        </p:spPr>
+      </p:sp>
+      <p:sp>
+        <p:nvSpPr>
+          <p:cNvPr id="29" name="Text 27"/>
+          <p:cNvSpPr/>
+          <p:nvPr/>
+        </p:nvSpPr>
+        <p:spPr>
+          <a:xfrm>
+            <a:off x="5742432" y="3364992"/>
+            <a:ext cx="1645920" cy="475488"/>
+          </a:xfrm>
+          <a:prstGeom prst="rect">
+            <a:avLst/>
+          </a:prstGeom>
+          <a:noFill/>
+          <a:ln/>
+        </p:spPr>
+        <p:txBody>
+          <a:bodyPr wrap="square" lIns="0" tIns="0" rIns="0" bIns="0" rtlCol="0" anchor="ctr"/>
+          <a:lstStyle/>
+          <a:p>
+            <a:pPr algn="ctr" indent="0" marL="0">
+              <a:buNone/>
+            </a:pPr>
+            <a:r>
+              <a:rPr lang="en-US" sz="1400" b="1" dirty="0">
+                <a:solidFill>
+                  <a:srgbClr val="0D9488"/>
+                </a:solidFill>
+                <a:latin typeface="Trebuchet MS" pitchFamily="34" charset="0"/>
+                <a:ea typeface="Trebuchet MS" pitchFamily="34" charset="-122"/>
+                <a:cs typeface="Trebuchet MS" pitchFamily="34" charset="-120"/>
+              </a:rPr>
+              <a:t>fect</a:t>
+            </a:r>
+            <a:endParaRPr lang="en-US" sz="1400" dirty="0"/>
+          </a:p>
+        </p:txBody>
+      </p:sp>
+      <p:sp>
+        <p:nvSpPr>
+          <p:cNvPr id="30" name="Shape 28"/>
+          <p:cNvSpPr/>
+          <p:nvPr/>
+        </p:nvSpPr>
+        <p:spPr>
+          <a:xfrm>
+            <a:off x="365760" y="4096512"/>
+            <a:ext cx="1371600" cy="804672"/>
+          </a:xfrm>
+          <a:prstGeom prst="rect">
+            <a:avLst>
+              <a:gd name="adj" fmla="val 6818"/>
+            </a:avLst>
+          </a:prstGeom>
+          <a:solidFill>
+            <a:srgbClr val="E2E8F0"/>
+          </a:solidFill>
+          <a:ln w="12700">
+            <a:solidFill>
+              <a:srgbClr val="E2E8F0"/>
+            </a:solidFill>
+            <a:prstDash val="solid"/>
+          </a:ln>
+        </p:spPr>
+      </p:sp>
+      <p:sp>
+        <p:nvSpPr>
+          <p:cNvPr id="31" name="Text 29"/>
+          <p:cNvSpPr/>
+          <p:nvPr/>
+        </p:nvSpPr>
+        <p:spPr>
+          <a:xfrm>
+            <a:off x="365760" y="4096512"/>
+            <a:ext cx="1371600" cy="804672"/>
+          </a:xfrm>
+          <a:prstGeom prst="rect">
+            <a:avLst/>
+          </a:prstGeom>
+          <a:noFill/>
+          <a:ln/>
+        </p:spPr>
+        <p:txBody>
+          <a:bodyPr wrap="square" lIns="0" tIns="0" rIns="0" bIns="0" rtlCol="0" anchor="ctr"/>
+          <a:lstStyle/>
+          <a:p>
+            <a:pPr algn="ctr" indent="0" marL="0">
+              <a:buNone/>
+            </a:pPr>
+            <a:r>
+              <a:rPr lang="en-US" sz="1100" b="1" dirty="0">
+                <a:solidFill>
+                  <a:srgbClr val="475569"/>
+                </a:solidFill>
+                <a:latin typeface="Trebuchet MS" pitchFamily="34" charset="0"/>
+                <a:ea typeface="Trebuchet MS" pitchFamily="34" charset="-122"/>
+                <a:cs typeface="Trebuchet MS" pitchFamily="34" charset="-120"/>
+              </a:rPr>
+              <a:t>Phonemes</a:t>
+            </a:r>
+            <a:endParaRPr lang="en-US" sz="1100" dirty="0"/>
+          </a:p>
+        </p:txBody>
+      </p:sp>
+      <p:sp>
+        <p:nvSpPr>
+          <p:cNvPr id="32" name="Shape 30"/>
+          <p:cNvSpPr/>
+          <p:nvPr/>
+        </p:nvSpPr>
+        <p:spPr>
+          <a:xfrm>
+            <a:off x="1874520" y="4096512"/>
+            <a:ext cx="6903720" cy="804672"/>
+          </a:xfrm>
+          <a:prstGeom prst="rect">
+            <a:avLst>
+              <a:gd name="adj" fmla="val 6818"/>
+            </a:avLst>
+          </a:prstGeom>
+          <a:solidFill>
+            <a:srgbClr val="FCE7F3"/>
+          </a:solidFill>
+          <a:ln w="12700">
+            <a:solidFill>
+              <a:srgbClr val="DB2777"/>
+            </a:solidFill>
+            <a:prstDash val="solid"/>
+          </a:ln>
+        </p:spPr>
+      </p:sp>
+      <p:sp>
+        <p:nvSpPr>
+          <p:cNvPr id="33" name="Shape 31"/>
+          <p:cNvSpPr/>
+          <p:nvPr/>
+        </p:nvSpPr>
+        <p:spPr>
+          <a:xfrm>
+            <a:off x="2254649" y="4169664"/>
+            <a:ext cx="685800" cy="384048"/>
+          </a:xfrm>
+          <a:prstGeom prst="rect">
+            <a:avLst>
+              <a:gd name="adj" fmla="val 9524"/>
+            </a:avLst>
+          </a:prstGeom>
+          <a:solidFill>
+            <a:srgbClr val="FFFFFF"/>
+          </a:solidFill>
+          <a:ln w="12700">
+            <a:solidFill>
+              <a:srgbClr val="DB2777"/>
+            </a:solidFill>
+            <a:prstDash val="solid"/>
+          </a:ln>
+        </p:spPr>
+      </p:sp>
+      <p:sp>
+        <p:nvSpPr>
+          <p:cNvPr id="34" name="Text 32"/>
+          <p:cNvSpPr/>
+          <p:nvPr/>
+        </p:nvSpPr>
+        <p:spPr>
+          <a:xfrm>
+            <a:off x="2254649" y="4169664"/>
+            <a:ext cx="685800" cy="384048"/>
+          </a:xfrm>
+          <a:prstGeom prst="rect">
+            <a:avLst/>
+          </a:prstGeom>
+          <a:noFill/>
+          <a:ln/>
+        </p:spPr>
+        <p:txBody>
+          <a:bodyPr wrap="square" lIns="0" tIns="0" rIns="0" bIns="0" rtlCol="0" anchor="ctr"/>
+          <a:lstStyle/>
+          <a:p>
+            <a:pPr algn="ctr" indent="0" marL="0">
+              <a:buNone/>
+            </a:pPr>
+            <a:r>
+              <a:rPr lang="en-US" sz="900" b="1" dirty="0">
+                <a:solidFill>
+                  <a:srgbClr val="9D174D"/>
+                </a:solidFill>
+                <a:latin typeface="Trebuchet MS" pitchFamily="34" charset="0"/>
+                <a:ea typeface="Trebuchet MS" pitchFamily="34" charset="-122"/>
+                <a:cs typeface="Trebuchet MS" pitchFamily="34" charset="-120"/>
+              </a:rPr>
+              <a:t>d</a:t>
+            </a:r>
+            <a:endParaRPr lang="en-US" sz="900" dirty="0"/>
+          </a:p>
+        </p:txBody>
+      </p:sp>
+      <p:sp>
+        <p:nvSpPr>
+          <p:cNvPr id="35" name="Shape 33"/>
+          <p:cNvSpPr/>
+          <p:nvPr/>
+        </p:nvSpPr>
+        <p:spPr>
+          <a:xfrm>
+            <a:off x="3293146" y="4169664"/>
+            <a:ext cx="685800" cy="384048"/>
+          </a:xfrm>
+          <a:prstGeom prst="rect">
+            <a:avLst>
+              <a:gd name="adj" fmla="val 9524"/>
+            </a:avLst>
+          </a:prstGeom>
+          <a:solidFill>
+            <a:srgbClr val="FFFFFF"/>
+          </a:solidFill>
+          <a:ln w="12700">
+            <a:solidFill>
+              <a:srgbClr val="DB2777"/>
+            </a:solidFill>
+            <a:prstDash val="solid"/>
+          </a:ln>
+        </p:spPr>
+      </p:sp>
+      <p:sp>
+        <p:nvSpPr>
+          <p:cNvPr id="36" name="Text 34"/>
+          <p:cNvSpPr/>
+          <p:nvPr/>
+        </p:nvSpPr>
+        <p:spPr>
+          <a:xfrm>
+            <a:off x="3293146" y="4169664"/>
+            <a:ext cx="685800" cy="384048"/>
+          </a:xfrm>
+          <a:prstGeom prst="rect">
+            <a:avLst/>
+          </a:prstGeom>
+          <a:noFill/>
+          <a:ln/>
+        </p:spPr>
+        <p:txBody>
+          <a:bodyPr wrap="square" lIns="0" tIns="0" rIns="0" bIns="0" rtlCol="0" anchor="ctr"/>
+          <a:lstStyle/>
+          <a:p>
+            <a:pPr algn="ctr" indent="0" marL="0">
+              <a:buNone/>
+            </a:pPr>
+            <a:r>
+              <a:rPr lang="en-US" sz="900" b="1" dirty="0">
+                <a:solidFill>
+                  <a:srgbClr val="9D174D"/>
+                </a:solidFill>
+                <a:latin typeface="Trebuchet MS" pitchFamily="34" charset="0"/>
+                <a:ea typeface="Trebuchet MS" pitchFamily="34" charset="-122"/>
+                <a:cs typeface="Trebuchet MS" pitchFamily="34" charset="-120"/>
+              </a:rPr>
+              <a:t>e</a:t>
+            </a:r>
+            <a:endParaRPr lang="en-US" sz="900" dirty="0"/>
+          </a:p>
+        </p:txBody>
+      </p:sp>
+      <p:sp>
+        <p:nvSpPr>
+          <p:cNvPr id="37" name="Shape 35"/>
+          <p:cNvSpPr/>
+          <p:nvPr/>
+        </p:nvSpPr>
+        <p:spPr>
+          <a:xfrm>
+            <a:off x="4331643" y="4169664"/>
+            <a:ext cx="685800" cy="384048"/>
+          </a:xfrm>
+          <a:prstGeom prst="rect">
+            <a:avLst>
+              <a:gd name="adj" fmla="val 9524"/>
+            </a:avLst>
+          </a:prstGeom>
+          <a:solidFill>
+            <a:srgbClr val="FFFFFF"/>
+          </a:solidFill>
+          <a:ln w="12700">
+            <a:solidFill>
+              <a:srgbClr val="DB2777"/>
+            </a:solidFill>
+            <a:prstDash val="solid"/>
+          </a:ln>
+        </p:spPr>
+      </p:sp>
+      <p:sp>
+        <p:nvSpPr>
+          <p:cNvPr id="38" name="Text 36"/>
+          <p:cNvSpPr/>
+          <p:nvPr/>
+        </p:nvSpPr>
+        <p:spPr>
+          <a:xfrm>
+            <a:off x="4331643" y="4169664"/>
+            <a:ext cx="685800" cy="384048"/>
+          </a:xfrm>
+          <a:prstGeom prst="rect">
+            <a:avLst/>
+          </a:prstGeom>
+          <a:noFill/>
+          <a:ln/>
+        </p:spPr>
+        <p:txBody>
+          <a:bodyPr wrap="square" lIns="0" tIns="0" rIns="0" bIns="0" rtlCol="0" anchor="ctr"/>
+          <a:lstStyle/>
+          <a:p>
+            <a:pPr algn="ctr" indent="0" marL="0">
+              <a:buNone/>
+            </a:pPr>
+            <a:r>
+              <a:rPr lang="en-US" sz="900" b="1" dirty="0">
+                <a:solidFill>
+                  <a:srgbClr val="9D174D"/>
+                </a:solidFill>
+                <a:latin typeface="Trebuchet MS" pitchFamily="34" charset="0"/>
+                <a:ea typeface="Trebuchet MS" pitchFamily="34" charset="-122"/>
+                <a:cs typeface="Trebuchet MS" pitchFamily="34" charset="-120"/>
+              </a:rPr>
+              <a:t>f</a:t>
+            </a:r>
+            <a:endParaRPr lang="en-US" sz="900" dirty="0"/>
+          </a:p>
+        </p:txBody>
+      </p:sp>
+      <p:sp>
+        <p:nvSpPr>
+          <p:cNvPr id="39" name="Shape 37"/>
+          <p:cNvSpPr/>
+          <p:nvPr/>
+        </p:nvSpPr>
+        <p:spPr>
+          <a:xfrm>
+            <a:off x="5370141" y="4169664"/>
+            <a:ext cx="685800" cy="384048"/>
+          </a:xfrm>
+          <a:prstGeom prst="rect">
+            <a:avLst>
+              <a:gd name="adj" fmla="val 9524"/>
+            </a:avLst>
+          </a:prstGeom>
+          <a:solidFill>
+            <a:srgbClr val="FFFFFF"/>
+          </a:solidFill>
+          <a:ln w="12700">
+            <a:solidFill>
+              <a:srgbClr val="DB2777"/>
+            </a:solidFill>
+            <a:prstDash val="solid"/>
+          </a:ln>
+        </p:spPr>
+      </p:sp>
+      <p:sp>
+        <p:nvSpPr>
+          <p:cNvPr id="40" name="Text 38"/>
+          <p:cNvSpPr/>
+          <p:nvPr/>
+        </p:nvSpPr>
+        <p:spPr>
+          <a:xfrm>
+            <a:off x="5370141" y="4169664"/>
+            <a:ext cx="685800" cy="384048"/>
+          </a:xfrm>
+          <a:prstGeom prst="rect">
+            <a:avLst/>
+          </a:prstGeom>
+          <a:noFill/>
+          <a:ln/>
+        </p:spPr>
+        <p:txBody>
+          <a:bodyPr wrap="square" lIns="0" tIns="0" rIns="0" bIns="0" rtlCol="0" anchor="ctr"/>
+          <a:lstStyle/>
+          <a:p>
+            <a:pPr algn="ctr" indent="0" marL="0">
+              <a:buNone/>
+            </a:pPr>
+            <a:r>
+              <a:rPr lang="en-US" sz="900" b="1" dirty="0">
+                <a:solidFill>
+                  <a:srgbClr val="9D174D"/>
+                </a:solidFill>
+                <a:latin typeface="Trebuchet MS" pitchFamily="34" charset="0"/>
+                <a:ea typeface="Trebuchet MS" pitchFamily="34" charset="-122"/>
+                <a:cs typeface="Trebuchet MS" pitchFamily="34" charset="-120"/>
+              </a:rPr>
+              <a:t>e</a:t>
+            </a:r>
+            <a:endParaRPr lang="en-US" sz="900" dirty="0"/>
+          </a:p>
+        </p:txBody>
+      </p:sp>
+      <p:sp>
+        <p:nvSpPr>
+          <p:cNvPr id="41" name="Shape 39"/>
+          <p:cNvSpPr/>
+          <p:nvPr/>
+        </p:nvSpPr>
+        <p:spPr>
+          <a:xfrm>
+            <a:off x="6408638" y="4169664"/>
+            <a:ext cx="685800" cy="384048"/>
+          </a:xfrm>
+          <a:prstGeom prst="rect">
+            <a:avLst>
+              <a:gd name="adj" fmla="val 9524"/>
+            </a:avLst>
+          </a:prstGeom>
+          <a:solidFill>
+            <a:srgbClr val="FFFFFF"/>
+          </a:solidFill>
+          <a:ln w="12700">
+            <a:solidFill>
+              <a:srgbClr val="DB2777"/>
+            </a:solidFill>
+            <a:prstDash val="solid"/>
+          </a:ln>
+        </p:spPr>
+      </p:sp>
+      <p:sp>
+        <p:nvSpPr>
+          <p:cNvPr id="42" name="Text 40"/>
+          <p:cNvSpPr/>
+          <p:nvPr/>
+        </p:nvSpPr>
+        <p:spPr>
+          <a:xfrm>
+            <a:off x="6408638" y="4169664"/>
+            <a:ext cx="685800" cy="384048"/>
+          </a:xfrm>
+          <a:prstGeom prst="rect">
+            <a:avLst/>
+          </a:prstGeom>
+          <a:noFill/>
+          <a:ln/>
+        </p:spPr>
+        <p:txBody>
+          <a:bodyPr wrap="square" lIns="0" tIns="0" rIns="0" bIns="0" rtlCol="0" anchor="ctr"/>
+          <a:lstStyle/>
+          <a:p>
+            <a:pPr algn="ctr" indent="0" marL="0">
+              <a:buNone/>
+            </a:pPr>
+            <a:r>
+              <a:rPr lang="en-US" sz="900" b="1" dirty="0">
+                <a:solidFill>
+                  <a:srgbClr val="9D174D"/>
+                </a:solidFill>
+                <a:latin typeface="Trebuchet MS" pitchFamily="34" charset="0"/>
+                <a:ea typeface="Trebuchet MS" pitchFamily="34" charset="-122"/>
+                <a:cs typeface="Trebuchet MS" pitchFamily="34" charset="-120"/>
+              </a:rPr>
+              <a:t>c</a:t>
+            </a:r>
+            <a:endParaRPr lang="en-US" sz="900" dirty="0"/>
+          </a:p>
+        </p:txBody>
+      </p:sp>
+      <p:sp>
+        <p:nvSpPr>
+          <p:cNvPr id="43" name="Text 41"/>
+          <p:cNvSpPr/>
+          <p:nvPr/>
+        </p:nvSpPr>
+        <p:spPr>
+          <a:xfrm>
+            <a:off x="6408638" y="4572000"/>
+            <a:ext cx="685800" cy="219456"/>
           </a:xfrm>
           <a:prstGeom prst="rect">
             <a:avLst/>
@@ -28156,57 +28324,57 @@
               <a:buNone/>
             </a:pPr>
             <a:r>
-              <a:rPr lang="en-US" sz="850" dirty="0">
-                <a:solidFill>
-                  <a:srgbClr val="475569"/>
+              <a:rPr lang="en-US" sz="750" i="1" dirty="0">
+                <a:solidFill>
+                  <a:srgbClr val="94A3B8"/>
                 </a:solidFill>
                 <a:latin typeface="Calibri" pitchFamily="34" charset="0"/>
                 <a:ea typeface="Calibri" pitchFamily="34" charset="-122"/>
                 <a:cs typeface="Calibri" pitchFamily="34" charset="-120"/>
               </a:rPr>
-              <a:t>in a certain way</a:t>
-            </a:r>
-            <a:endParaRPr lang="en-US" sz="850" dirty="0"/>
-          </a:p>
-        </p:txBody>
-      </p:sp>
-      <p:sp>
-        <p:nvSpPr>
-          <p:cNvPr id="25" name="Shape 23"/>
-          <p:cNvSpPr/>
-          <p:nvPr/>
-        </p:nvSpPr>
-        <p:spPr>
-          <a:xfrm>
-            <a:off x="365760" y="3273552"/>
-            <a:ext cx="1371600" cy="658368"/>
+              <a:t>/k/</a:t>
+            </a:r>
+            <a:endParaRPr lang="en-US" sz="750" dirty="0"/>
+          </a:p>
+        </p:txBody>
+      </p:sp>
+      <p:sp>
+        <p:nvSpPr>
+          <p:cNvPr id="44" name="Shape 42"/>
+          <p:cNvSpPr/>
+          <p:nvPr/>
+        </p:nvSpPr>
+        <p:spPr>
+          <a:xfrm>
+            <a:off x="7447135" y="4169664"/>
+            <a:ext cx="685800" cy="384048"/>
           </a:xfrm>
           <a:prstGeom prst="rect">
             <a:avLst>
-              <a:gd name="adj" fmla="val 8333"/>
+              <a:gd name="adj" fmla="val 9524"/>
             </a:avLst>
           </a:prstGeom>
           <a:solidFill>
-            <a:srgbClr val="E2E8F0"/>
-          </a:solidFill>
-          <a:ln w="12700">
-            <a:solidFill>
-              <a:srgbClr val="E2E8F0"/>
-            </a:solidFill>
-            <a:prstDash val="solid"/>
-          </a:ln>
-        </p:spPr>
-      </p:sp>
-      <p:sp>
-        <p:nvSpPr>
-          <p:cNvPr id="26" name="Text 24"/>
-          <p:cNvSpPr/>
-          <p:nvPr/>
-        </p:nvSpPr>
-        <p:spPr>
-          <a:xfrm>
-            <a:off x="365760" y="3273552"/>
-            <a:ext cx="1371600" cy="658368"/>
+            <a:srgbClr val="FFFFFF"/>
+          </a:solidFill>
+          <a:ln w="12700">
+            <a:solidFill>
+              <a:srgbClr val="DB2777"/>
+            </a:solidFill>
+            <a:prstDash val="solid"/>
+          </a:ln>
+        </p:spPr>
+      </p:sp>
+      <p:sp>
+        <p:nvSpPr>
+          <p:cNvPr id="45" name="Text 43"/>
+          <p:cNvSpPr/>
+          <p:nvPr/>
+        </p:nvSpPr>
+        <p:spPr>
+          <a:xfrm>
+            <a:off x="7447135" y="4169664"/>
+            <a:ext cx="685800" cy="384048"/>
           </a:xfrm>
           <a:prstGeom prst="rect">
             <a:avLst/>
@@ -28222,978 +28390,15 @@
               <a:buNone/>
             </a:pPr>
             <a:r>
-              <a:rPr lang="en-US" sz="1100" b="1" dirty="0">
-                <a:solidFill>
-                  <a:srgbClr val="475569"/>
+              <a:rPr lang="en-US" sz="900" b="1" dirty="0">
+                <a:solidFill>
+                  <a:srgbClr val="9D174D"/>
                 </a:solidFill>
                 <a:latin typeface="Trebuchet MS" pitchFamily="34" charset="0"/>
                 <a:ea typeface="Trebuchet MS" pitchFamily="34" charset="-122"/>
                 <a:cs typeface="Trebuchet MS" pitchFamily="34" charset="-120"/>
               </a:rPr>
-              <a:t>Syllables</a:t>
-            </a:r>
-            <a:endParaRPr lang="en-US" sz="1100" dirty="0"/>
-          </a:p>
-        </p:txBody>
-      </p:sp>
-      <p:sp>
-        <p:nvSpPr>
-          <p:cNvPr id="27" name="Shape 25"/>
-          <p:cNvSpPr/>
-          <p:nvPr/>
-        </p:nvSpPr>
-        <p:spPr>
-          <a:xfrm>
-            <a:off x="1874520" y="3273552"/>
-            <a:ext cx="6903720" cy="658368"/>
-          </a:xfrm>
-          <a:prstGeom prst="rect">
-            <a:avLst>
-              <a:gd name="adj" fmla="val 8333"/>
-            </a:avLst>
-          </a:prstGeom>
-          <a:solidFill>
-            <a:srgbClr val="CCFBF1"/>
-          </a:solidFill>
-          <a:ln w="12700">
-            <a:solidFill>
-              <a:srgbClr val="0D9488"/>
-            </a:solidFill>
-            <a:prstDash val="solid"/>
-          </a:ln>
-        </p:spPr>
-      </p:sp>
-      <p:sp>
-        <p:nvSpPr>
-          <p:cNvPr id="28" name="Shape 26"/>
-          <p:cNvSpPr/>
-          <p:nvPr/>
-        </p:nvSpPr>
-        <p:spPr>
-          <a:xfrm>
-            <a:off x="2313432" y="3364992"/>
-            <a:ext cx="1645920" cy="475488"/>
-          </a:xfrm>
-          <a:prstGeom prst="rect">
-            <a:avLst>
-              <a:gd name="adj" fmla="val 9615"/>
-            </a:avLst>
-          </a:prstGeom>
-          <a:solidFill>
-            <a:srgbClr val="FFFFFF"/>
-          </a:solidFill>
-          <a:ln w="12700">
-            <a:solidFill>
-              <a:srgbClr val="0D9488"/>
-            </a:solidFill>
-            <a:prstDash val="solid"/>
-          </a:ln>
-        </p:spPr>
-      </p:sp>
-      <p:sp>
-        <p:nvSpPr>
-          <p:cNvPr id="29" name="Text 27"/>
-          <p:cNvSpPr/>
-          <p:nvPr/>
-        </p:nvSpPr>
-        <p:spPr>
-          <a:xfrm>
-            <a:off x="2313432" y="3364992"/>
-            <a:ext cx="1645920" cy="475488"/>
-          </a:xfrm>
-          <a:prstGeom prst="rect">
-            <a:avLst/>
-          </a:prstGeom>
-          <a:noFill/>
-          <a:ln/>
-        </p:spPr>
-        <p:txBody>
-          <a:bodyPr wrap="square" lIns="0" tIns="0" rIns="0" bIns="0" rtlCol="0" anchor="ctr"/>
-          <a:lstStyle/>
-          <a:p>
-            <a:pPr algn="ctr" indent="0" marL="0">
-              <a:buNone/>
-            </a:pPr>
-            <a:r>
-              <a:rPr lang="en-US" sz="1400" b="1" dirty="0">
-                <a:solidFill>
-                  <a:srgbClr val="0D9488"/>
-                </a:solidFill>
-                <a:latin typeface="Trebuchet MS" pitchFamily="34" charset="0"/>
-                <a:ea typeface="Trebuchet MS" pitchFamily="34" charset="-122"/>
-                <a:cs typeface="Trebuchet MS" pitchFamily="34" charset="-120"/>
-              </a:rPr>
-              <a:t>per</a:t>
-            </a:r>
-            <a:endParaRPr lang="en-US" sz="1400" dirty="0"/>
-          </a:p>
-        </p:txBody>
-      </p:sp>
-      <p:sp>
-        <p:nvSpPr>
-          <p:cNvPr id="30" name="Text 28"/>
-          <p:cNvSpPr/>
-          <p:nvPr/>
-        </p:nvSpPr>
-        <p:spPr>
-          <a:xfrm>
-            <a:off x="3959352" y="3364992"/>
-            <a:ext cx="411480" cy="475488"/>
-          </a:xfrm>
-          <a:prstGeom prst="rect">
-            <a:avLst/>
-          </a:prstGeom>
-          <a:noFill/>
-          <a:ln/>
-        </p:spPr>
-        <p:txBody>
-          <a:bodyPr wrap="square" lIns="0" tIns="0" rIns="0" bIns="0" rtlCol="0" anchor="ctr"/>
-          <a:lstStyle/>
-          <a:p>
-            <a:pPr algn="ctr" indent="0" marL="0">
-              <a:buNone/>
-            </a:pPr>
-            <a:r>
-              <a:rPr lang="en-US" sz="1600" b="1" dirty="0">
-                <a:solidFill>
-                  <a:srgbClr val="0D9488"/>
-                </a:solidFill>
-                <a:latin typeface="Trebuchet MS" pitchFamily="34" charset="0"/>
-                <a:ea typeface="Trebuchet MS" pitchFamily="34" charset="-122"/>
-                <a:cs typeface="Trebuchet MS" pitchFamily="34" charset="-120"/>
-              </a:rPr>
-              <a:t>·</a:t>
-            </a:r>
-            <a:endParaRPr lang="en-US" sz="1600" dirty="0"/>
-          </a:p>
-        </p:txBody>
-      </p:sp>
-      <p:sp>
-        <p:nvSpPr>
-          <p:cNvPr id="31" name="Shape 29"/>
-          <p:cNvSpPr/>
-          <p:nvPr/>
-        </p:nvSpPr>
-        <p:spPr>
-          <a:xfrm>
-            <a:off x="4370832" y="3364992"/>
-            <a:ext cx="1645920" cy="475488"/>
-          </a:xfrm>
-          <a:prstGeom prst="rect">
-            <a:avLst>
-              <a:gd name="adj" fmla="val 9615"/>
-            </a:avLst>
-          </a:prstGeom>
-          <a:solidFill>
-            <a:srgbClr val="FFFFFF"/>
-          </a:solidFill>
-          <a:ln w="12700">
-            <a:solidFill>
-              <a:srgbClr val="0D9488"/>
-            </a:solidFill>
-            <a:prstDash val="solid"/>
-          </a:ln>
-        </p:spPr>
-      </p:sp>
-      <p:sp>
-        <p:nvSpPr>
-          <p:cNvPr id="32" name="Text 30"/>
-          <p:cNvSpPr/>
-          <p:nvPr/>
-        </p:nvSpPr>
-        <p:spPr>
-          <a:xfrm>
-            <a:off x="4370832" y="3364992"/>
-            <a:ext cx="1645920" cy="475488"/>
-          </a:xfrm>
-          <a:prstGeom prst="rect">
-            <a:avLst/>
-          </a:prstGeom>
-          <a:noFill/>
-          <a:ln/>
-        </p:spPr>
-        <p:txBody>
-          <a:bodyPr wrap="square" lIns="0" tIns="0" rIns="0" bIns="0" rtlCol="0" anchor="ctr"/>
-          <a:lstStyle/>
-          <a:p>
-            <a:pPr algn="ctr" indent="0" marL="0">
-              <a:buNone/>
-            </a:pPr>
-            <a:r>
-              <a:rPr lang="en-US" sz="1400" b="1" dirty="0">
-                <a:solidFill>
-                  <a:srgbClr val="0D9488"/>
-                </a:solidFill>
-                <a:latin typeface="Trebuchet MS" pitchFamily="34" charset="0"/>
-                <a:ea typeface="Trebuchet MS" pitchFamily="34" charset="-122"/>
-                <a:cs typeface="Trebuchet MS" pitchFamily="34" charset="-120"/>
-              </a:rPr>
-              <a:t>fect</a:t>
-            </a:r>
-            <a:endParaRPr lang="en-US" sz="1400" dirty="0"/>
-          </a:p>
-        </p:txBody>
-      </p:sp>
-      <p:sp>
-        <p:nvSpPr>
-          <p:cNvPr id="33" name="Text 31"/>
-          <p:cNvSpPr/>
-          <p:nvPr/>
-        </p:nvSpPr>
-        <p:spPr>
-          <a:xfrm>
-            <a:off x="6016752" y="3364992"/>
-            <a:ext cx="411480" cy="475488"/>
-          </a:xfrm>
-          <a:prstGeom prst="rect">
-            <a:avLst/>
-          </a:prstGeom>
-          <a:noFill/>
-          <a:ln/>
-        </p:spPr>
-        <p:txBody>
-          <a:bodyPr wrap="square" lIns="0" tIns="0" rIns="0" bIns="0" rtlCol="0" anchor="ctr"/>
-          <a:lstStyle/>
-          <a:p>
-            <a:pPr algn="ctr" indent="0" marL="0">
-              <a:buNone/>
-            </a:pPr>
-            <a:r>
-              <a:rPr lang="en-US" sz="1600" b="1" dirty="0">
-                <a:solidFill>
-                  <a:srgbClr val="0D9488"/>
-                </a:solidFill>
-                <a:latin typeface="Trebuchet MS" pitchFamily="34" charset="0"/>
-                <a:ea typeface="Trebuchet MS" pitchFamily="34" charset="-122"/>
-                <a:cs typeface="Trebuchet MS" pitchFamily="34" charset="-120"/>
-              </a:rPr>
-              <a:t>·</a:t>
-            </a:r>
-            <a:endParaRPr lang="en-US" sz="1600" dirty="0"/>
-          </a:p>
-        </p:txBody>
-      </p:sp>
-      <p:sp>
-        <p:nvSpPr>
-          <p:cNvPr id="34" name="Shape 32"/>
-          <p:cNvSpPr/>
-          <p:nvPr/>
-        </p:nvSpPr>
-        <p:spPr>
-          <a:xfrm>
-            <a:off x="6428232" y="3364992"/>
-            <a:ext cx="1645920" cy="475488"/>
-          </a:xfrm>
-          <a:prstGeom prst="rect">
-            <a:avLst>
-              <a:gd name="adj" fmla="val 9615"/>
-            </a:avLst>
-          </a:prstGeom>
-          <a:solidFill>
-            <a:srgbClr val="FFFFFF"/>
-          </a:solidFill>
-          <a:ln w="12700">
-            <a:solidFill>
-              <a:srgbClr val="0D9488"/>
-            </a:solidFill>
-            <a:prstDash val="solid"/>
-          </a:ln>
-        </p:spPr>
-      </p:sp>
-      <p:sp>
-        <p:nvSpPr>
-          <p:cNvPr id="35" name="Text 33"/>
-          <p:cNvSpPr/>
-          <p:nvPr/>
-        </p:nvSpPr>
-        <p:spPr>
-          <a:xfrm>
-            <a:off x="6428232" y="3364992"/>
-            <a:ext cx="1645920" cy="475488"/>
-          </a:xfrm>
-          <a:prstGeom prst="rect">
-            <a:avLst/>
-          </a:prstGeom>
-          <a:noFill/>
-          <a:ln/>
-        </p:spPr>
-        <p:txBody>
-          <a:bodyPr wrap="square" lIns="0" tIns="0" rIns="0" bIns="0" rtlCol="0" anchor="ctr"/>
-          <a:lstStyle/>
-          <a:p>
-            <a:pPr algn="ctr" indent="0" marL="0">
-              <a:buNone/>
-            </a:pPr>
-            <a:r>
-              <a:rPr lang="en-US" sz="1400" b="1" dirty="0">
-                <a:solidFill>
-                  <a:srgbClr val="0D9488"/>
-                </a:solidFill>
-                <a:latin typeface="Trebuchet MS" pitchFamily="34" charset="0"/>
-                <a:ea typeface="Trebuchet MS" pitchFamily="34" charset="-122"/>
-                <a:cs typeface="Trebuchet MS" pitchFamily="34" charset="-120"/>
-              </a:rPr>
-              <a:t>ly</a:t>
-            </a:r>
-            <a:endParaRPr lang="en-US" sz="1400" dirty="0"/>
-          </a:p>
-        </p:txBody>
-      </p:sp>
-      <p:sp>
-        <p:nvSpPr>
-          <p:cNvPr id="36" name="Shape 34"/>
-          <p:cNvSpPr/>
-          <p:nvPr/>
-        </p:nvSpPr>
-        <p:spPr>
-          <a:xfrm>
-            <a:off x="365760" y="4096512"/>
-            <a:ext cx="1371600" cy="804672"/>
-          </a:xfrm>
-          <a:prstGeom prst="rect">
-            <a:avLst>
-              <a:gd name="adj" fmla="val 6818"/>
-            </a:avLst>
-          </a:prstGeom>
-          <a:solidFill>
-            <a:srgbClr val="E2E8F0"/>
-          </a:solidFill>
-          <a:ln w="12700">
-            <a:solidFill>
-              <a:srgbClr val="E2E8F0"/>
-            </a:solidFill>
-            <a:prstDash val="solid"/>
-          </a:ln>
-        </p:spPr>
-      </p:sp>
-      <p:sp>
-        <p:nvSpPr>
-          <p:cNvPr id="37" name="Text 35"/>
-          <p:cNvSpPr/>
-          <p:nvPr/>
-        </p:nvSpPr>
-        <p:spPr>
-          <a:xfrm>
-            <a:off x="365760" y="4096512"/>
-            <a:ext cx="1371600" cy="804672"/>
-          </a:xfrm>
-          <a:prstGeom prst="rect">
-            <a:avLst/>
-          </a:prstGeom>
-          <a:noFill/>
-          <a:ln/>
-        </p:spPr>
-        <p:txBody>
-          <a:bodyPr wrap="square" lIns="0" tIns="0" rIns="0" bIns="0" rtlCol="0" anchor="ctr"/>
-          <a:lstStyle/>
-          <a:p>
-            <a:pPr algn="ctr" indent="0" marL="0">
-              <a:buNone/>
-            </a:pPr>
-            <a:r>
-              <a:rPr lang="en-US" sz="1100" b="1" dirty="0">
-                <a:solidFill>
-                  <a:srgbClr val="475569"/>
-                </a:solidFill>
-                <a:latin typeface="Trebuchet MS" pitchFamily="34" charset="0"/>
-                <a:ea typeface="Trebuchet MS" pitchFamily="34" charset="-122"/>
-                <a:cs typeface="Trebuchet MS" pitchFamily="34" charset="-120"/>
-              </a:rPr>
-              <a:t>Phonemes</a:t>
-            </a:r>
-            <a:endParaRPr lang="en-US" sz="1100" dirty="0"/>
-          </a:p>
-        </p:txBody>
-      </p:sp>
-      <p:sp>
-        <p:nvSpPr>
-          <p:cNvPr id="38" name="Shape 36"/>
-          <p:cNvSpPr/>
-          <p:nvPr/>
-        </p:nvSpPr>
-        <p:spPr>
-          <a:xfrm>
-            <a:off x="1874520" y="4096512"/>
-            <a:ext cx="6903720" cy="804672"/>
-          </a:xfrm>
-          <a:prstGeom prst="rect">
-            <a:avLst>
-              <a:gd name="adj" fmla="val 6818"/>
-            </a:avLst>
-          </a:prstGeom>
-          <a:solidFill>
-            <a:srgbClr val="FCE7F3"/>
-          </a:solidFill>
-          <a:ln w="12700">
-            <a:solidFill>
-              <a:srgbClr val="DB2777"/>
-            </a:solidFill>
-            <a:prstDash val="solid"/>
-          </a:ln>
-        </p:spPr>
-      </p:sp>
-      <p:sp>
-        <p:nvSpPr>
-          <p:cNvPr id="39" name="Shape 37"/>
-          <p:cNvSpPr/>
-          <p:nvPr/>
-        </p:nvSpPr>
-        <p:spPr>
-          <a:xfrm>
-            <a:off x="2023872" y="4169664"/>
-            <a:ext cx="685800" cy="384048"/>
-          </a:xfrm>
-          <a:prstGeom prst="rect">
-            <a:avLst>
-              <a:gd name="adj" fmla="val 9524"/>
-            </a:avLst>
-          </a:prstGeom>
-          <a:solidFill>
-            <a:srgbClr val="FFFFFF"/>
-          </a:solidFill>
-          <a:ln w="12700">
-            <a:solidFill>
-              <a:srgbClr val="DB2777"/>
-            </a:solidFill>
-            <a:prstDash val="solid"/>
-          </a:ln>
-        </p:spPr>
-      </p:sp>
-      <p:sp>
-        <p:nvSpPr>
-          <p:cNvPr id="40" name="Text 38"/>
-          <p:cNvSpPr/>
-          <p:nvPr/>
-        </p:nvSpPr>
-        <p:spPr>
-          <a:xfrm>
-            <a:off x="2023872" y="4169664"/>
-            <a:ext cx="685800" cy="384048"/>
-          </a:xfrm>
-          <a:prstGeom prst="rect">
-            <a:avLst/>
-          </a:prstGeom>
-          <a:noFill/>
-          <a:ln/>
-        </p:spPr>
-        <p:txBody>
-          <a:bodyPr wrap="square" lIns="0" tIns="0" rIns="0" bIns="0" rtlCol="0" anchor="ctr"/>
-          <a:lstStyle/>
-          <a:p>
-            <a:pPr algn="ctr" indent="0" marL="0">
-              <a:buNone/>
-            </a:pPr>
-            <a:r>
-              <a:rPr lang="en-US" sz="900" b="1" dirty="0">
-                <a:solidFill>
-                  <a:srgbClr val="9D174D"/>
-                </a:solidFill>
-                <a:latin typeface="Trebuchet MS" pitchFamily="34" charset="0"/>
-                <a:ea typeface="Trebuchet MS" pitchFamily="34" charset="-122"/>
-                <a:cs typeface="Trebuchet MS" pitchFamily="34" charset="-120"/>
-              </a:rPr>
-              <a:t>p</a:t>
-            </a:r>
-            <a:endParaRPr lang="en-US" sz="900" dirty="0"/>
-          </a:p>
-        </p:txBody>
-      </p:sp>
-      <p:sp>
-        <p:nvSpPr>
-          <p:cNvPr id="41" name="Shape 39"/>
-          <p:cNvSpPr/>
-          <p:nvPr/>
-        </p:nvSpPr>
-        <p:spPr>
-          <a:xfrm>
-            <a:off x="2831592" y="4169664"/>
-            <a:ext cx="685800" cy="384048"/>
-          </a:xfrm>
-          <a:prstGeom prst="rect">
-            <a:avLst>
-              <a:gd name="adj" fmla="val 9524"/>
-            </a:avLst>
-          </a:prstGeom>
-          <a:solidFill>
-            <a:srgbClr val="FFFFFF"/>
-          </a:solidFill>
-          <a:ln w="12700">
-            <a:solidFill>
-              <a:srgbClr val="DB2777"/>
-            </a:solidFill>
-            <a:prstDash val="solid"/>
-          </a:ln>
-        </p:spPr>
-      </p:sp>
-      <p:sp>
-        <p:nvSpPr>
-          <p:cNvPr id="42" name="Text 40"/>
-          <p:cNvSpPr/>
-          <p:nvPr/>
-        </p:nvSpPr>
-        <p:spPr>
-          <a:xfrm>
-            <a:off x="2831592" y="4169664"/>
-            <a:ext cx="685800" cy="384048"/>
-          </a:xfrm>
-          <a:prstGeom prst="rect">
-            <a:avLst/>
-          </a:prstGeom>
-          <a:noFill/>
-          <a:ln/>
-        </p:spPr>
-        <p:txBody>
-          <a:bodyPr wrap="square" lIns="0" tIns="0" rIns="0" bIns="0" rtlCol="0" anchor="ctr"/>
-          <a:lstStyle/>
-          <a:p>
-            <a:pPr algn="ctr" indent="0" marL="0">
-              <a:buNone/>
-            </a:pPr>
-            <a:r>
-              <a:rPr lang="en-US" sz="900" b="1" dirty="0">
-                <a:solidFill>
-                  <a:srgbClr val="9D174D"/>
-                </a:solidFill>
-                <a:latin typeface="Trebuchet MS" pitchFamily="34" charset="0"/>
-                <a:ea typeface="Trebuchet MS" pitchFamily="34" charset="-122"/>
-                <a:cs typeface="Trebuchet MS" pitchFamily="34" charset="-120"/>
-              </a:rPr>
-              <a:t>er</a:t>
-            </a:r>
-            <a:endParaRPr lang="en-US" sz="900" dirty="0"/>
-          </a:p>
-        </p:txBody>
-      </p:sp>
-      <p:sp>
-        <p:nvSpPr>
-          <p:cNvPr id="43" name="Shape 41"/>
-          <p:cNvSpPr/>
-          <p:nvPr/>
-        </p:nvSpPr>
-        <p:spPr>
-          <a:xfrm>
-            <a:off x="3639312" y="4169664"/>
-            <a:ext cx="685800" cy="384048"/>
-          </a:xfrm>
-          <a:prstGeom prst="rect">
-            <a:avLst>
-              <a:gd name="adj" fmla="val 9524"/>
-            </a:avLst>
-          </a:prstGeom>
-          <a:solidFill>
-            <a:srgbClr val="FFFFFF"/>
-          </a:solidFill>
-          <a:ln w="12700">
-            <a:solidFill>
-              <a:srgbClr val="DB2777"/>
-            </a:solidFill>
-            <a:prstDash val="solid"/>
-          </a:ln>
-        </p:spPr>
-      </p:sp>
-      <p:sp>
-        <p:nvSpPr>
-          <p:cNvPr id="44" name="Text 42"/>
-          <p:cNvSpPr/>
-          <p:nvPr/>
-        </p:nvSpPr>
-        <p:spPr>
-          <a:xfrm>
-            <a:off x="3639312" y="4169664"/>
-            <a:ext cx="685800" cy="384048"/>
-          </a:xfrm>
-          <a:prstGeom prst="rect">
-            <a:avLst/>
-          </a:prstGeom>
-          <a:noFill/>
-          <a:ln/>
-        </p:spPr>
-        <p:txBody>
-          <a:bodyPr wrap="square" lIns="0" tIns="0" rIns="0" bIns="0" rtlCol="0" anchor="ctr"/>
-          <a:lstStyle/>
-          <a:p>
-            <a:pPr algn="ctr" indent="0" marL="0">
-              <a:buNone/>
-            </a:pPr>
-            <a:r>
-              <a:rPr lang="en-US" sz="900" b="1" dirty="0">
-                <a:solidFill>
-                  <a:srgbClr val="9D174D"/>
-                </a:solidFill>
-                <a:latin typeface="Trebuchet MS" pitchFamily="34" charset="0"/>
-                <a:ea typeface="Trebuchet MS" pitchFamily="34" charset="-122"/>
-                <a:cs typeface="Trebuchet MS" pitchFamily="34" charset="-120"/>
-              </a:rPr>
-              <a:t>f</a:t>
-            </a:r>
-            <a:endParaRPr lang="en-US" sz="900" dirty="0"/>
-          </a:p>
-        </p:txBody>
-      </p:sp>
-      <p:sp>
-        <p:nvSpPr>
-          <p:cNvPr id="45" name="Shape 43"/>
-          <p:cNvSpPr/>
-          <p:nvPr/>
-        </p:nvSpPr>
-        <p:spPr>
-          <a:xfrm>
-            <a:off x="4447032" y="4169664"/>
-            <a:ext cx="685800" cy="384048"/>
-          </a:xfrm>
-          <a:prstGeom prst="rect">
-            <a:avLst>
-              <a:gd name="adj" fmla="val 9524"/>
-            </a:avLst>
-          </a:prstGeom>
-          <a:solidFill>
-            <a:srgbClr val="FFFFFF"/>
-          </a:solidFill>
-          <a:ln w="12700">
-            <a:solidFill>
-              <a:srgbClr val="DB2777"/>
-            </a:solidFill>
-            <a:prstDash val="solid"/>
-          </a:ln>
-        </p:spPr>
-      </p:sp>
-      <p:sp>
-        <p:nvSpPr>
-          <p:cNvPr id="46" name="Text 44"/>
-          <p:cNvSpPr/>
-          <p:nvPr/>
-        </p:nvSpPr>
-        <p:spPr>
-          <a:xfrm>
-            <a:off x="4447032" y="4169664"/>
-            <a:ext cx="685800" cy="384048"/>
-          </a:xfrm>
-          <a:prstGeom prst="rect">
-            <a:avLst/>
-          </a:prstGeom>
-          <a:noFill/>
-          <a:ln/>
-        </p:spPr>
-        <p:txBody>
-          <a:bodyPr wrap="square" lIns="0" tIns="0" rIns="0" bIns="0" rtlCol="0" anchor="ctr"/>
-          <a:lstStyle/>
-          <a:p>
-            <a:pPr algn="ctr" indent="0" marL="0">
-              <a:buNone/>
-            </a:pPr>
-            <a:r>
-              <a:rPr lang="en-US" sz="900" b="1" dirty="0">
-                <a:solidFill>
-                  <a:srgbClr val="9D174D"/>
-                </a:solidFill>
-                <a:latin typeface="Trebuchet MS" pitchFamily="34" charset="0"/>
-                <a:ea typeface="Trebuchet MS" pitchFamily="34" charset="-122"/>
-                <a:cs typeface="Trebuchet MS" pitchFamily="34" charset="-120"/>
-              </a:rPr>
-              <a:t>e</a:t>
-            </a:r>
-            <a:endParaRPr lang="en-US" sz="900" dirty="0"/>
-          </a:p>
-        </p:txBody>
-      </p:sp>
-      <p:sp>
-        <p:nvSpPr>
-          <p:cNvPr id="47" name="Shape 45"/>
-          <p:cNvSpPr/>
-          <p:nvPr/>
-        </p:nvSpPr>
-        <p:spPr>
-          <a:xfrm>
-            <a:off x="5254752" y="4169664"/>
-            <a:ext cx="685800" cy="384048"/>
-          </a:xfrm>
-          <a:prstGeom prst="rect">
-            <a:avLst>
-              <a:gd name="adj" fmla="val 9524"/>
-            </a:avLst>
-          </a:prstGeom>
-          <a:solidFill>
-            <a:srgbClr val="FFFFFF"/>
-          </a:solidFill>
-          <a:ln w="12700">
-            <a:solidFill>
-              <a:srgbClr val="DB2777"/>
-            </a:solidFill>
-            <a:prstDash val="solid"/>
-          </a:ln>
-        </p:spPr>
-      </p:sp>
-      <p:sp>
-        <p:nvSpPr>
-          <p:cNvPr id="48" name="Text 46"/>
-          <p:cNvSpPr/>
-          <p:nvPr/>
-        </p:nvSpPr>
-        <p:spPr>
-          <a:xfrm>
-            <a:off x="5254752" y="4169664"/>
-            <a:ext cx="685800" cy="384048"/>
-          </a:xfrm>
-          <a:prstGeom prst="rect">
-            <a:avLst/>
-          </a:prstGeom>
-          <a:noFill/>
-          <a:ln/>
-        </p:spPr>
-        <p:txBody>
-          <a:bodyPr wrap="square" lIns="0" tIns="0" rIns="0" bIns="0" rtlCol="0" anchor="ctr"/>
-          <a:lstStyle/>
-          <a:p>
-            <a:pPr algn="ctr" indent="0" marL="0">
-              <a:buNone/>
-            </a:pPr>
-            <a:r>
-              <a:rPr lang="en-US" sz="900" b="1" dirty="0">
-                <a:solidFill>
-                  <a:srgbClr val="9D174D"/>
-                </a:solidFill>
-                <a:latin typeface="Trebuchet MS" pitchFamily="34" charset="0"/>
-                <a:ea typeface="Trebuchet MS" pitchFamily="34" charset="-122"/>
-                <a:cs typeface="Trebuchet MS" pitchFamily="34" charset="-120"/>
-              </a:rPr>
-              <a:t>c</a:t>
-            </a:r>
-            <a:endParaRPr lang="en-US" sz="900" dirty="0"/>
-          </a:p>
-        </p:txBody>
-      </p:sp>
-      <p:sp>
-        <p:nvSpPr>
-          <p:cNvPr id="49" name="Text 47"/>
-          <p:cNvSpPr/>
-          <p:nvPr/>
-        </p:nvSpPr>
-        <p:spPr>
-          <a:xfrm>
-            <a:off x="5254752" y="4572000"/>
-            <a:ext cx="685800" cy="219456"/>
-          </a:xfrm>
-          <a:prstGeom prst="rect">
-            <a:avLst/>
-          </a:prstGeom>
-          <a:noFill/>
-          <a:ln/>
-        </p:spPr>
-        <p:txBody>
-          <a:bodyPr wrap="square" lIns="0" tIns="0" rIns="0" bIns="0" rtlCol="0" anchor="t"/>
-          <a:lstStyle/>
-          <a:p>
-            <a:pPr algn="ctr" indent="0" marL="0">
-              <a:buNone/>
-            </a:pPr>
-            <a:r>
-              <a:rPr lang="en-US" sz="750" i="1" dirty="0">
-                <a:solidFill>
-                  <a:srgbClr val="94A3B8"/>
-                </a:solidFill>
-                <a:latin typeface="Calibri" pitchFamily="34" charset="0"/>
-                <a:ea typeface="Calibri" pitchFamily="34" charset="-122"/>
-                <a:cs typeface="Calibri" pitchFamily="34" charset="-120"/>
-              </a:rPr>
-              <a:t>/k/</a:t>
-            </a:r>
-            <a:endParaRPr lang="en-US" sz="750" dirty="0"/>
-          </a:p>
-        </p:txBody>
-      </p:sp>
-      <p:sp>
-        <p:nvSpPr>
-          <p:cNvPr id="50" name="Shape 48"/>
-          <p:cNvSpPr/>
-          <p:nvPr/>
-        </p:nvSpPr>
-        <p:spPr>
-          <a:xfrm>
-            <a:off x="6062472" y="4169664"/>
-            <a:ext cx="685800" cy="384048"/>
-          </a:xfrm>
-          <a:prstGeom prst="rect">
-            <a:avLst>
-              <a:gd name="adj" fmla="val 9524"/>
-            </a:avLst>
-          </a:prstGeom>
-          <a:solidFill>
-            <a:srgbClr val="FFFFFF"/>
-          </a:solidFill>
-          <a:ln w="12700">
-            <a:solidFill>
-              <a:srgbClr val="DB2777"/>
-            </a:solidFill>
-            <a:prstDash val="solid"/>
-          </a:ln>
-        </p:spPr>
-      </p:sp>
-      <p:sp>
-        <p:nvSpPr>
-          <p:cNvPr id="51" name="Text 49"/>
-          <p:cNvSpPr/>
-          <p:nvPr/>
-        </p:nvSpPr>
-        <p:spPr>
-          <a:xfrm>
-            <a:off x="6062472" y="4169664"/>
-            <a:ext cx="685800" cy="384048"/>
-          </a:xfrm>
-          <a:prstGeom prst="rect">
-            <a:avLst/>
-          </a:prstGeom>
-          <a:noFill/>
-          <a:ln/>
-        </p:spPr>
-        <p:txBody>
-          <a:bodyPr wrap="square" lIns="0" tIns="0" rIns="0" bIns="0" rtlCol="0" anchor="ctr"/>
-          <a:lstStyle/>
-          <a:p>
-            <a:pPr algn="ctr" indent="0" marL="0">
-              <a:buNone/>
-            </a:pPr>
-            <a:r>
-              <a:rPr lang="en-US" sz="900" b="1" dirty="0">
-                <a:solidFill>
-                  <a:srgbClr val="9D174D"/>
-                </a:solidFill>
-                <a:latin typeface="Trebuchet MS" pitchFamily="34" charset="0"/>
-                <a:ea typeface="Trebuchet MS" pitchFamily="34" charset="-122"/>
-                <a:cs typeface="Trebuchet MS" pitchFamily="34" charset="-120"/>
-              </a:rPr>
               <a:t>t</a:t>
-            </a:r>
-            <a:endParaRPr lang="en-US" sz="900" dirty="0"/>
-          </a:p>
-        </p:txBody>
-      </p:sp>
-      <p:sp>
-        <p:nvSpPr>
-          <p:cNvPr id="52" name="Shape 50"/>
-          <p:cNvSpPr/>
-          <p:nvPr/>
-        </p:nvSpPr>
-        <p:spPr>
-          <a:xfrm>
-            <a:off x="6870192" y="4169664"/>
-            <a:ext cx="685800" cy="384048"/>
-          </a:xfrm>
-          <a:prstGeom prst="rect">
-            <a:avLst>
-              <a:gd name="adj" fmla="val 9524"/>
-            </a:avLst>
-          </a:prstGeom>
-          <a:solidFill>
-            <a:srgbClr val="FFFFFF"/>
-          </a:solidFill>
-          <a:ln w="12700">
-            <a:solidFill>
-              <a:srgbClr val="DB2777"/>
-            </a:solidFill>
-            <a:prstDash val="solid"/>
-          </a:ln>
-        </p:spPr>
-      </p:sp>
-      <p:sp>
-        <p:nvSpPr>
-          <p:cNvPr id="53" name="Text 51"/>
-          <p:cNvSpPr/>
-          <p:nvPr/>
-        </p:nvSpPr>
-        <p:spPr>
-          <a:xfrm>
-            <a:off x="6870192" y="4169664"/>
-            <a:ext cx="685800" cy="384048"/>
-          </a:xfrm>
-          <a:prstGeom prst="rect">
-            <a:avLst/>
-          </a:prstGeom>
-          <a:noFill/>
-          <a:ln/>
-        </p:spPr>
-        <p:txBody>
-          <a:bodyPr wrap="square" lIns="0" tIns="0" rIns="0" bIns="0" rtlCol="0" anchor="ctr"/>
-          <a:lstStyle/>
-          <a:p>
-            <a:pPr algn="ctr" indent="0" marL="0">
-              <a:buNone/>
-            </a:pPr>
-            <a:r>
-              <a:rPr lang="en-US" sz="900" b="1" dirty="0">
-                <a:solidFill>
-                  <a:srgbClr val="9D174D"/>
-                </a:solidFill>
-                <a:latin typeface="Trebuchet MS" pitchFamily="34" charset="0"/>
-                <a:ea typeface="Trebuchet MS" pitchFamily="34" charset="-122"/>
-                <a:cs typeface="Trebuchet MS" pitchFamily="34" charset="-120"/>
-              </a:rPr>
-              <a:t>l</a:t>
-            </a:r>
-            <a:endParaRPr lang="en-US" sz="900" dirty="0"/>
-          </a:p>
-        </p:txBody>
-      </p:sp>
-      <p:sp>
-        <p:nvSpPr>
-          <p:cNvPr id="54" name="Shape 52"/>
-          <p:cNvSpPr/>
-          <p:nvPr/>
-        </p:nvSpPr>
-        <p:spPr>
-          <a:xfrm>
-            <a:off x="7677912" y="4169664"/>
-            <a:ext cx="685800" cy="384048"/>
-          </a:xfrm>
-          <a:prstGeom prst="rect">
-            <a:avLst>
-              <a:gd name="adj" fmla="val 9524"/>
-            </a:avLst>
-          </a:prstGeom>
-          <a:solidFill>
-            <a:srgbClr val="FFFFFF"/>
-          </a:solidFill>
-          <a:ln w="12700">
-            <a:solidFill>
-              <a:srgbClr val="DB2777"/>
-            </a:solidFill>
-            <a:prstDash val="solid"/>
-          </a:ln>
-        </p:spPr>
-      </p:sp>
-      <p:sp>
-        <p:nvSpPr>
-          <p:cNvPr id="55" name="Text 53"/>
-          <p:cNvSpPr/>
-          <p:nvPr/>
-        </p:nvSpPr>
-        <p:spPr>
-          <a:xfrm>
-            <a:off x="7677912" y="4169664"/>
-            <a:ext cx="685800" cy="384048"/>
-          </a:xfrm>
-          <a:prstGeom prst="rect">
-            <a:avLst/>
-          </a:prstGeom>
-          <a:noFill/>
-          <a:ln/>
-        </p:spPr>
-        <p:txBody>
-          <a:bodyPr wrap="square" lIns="0" tIns="0" rIns="0" bIns="0" rtlCol="0" anchor="ctr"/>
-          <a:lstStyle/>
-          <a:p>
-            <a:pPr algn="ctr" indent="0" marL="0">
-              <a:buNone/>
-            </a:pPr>
-            <a:r>
-              <a:rPr lang="en-US" sz="900" b="1" dirty="0">
-                <a:solidFill>
-                  <a:srgbClr val="9D174D"/>
-                </a:solidFill>
-                <a:latin typeface="Trebuchet MS" pitchFamily="34" charset="0"/>
-                <a:ea typeface="Trebuchet MS" pitchFamily="34" charset="-122"/>
-                <a:cs typeface="Trebuchet MS" pitchFamily="34" charset="-120"/>
-              </a:rPr>
-              <a:t>y</a:t>
             </a:r>
             <a:endParaRPr lang="en-US" sz="900" dirty="0"/>
           </a:p>
@@ -29485,7 +28690,7 @@
                 <a:ea typeface="Calibri" pitchFamily="34" charset="-122"/>
                 <a:cs typeface="Calibri" pitchFamily="34" charset="-120"/>
               </a:rPr>
-              <a:t>Word Labs  •  wordlabs.app  •  Root: 'fect' = make, do, accomplish</a:t>
+              <a:t>Word Labs  •  wordlabs.app  •  Root: 'fect' = do, make, perform</a:t>
             </a:r>
             <a:endParaRPr lang="en-US" sz="800" dirty="0"/>
           </a:p>
@@ -29624,7 +28829,7 @@
                 <a:ea typeface="Trebuchet MS" pitchFamily="34" charset="-122"/>
                 <a:cs typeface="Trebuchet MS" pitchFamily="34" charset="-120"/>
               </a:rPr>
-              <a:t>infection</a:t>
+              <a:t>ineffective</a:t>
             </a:r>
             <a:endParaRPr lang="en-US" sz="2800" dirty="0"/>
           </a:p>
@@ -30312,7 +29517,7 @@
                 <a:ea typeface="Calibri" pitchFamily="34" charset="-122"/>
                 <a:cs typeface="Calibri" pitchFamily="34" charset="-120"/>
               </a:rPr>
-              <a:t>Word Labs  •  wordlabs.app  •  Root: 'fect' = make, do, accomplish</a:t>
+              <a:t>Word Labs  •  wordlabs.app  •  Root: 'fect' = do, make, perform</a:t>
             </a:r>
             <a:endParaRPr lang="en-US" sz="800" dirty="0"/>
           </a:p>
@@ -30451,7 +29656,7 @@
                 <a:ea typeface="Trebuchet MS" pitchFamily="34" charset="-122"/>
                 <a:cs typeface="Trebuchet MS" pitchFamily="34" charset="-120"/>
               </a:rPr>
-              <a:t>infection</a:t>
+              <a:t>ineffective</a:t>
             </a:r>
             <a:endParaRPr lang="en-US" sz="2800" dirty="0"/>
           </a:p>
@@ -30531,8 +29736,8 @@
         </p:nvSpPr>
         <p:spPr>
           <a:xfrm>
-            <a:off x="2221992" y="2258568"/>
-            <a:ext cx="1828800" cy="292608"/>
+            <a:off x="1989734" y="2258568"/>
+            <a:ext cx="1581912" cy="292608"/>
           </a:xfrm>
           <a:prstGeom prst="rect">
             <a:avLst>
@@ -30565,8 +29770,8 @@
         </p:nvSpPr>
         <p:spPr>
           <a:xfrm>
-            <a:off x="2221992" y="2258568"/>
-            <a:ext cx="1828800" cy="292608"/>
+            <a:off x="1989734" y="2258568"/>
+            <a:ext cx="1581912" cy="292608"/>
           </a:xfrm>
           <a:prstGeom prst="rect">
             <a:avLst/>
@@ -30604,8 +29809,8 @@
         </p:nvSpPr>
         <p:spPr>
           <a:xfrm>
-            <a:off x="2221992" y="2569464"/>
-            <a:ext cx="1828800" cy="201168"/>
+            <a:off x="1989734" y="2569464"/>
+            <a:ext cx="1581912" cy="201168"/>
           </a:xfrm>
           <a:prstGeom prst="rect">
             <a:avLst/>
@@ -30629,7 +29834,7 @@
                 <a:ea typeface="Calibri" pitchFamily="34" charset="-122"/>
                 <a:cs typeface="Calibri" pitchFamily="34" charset="-120"/>
               </a:rPr>
-              <a:t>into, upon</a:t>
+              <a:t>not</a:t>
             </a:r>
             <a:endParaRPr lang="en-US" sz="850" dirty="0"/>
           </a:p>
@@ -30643,8 +29848,8 @@
         </p:nvSpPr>
         <p:spPr>
           <a:xfrm>
-            <a:off x="4370832" y="2258568"/>
-            <a:ext cx="1828800" cy="292608"/>
+            <a:off x="3659429" y="2258568"/>
+            <a:ext cx="1581912" cy="292608"/>
           </a:xfrm>
           <a:prstGeom prst="rect">
             <a:avLst>
@@ -30652,11 +29857,11 @@
             </a:avLst>
           </a:prstGeom>
           <a:solidFill>
-            <a:srgbClr val="CCFBF1"/>
+            <a:srgbClr val="FCE7F3"/>
           </a:solidFill>
           <a:ln w="19050">
             <a:solidFill>
-              <a:srgbClr val="0D9488"/>
+              <a:srgbClr val="DB2777"/>
             </a:solidFill>
             <a:prstDash val="solid"/>
           </a:ln>
@@ -30677,8 +29882,8 @@
         </p:nvSpPr>
         <p:spPr>
           <a:xfrm>
-            <a:off x="4370832" y="2258568"/>
-            <a:ext cx="1828800" cy="292608"/>
+            <a:off x="3659429" y="2258568"/>
+            <a:ext cx="1581912" cy="292608"/>
           </a:xfrm>
           <a:prstGeom prst="rect">
             <a:avLst/>
@@ -30696,13 +29901,13 @@
             <a:r>
               <a:rPr lang="en-US" sz="1300" b="1" dirty="0">
                 <a:solidFill>
-                  <a:srgbClr val="0F766E"/>
+                  <a:srgbClr val="9D174D"/>
                 </a:solidFill>
                 <a:latin typeface="Trebuchet MS" pitchFamily="34" charset="0"/>
                 <a:ea typeface="Trebuchet MS" pitchFamily="34" charset="-122"/>
                 <a:cs typeface="Trebuchet MS" pitchFamily="34" charset="-120"/>
               </a:rPr>
-              <a:t>fect</a:t>
+              <a:t>ef</a:t>
             </a:r>
             <a:endParaRPr lang="en-US" sz="1300" dirty="0"/>
           </a:p>
@@ -30716,8 +29921,8 @@
         </p:nvSpPr>
         <p:spPr>
           <a:xfrm>
-            <a:off x="4370832" y="2569464"/>
-            <a:ext cx="1828800" cy="201168"/>
+            <a:off x="3659429" y="2569464"/>
+            <a:ext cx="1581912" cy="201168"/>
           </a:xfrm>
           <a:prstGeom prst="rect">
             <a:avLst/>
@@ -30741,7 +29946,7 @@
                 <a:ea typeface="Calibri" pitchFamily="34" charset="-122"/>
                 <a:cs typeface="Calibri" pitchFamily="34" charset="-120"/>
               </a:rPr>
-              <a:t>make, do</a:t>
+              <a:t>out</a:t>
             </a:r>
             <a:endParaRPr lang="en-US" sz="850" dirty="0"/>
           </a:p>
@@ -30749,14 +29954,53 @@
       </p:sp>
       <p:sp>
         <p:nvSpPr>
-          <p:cNvPr id="22" name="Shape 20"/>
-          <p:cNvSpPr/>
-          <p:nvPr/>
-        </p:nvSpPr>
-        <p:spPr>
-          <a:xfrm>
-            <a:off x="6519672" y="2258568"/>
-            <a:ext cx="1828800" cy="292608"/>
+          <p:cNvPr id="22" name="Text 20"/>
+          <p:cNvSpPr/>
+          <p:nvPr/>
+        </p:nvSpPr>
+        <p:spPr>
+          <a:xfrm>
+            <a:off x="3659429" y="2752344"/>
+            <a:ext cx="1581912" cy="182880"/>
+          </a:xfrm>
+          <a:prstGeom prst="rect">
+            <a:avLst/>
+          </a:prstGeom>
+          <a:noFill/>
+          <a:ln/>
+        </p:spPr>
+        <p:txBody>
+          <a:bodyPr wrap="square" lIns="0" tIns="0" rIns="0" bIns="0" rtlCol="0" anchor="t"/>
+          <a:lstStyle/>
+          <a:p>
+            <a:pPr algn="ctr" indent="0" marL="0">
+              <a:buNone/>
+            </a:pPr>
+            <a:r>
+              <a:rPr lang="en-US" sz="700" i="1" dirty="0">
+                <a:solidFill>
+                  <a:srgbClr val="94A3B8"/>
+                </a:solidFill>
+                <a:latin typeface="Calibri" pitchFamily="34" charset="0"/>
+                <a:ea typeface="Calibri" pitchFamily="34" charset="-122"/>
+                <a:cs typeface="Calibri" pitchFamily="34" charset="-120"/>
+              </a:rPr>
+              <a:t>ex → ef before 'f'</a:t>
+            </a:r>
+            <a:endParaRPr lang="en-US" sz="700" dirty="0"/>
+          </a:p>
+        </p:txBody>
+      </p:sp>
+      <p:sp>
+        <p:nvSpPr>
+          <p:cNvPr id="23" name="Shape 21"/>
+          <p:cNvSpPr/>
+          <p:nvPr/>
+        </p:nvSpPr>
+        <p:spPr>
+          <a:xfrm>
+            <a:off x="5329123" y="2258568"/>
+            <a:ext cx="1581912" cy="292608"/>
           </a:xfrm>
           <a:prstGeom prst="rect">
             <a:avLst>
@@ -30764,11 +30008,11 @@
             </a:avLst>
           </a:prstGeom>
           <a:solidFill>
-            <a:srgbClr val="FCE7F3"/>
+            <a:srgbClr val="CCFBF1"/>
           </a:solidFill>
           <a:ln w="19050">
             <a:solidFill>
-              <a:srgbClr val="DB2777"/>
+              <a:srgbClr val="0D9488"/>
             </a:solidFill>
             <a:prstDash val="solid"/>
           </a:ln>
@@ -30783,14 +30027,14 @@
       </p:sp>
       <p:sp>
         <p:nvSpPr>
-          <p:cNvPr id="23" name="Text 21"/>
-          <p:cNvSpPr/>
-          <p:nvPr/>
-        </p:nvSpPr>
-        <p:spPr>
-          <a:xfrm>
-            <a:off x="6519672" y="2258568"/>
-            <a:ext cx="1828800" cy="292608"/>
+          <p:cNvPr id="24" name="Text 22"/>
+          <p:cNvSpPr/>
+          <p:nvPr/>
+        </p:nvSpPr>
+        <p:spPr>
+          <a:xfrm>
+            <a:off x="5329123" y="2258568"/>
+            <a:ext cx="1581912" cy="292608"/>
           </a:xfrm>
           <a:prstGeom prst="rect">
             <a:avLst/>
@@ -30808,13 +30052,13 @@
             <a:r>
               <a:rPr lang="en-US" sz="1300" b="1" dirty="0">
                 <a:solidFill>
-                  <a:srgbClr val="9D174D"/>
+                  <a:srgbClr val="0F766E"/>
                 </a:solidFill>
                 <a:latin typeface="Trebuchet MS" pitchFamily="34" charset="0"/>
                 <a:ea typeface="Trebuchet MS" pitchFamily="34" charset="-122"/>
                 <a:cs typeface="Trebuchet MS" pitchFamily="34" charset="-120"/>
               </a:rPr>
-              <a:t>ion</a:t>
+              <a:t>fect</a:t>
             </a:r>
             <a:endParaRPr lang="en-US" sz="1300" dirty="0"/>
           </a:p>
@@ -30822,14 +30066,14 @@
       </p:sp>
       <p:sp>
         <p:nvSpPr>
-          <p:cNvPr id="24" name="Text 22"/>
-          <p:cNvSpPr/>
-          <p:nvPr/>
-        </p:nvSpPr>
-        <p:spPr>
-          <a:xfrm>
-            <a:off x="6519672" y="2569464"/>
-            <a:ext cx="1828800" cy="201168"/>
+          <p:cNvPr id="25" name="Text 23"/>
+          <p:cNvSpPr/>
+          <p:nvPr/>
+        </p:nvSpPr>
+        <p:spPr>
+          <a:xfrm>
+            <a:off x="5329123" y="2569464"/>
+            <a:ext cx="1581912" cy="201168"/>
           </a:xfrm>
           <a:prstGeom prst="rect">
             <a:avLst/>
@@ -30853,7 +30097,7 @@
                 <a:ea typeface="Calibri" pitchFamily="34" charset="-122"/>
                 <a:cs typeface="Calibri" pitchFamily="34" charset="-120"/>
               </a:rPr>
-              <a:t>state or result of</a:t>
+              <a:t>do, make</a:t>
             </a:r>
             <a:endParaRPr lang="en-US" sz="850" dirty="0"/>
           </a:p>
@@ -30861,7 +30105,119 @@
       </p:sp>
       <p:sp>
         <p:nvSpPr>
-          <p:cNvPr id="25" name="Shape 23"/>
+          <p:cNvPr id="26" name="Shape 24"/>
+          <p:cNvSpPr/>
+          <p:nvPr/>
+        </p:nvSpPr>
+        <p:spPr>
+          <a:xfrm>
+            <a:off x="6998818" y="2258568"/>
+            <a:ext cx="1581912" cy="292608"/>
+          </a:xfrm>
+          <a:prstGeom prst="rect">
+            <a:avLst>
+              <a:gd name="adj" fmla="val 25000"/>
+            </a:avLst>
+          </a:prstGeom>
+          <a:solidFill>
+            <a:srgbClr val="FCE7F3"/>
+          </a:solidFill>
+          <a:ln w="19050">
+            <a:solidFill>
+              <a:srgbClr val="DB2777"/>
+            </a:solidFill>
+            <a:prstDash val="solid"/>
+          </a:ln>
+          <a:effectLst>
+            <a:outerShdw sx="100000" sy="100000" kx="0" ky="0" algn="bl" rotWithShape="0" blurRad="101600" dist="38100" dir="8100000">
+              <a:srgbClr val="000000">
+                <a:alpha val="12000"/>
+              </a:srgbClr>
+            </a:outerShdw>
+          </a:effectLst>
+        </p:spPr>
+      </p:sp>
+      <p:sp>
+        <p:nvSpPr>
+          <p:cNvPr id="27" name="Text 25"/>
+          <p:cNvSpPr/>
+          <p:nvPr/>
+        </p:nvSpPr>
+        <p:spPr>
+          <a:xfrm>
+            <a:off x="6998818" y="2258568"/>
+            <a:ext cx="1581912" cy="292608"/>
+          </a:xfrm>
+          <a:prstGeom prst="rect">
+            <a:avLst/>
+          </a:prstGeom>
+          <a:noFill/>
+          <a:ln/>
+        </p:spPr>
+        <p:txBody>
+          <a:bodyPr wrap="square" lIns="0" tIns="0" rIns="0" bIns="0" rtlCol="0" anchor="ctr"/>
+          <a:lstStyle/>
+          <a:p>
+            <a:pPr algn="ctr" indent="0" marL="0">
+              <a:buNone/>
+            </a:pPr>
+            <a:r>
+              <a:rPr lang="en-US" sz="1300" b="1" dirty="0">
+                <a:solidFill>
+                  <a:srgbClr val="9D174D"/>
+                </a:solidFill>
+                <a:latin typeface="Trebuchet MS" pitchFamily="34" charset="0"/>
+                <a:ea typeface="Trebuchet MS" pitchFamily="34" charset="-122"/>
+                <a:cs typeface="Trebuchet MS" pitchFamily="34" charset="-120"/>
+              </a:rPr>
+              <a:t>ive</a:t>
+            </a:r>
+            <a:endParaRPr lang="en-US" sz="1300" dirty="0"/>
+          </a:p>
+        </p:txBody>
+      </p:sp>
+      <p:sp>
+        <p:nvSpPr>
+          <p:cNvPr id="28" name="Text 26"/>
+          <p:cNvSpPr/>
+          <p:nvPr/>
+        </p:nvSpPr>
+        <p:spPr>
+          <a:xfrm>
+            <a:off x="6998818" y="2569464"/>
+            <a:ext cx="1581912" cy="201168"/>
+          </a:xfrm>
+          <a:prstGeom prst="rect">
+            <a:avLst/>
+          </a:prstGeom>
+          <a:noFill/>
+          <a:ln/>
+        </p:spPr>
+        <p:txBody>
+          <a:bodyPr wrap="square" lIns="0" tIns="0" rIns="0" bIns="0" rtlCol="0" anchor="t"/>
+          <a:lstStyle/>
+          <a:p>
+            <a:pPr algn="ctr" indent="0" marL="0">
+              <a:buNone/>
+            </a:pPr>
+            <a:r>
+              <a:rPr lang="en-US" sz="850" dirty="0">
+                <a:solidFill>
+                  <a:srgbClr val="475569"/>
+                </a:solidFill>
+                <a:latin typeface="Calibri" pitchFamily="34" charset="0"/>
+                <a:ea typeface="Calibri" pitchFamily="34" charset="-122"/>
+                <a:cs typeface="Calibri" pitchFamily="34" charset="-120"/>
+              </a:rPr>
+              <a:t>having the quality of</a:t>
+            </a:r>
+            <a:endParaRPr lang="en-US" sz="850" dirty="0"/>
+          </a:p>
+        </p:txBody>
+      </p:sp>
+      <p:sp>
+        <p:nvSpPr>
+          <p:cNvPr id="29" name="Shape 27"/>
           <p:cNvSpPr/>
           <p:nvPr/>
         </p:nvSpPr>
@@ -30888,7 +30244,7 @@
       </p:sp>
       <p:sp>
         <p:nvSpPr>
-          <p:cNvPr id="26" name="Text 24"/>
+          <p:cNvPr id="30" name="Text 28"/>
           <p:cNvSpPr/>
           <p:nvPr/>
         </p:nvSpPr>
@@ -30927,7 +30283,7 @@
       </p:sp>
       <p:sp>
         <p:nvSpPr>
-          <p:cNvPr id="27" name="Shape 25"/>
+          <p:cNvPr id="31" name="Shape 29"/>
           <p:cNvSpPr/>
           <p:nvPr/>
         </p:nvSpPr>
@@ -30954,7 +30310,7 @@
       </p:sp>
       <p:sp>
         <p:nvSpPr>
-          <p:cNvPr id="28" name="Text 26"/>
+          <p:cNvPr id="32" name="Text 30"/>
           <p:cNvSpPr/>
           <p:nvPr/>
         </p:nvSpPr>
@@ -30993,7 +30349,7 @@
       </p:sp>
       <p:sp>
         <p:nvSpPr>
-          <p:cNvPr id="29" name="Shape 27"/>
+          <p:cNvPr id="33" name="Shape 31"/>
           <p:cNvSpPr/>
           <p:nvPr/>
         </p:nvSpPr>
@@ -31020,7 +30376,7 @@
       </p:sp>
       <p:sp>
         <p:nvSpPr>
-          <p:cNvPr id="30" name="Text 28"/>
+          <p:cNvPr id="34" name="Text 32"/>
           <p:cNvSpPr/>
           <p:nvPr/>
         </p:nvSpPr>
@@ -31059,7 +30415,7 @@
       </p:sp>
       <p:sp>
         <p:nvSpPr>
-          <p:cNvPr id="31" name="Shape 29"/>
+          <p:cNvPr id="35" name="Shape 33"/>
           <p:cNvSpPr/>
           <p:nvPr/>
         </p:nvSpPr>
@@ -31086,7 +30442,7 @@
       </p:sp>
       <p:sp>
         <p:nvSpPr>
-          <p:cNvPr id="32" name="Text 30"/>
+          <p:cNvPr id="36" name="Text 34"/>
           <p:cNvSpPr/>
           <p:nvPr/>
         </p:nvSpPr>
@@ -31409,7 +30765,7 @@
                 <a:ea typeface="Calibri" pitchFamily="34" charset="-122"/>
                 <a:cs typeface="Calibri" pitchFamily="34" charset="-120"/>
               </a:rPr>
-              <a:t>Word Labs  •  wordlabs.app  •  Root: 'fect' = make, do, accomplish</a:t>
+              <a:t>Word Labs  •  wordlabs.app  •  Root: 'fect' = do, make, perform</a:t>
             </a:r>
             <a:endParaRPr lang="en-US" sz="800" dirty="0"/>
           </a:p>
@@ -31548,7 +30904,7 @@
                 <a:ea typeface="Trebuchet MS" pitchFamily="34" charset="-122"/>
                 <a:cs typeface="Trebuchet MS" pitchFamily="34" charset="-120"/>
               </a:rPr>
-              <a:t>infection</a:t>
+              <a:t>ineffective</a:t>
             </a:r>
             <a:endParaRPr lang="en-US" sz="2800" dirty="0"/>
           </a:p>
@@ -31628,8 +30984,8 @@
         </p:nvSpPr>
         <p:spPr>
           <a:xfrm>
-            <a:off x="2221992" y="2258568"/>
-            <a:ext cx="1828800" cy="292608"/>
+            <a:off x="1989734" y="2258568"/>
+            <a:ext cx="1581912" cy="292608"/>
           </a:xfrm>
           <a:prstGeom prst="rect">
             <a:avLst>
@@ -31662,8 +31018,8 @@
         </p:nvSpPr>
         <p:spPr>
           <a:xfrm>
-            <a:off x="2221992" y="2258568"/>
-            <a:ext cx="1828800" cy="292608"/>
+            <a:off x="1989734" y="2258568"/>
+            <a:ext cx="1581912" cy="292608"/>
           </a:xfrm>
           <a:prstGeom prst="rect">
             <a:avLst/>
@@ -31701,8 +31057,8 @@
         </p:nvSpPr>
         <p:spPr>
           <a:xfrm>
-            <a:off x="2221992" y="2569464"/>
-            <a:ext cx="1828800" cy="201168"/>
+            <a:off x="1989734" y="2569464"/>
+            <a:ext cx="1581912" cy="201168"/>
           </a:xfrm>
           <a:prstGeom prst="rect">
             <a:avLst/>
@@ -31726,7 +31082,7 @@
                 <a:ea typeface="Calibri" pitchFamily="34" charset="-122"/>
                 <a:cs typeface="Calibri" pitchFamily="34" charset="-120"/>
               </a:rPr>
-              <a:t>into, upon</a:t>
+              <a:t>not</a:t>
             </a:r>
             <a:endParaRPr lang="en-US" sz="850" dirty="0"/>
           </a:p>
@@ -31740,8 +31096,8 @@
         </p:nvSpPr>
         <p:spPr>
           <a:xfrm>
-            <a:off x="4370832" y="2258568"/>
-            <a:ext cx="1828800" cy="292608"/>
+            <a:off x="3659429" y="2258568"/>
+            <a:ext cx="1581912" cy="292608"/>
           </a:xfrm>
           <a:prstGeom prst="rect">
             <a:avLst>
@@ -31749,11 +31105,11 @@
             </a:avLst>
           </a:prstGeom>
           <a:solidFill>
-            <a:srgbClr val="CCFBF1"/>
+            <a:srgbClr val="FCE7F3"/>
           </a:solidFill>
           <a:ln w="19050">
             <a:solidFill>
-              <a:srgbClr val="0D9488"/>
+              <a:srgbClr val="DB2777"/>
             </a:solidFill>
             <a:prstDash val="solid"/>
           </a:ln>
@@ -31774,8 +31130,8 @@
         </p:nvSpPr>
         <p:spPr>
           <a:xfrm>
-            <a:off x="4370832" y="2258568"/>
-            <a:ext cx="1828800" cy="292608"/>
+            <a:off x="3659429" y="2258568"/>
+            <a:ext cx="1581912" cy="292608"/>
           </a:xfrm>
           <a:prstGeom prst="rect">
             <a:avLst/>
@@ -31793,13 +31149,13 @@
             <a:r>
               <a:rPr lang="en-US" sz="1300" b="1" dirty="0">
                 <a:solidFill>
-                  <a:srgbClr val="0F766E"/>
+                  <a:srgbClr val="9D174D"/>
                 </a:solidFill>
                 <a:latin typeface="Trebuchet MS" pitchFamily="34" charset="0"/>
                 <a:ea typeface="Trebuchet MS" pitchFamily="34" charset="-122"/>
                 <a:cs typeface="Trebuchet MS" pitchFamily="34" charset="-120"/>
               </a:rPr>
-              <a:t>fect</a:t>
+              <a:t>ef</a:t>
             </a:r>
             <a:endParaRPr lang="en-US" sz="1300" dirty="0"/>
           </a:p>
@@ -31813,8 +31169,8 @@
         </p:nvSpPr>
         <p:spPr>
           <a:xfrm>
-            <a:off x="4370832" y="2569464"/>
-            <a:ext cx="1828800" cy="201168"/>
+            <a:off x="3659429" y="2569464"/>
+            <a:ext cx="1581912" cy="201168"/>
           </a:xfrm>
           <a:prstGeom prst="rect">
             <a:avLst/>
@@ -31838,7 +31194,7 @@
                 <a:ea typeface="Calibri" pitchFamily="34" charset="-122"/>
                 <a:cs typeface="Calibri" pitchFamily="34" charset="-120"/>
               </a:rPr>
-              <a:t>make, do</a:t>
+              <a:t>out</a:t>
             </a:r>
             <a:endParaRPr lang="en-US" sz="850" dirty="0"/>
           </a:p>
@@ -31846,14 +31202,53 @@
       </p:sp>
       <p:sp>
         <p:nvSpPr>
-          <p:cNvPr id="22" name="Shape 20"/>
-          <p:cNvSpPr/>
-          <p:nvPr/>
-        </p:nvSpPr>
-        <p:spPr>
-          <a:xfrm>
-            <a:off x="6519672" y="2258568"/>
-            <a:ext cx="1828800" cy="292608"/>
+          <p:cNvPr id="22" name="Text 20"/>
+          <p:cNvSpPr/>
+          <p:nvPr/>
+        </p:nvSpPr>
+        <p:spPr>
+          <a:xfrm>
+            <a:off x="3659429" y="2752344"/>
+            <a:ext cx="1581912" cy="182880"/>
+          </a:xfrm>
+          <a:prstGeom prst="rect">
+            <a:avLst/>
+          </a:prstGeom>
+          <a:noFill/>
+          <a:ln/>
+        </p:spPr>
+        <p:txBody>
+          <a:bodyPr wrap="square" lIns="0" tIns="0" rIns="0" bIns="0" rtlCol="0" anchor="t"/>
+          <a:lstStyle/>
+          <a:p>
+            <a:pPr algn="ctr" indent="0" marL="0">
+              <a:buNone/>
+            </a:pPr>
+            <a:r>
+              <a:rPr lang="en-US" sz="700" i="1" dirty="0">
+                <a:solidFill>
+                  <a:srgbClr val="94A3B8"/>
+                </a:solidFill>
+                <a:latin typeface="Calibri" pitchFamily="34" charset="0"/>
+                <a:ea typeface="Calibri" pitchFamily="34" charset="-122"/>
+                <a:cs typeface="Calibri" pitchFamily="34" charset="-120"/>
+              </a:rPr>
+              <a:t>ex → ef before 'f'</a:t>
+            </a:r>
+            <a:endParaRPr lang="en-US" sz="700" dirty="0"/>
+          </a:p>
+        </p:txBody>
+      </p:sp>
+      <p:sp>
+        <p:nvSpPr>
+          <p:cNvPr id="23" name="Shape 21"/>
+          <p:cNvSpPr/>
+          <p:nvPr/>
+        </p:nvSpPr>
+        <p:spPr>
+          <a:xfrm>
+            <a:off x="5329123" y="2258568"/>
+            <a:ext cx="1581912" cy="292608"/>
           </a:xfrm>
           <a:prstGeom prst="rect">
             <a:avLst>
@@ -31861,11 +31256,11 @@
             </a:avLst>
           </a:prstGeom>
           <a:solidFill>
-            <a:srgbClr val="FCE7F3"/>
+            <a:srgbClr val="CCFBF1"/>
           </a:solidFill>
           <a:ln w="19050">
             <a:solidFill>
-              <a:srgbClr val="DB2777"/>
+              <a:srgbClr val="0D9488"/>
             </a:solidFill>
             <a:prstDash val="solid"/>
           </a:ln>
@@ -31880,14 +31275,14 @@
       </p:sp>
       <p:sp>
         <p:nvSpPr>
-          <p:cNvPr id="23" name="Text 21"/>
-          <p:cNvSpPr/>
-          <p:nvPr/>
-        </p:nvSpPr>
-        <p:spPr>
-          <a:xfrm>
-            <a:off x="6519672" y="2258568"/>
-            <a:ext cx="1828800" cy="292608"/>
+          <p:cNvPr id="24" name="Text 22"/>
+          <p:cNvSpPr/>
+          <p:nvPr/>
+        </p:nvSpPr>
+        <p:spPr>
+          <a:xfrm>
+            <a:off x="5329123" y="2258568"/>
+            <a:ext cx="1581912" cy="292608"/>
           </a:xfrm>
           <a:prstGeom prst="rect">
             <a:avLst/>
@@ -31905,13 +31300,13 @@
             <a:r>
               <a:rPr lang="en-US" sz="1300" b="1" dirty="0">
                 <a:solidFill>
-                  <a:srgbClr val="9D174D"/>
+                  <a:srgbClr val="0F766E"/>
                 </a:solidFill>
                 <a:latin typeface="Trebuchet MS" pitchFamily="34" charset="0"/>
                 <a:ea typeface="Trebuchet MS" pitchFamily="34" charset="-122"/>
                 <a:cs typeface="Trebuchet MS" pitchFamily="34" charset="-120"/>
               </a:rPr>
-              <a:t>ion</a:t>
+              <a:t>fect</a:t>
             </a:r>
             <a:endParaRPr lang="en-US" sz="1300" dirty="0"/>
           </a:p>
@@ -31919,14 +31314,14 @@
       </p:sp>
       <p:sp>
         <p:nvSpPr>
-          <p:cNvPr id="24" name="Text 22"/>
-          <p:cNvSpPr/>
-          <p:nvPr/>
-        </p:nvSpPr>
-        <p:spPr>
-          <a:xfrm>
-            <a:off x="6519672" y="2569464"/>
-            <a:ext cx="1828800" cy="201168"/>
+          <p:cNvPr id="25" name="Text 23"/>
+          <p:cNvSpPr/>
+          <p:nvPr/>
+        </p:nvSpPr>
+        <p:spPr>
+          <a:xfrm>
+            <a:off x="5329123" y="2569464"/>
+            <a:ext cx="1581912" cy="201168"/>
           </a:xfrm>
           <a:prstGeom prst="rect">
             <a:avLst/>
@@ -31950,7 +31345,7 @@
                 <a:ea typeface="Calibri" pitchFamily="34" charset="-122"/>
                 <a:cs typeface="Calibri" pitchFamily="34" charset="-120"/>
               </a:rPr>
-              <a:t>state or result of</a:t>
+              <a:t>do, make</a:t>
             </a:r>
             <a:endParaRPr lang="en-US" sz="850" dirty="0"/>
           </a:p>
@@ -31958,7 +31353,119 @@
       </p:sp>
       <p:sp>
         <p:nvSpPr>
-          <p:cNvPr id="25" name="Shape 23"/>
+          <p:cNvPr id="26" name="Shape 24"/>
+          <p:cNvSpPr/>
+          <p:nvPr/>
+        </p:nvSpPr>
+        <p:spPr>
+          <a:xfrm>
+            <a:off x="6998818" y="2258568"/>
+            <a:ext cx="1581912" cy="292608"/>
+          </a:xfrm>
+          <a:prstGeom prst="rect">
+            <a:avLst>
+              <a:gd name="adj" fmla="val 25000"/>
+            </a:avLst>
+          </a:prstGeom>
+          <a:solidFill>
+            <a:srgbClr val="FCE7F3"/>
+          </a:solidFill>
+          <a:ln w="19050">
+            <a:solidFill>
+              <a:srgbClr val="DB2777"/>
+            </a:solidFill>
+            <a:prstDash val="solid"/>
+          </a:ln>
+          <a:effectLst>
+            <a:outerShdw sx="100000" sy="100000" kx="0" ky="0" algn="bl" rotWithShape="0" blurRad="101600" dist="38100" dir="8100000">
+              <a:srgbClr val="000000">
+                <a:alpha val="12000"/>
+              </a:srgbClr>
+            </a:outerShdw>
+          </a:effectLst>
+        </p:spPr>
+      </p:sp>
+      <p:sp>
+        <p:nvSpPr>
+          <p:cNvPr id="27" name="Text 25"/>
+          <p:cNvSpPr/>
+          <p:nvPr/>
+        </p:nvSpPr>
+        <p:spPr>
+          <a:xfrm>
+            <a:off x="6998818" y="2258568"/>
+            <a:ext cx="1581912" cy="292608"/>
+          </a:xfrm>
+          <a:prstGeom prst="rect">
+            <a:avLst/>
+          </a:prstGeom>
+          <a:noFill/>
+          <a:ln/>
+        </p:spPr>
+        <p:txBody>
+          <a:bodyPr wrap="square" lIns="0" tIns="0" rIns="0" bIns="0" rtlCol="0" anchor="ctr"/>
+          <a:lstStyle/>
+          <a:p>
+            <a:pPr algn="ctr" indent="0" marL="0">
+              <a:buNone/>
+            </a:pPr>
+            <a:r>
+              <a:rPr lang="en-US" sz="1300" b="1" dirty="0">
+                <a:solidFill>
+                  <a:srgbClr val="9D174D"/>
+                </a:solidFill>
+                <a:latin typeface="Trebuchet MS" pitchFamily="34" charset="0"/>
+                <a:ea typeface="Trebuchet MS" pitchFamily="34" charset="-122"/>
+                <a:cs typeface="Trebuchet MS" pitchFamily="34" charset="-120"/>
+              </a:rPr>
+              <a:t>ive</a:t>
+            </a:r>
+            <a:endParaRPr lang="en-US" sz="1300" dirty="0"/>
+          </a:p>
+        </p:txBody>
+      </p:sp>
+      <p:sp>
+        <p:nvSpPr>
+          <p:cNvPr id="28" name="Text 26"/>
+          <p:cNvSpPr/>
+          <p:nvPr/>
+        </p:nvSpPr>
+        <p:spPr>
+          <a:xfrm>
+            <a:off x="6998818" y="2569464"/>
+            <a:ext cx="1581912" cy="201168"/>
+          </a:xfrm>
+          <a:prstGeom prst="rect">
+            <a:avLst/>
+          </a:prstGeom>
+          <a:noFill/>
+          <a:ln/>
+        </p:spPr>
+        <p:txBody>
+          <a:bodyPr wrap="square" lIns="0" tIns="0" rIns="0" bIns="0" rtlCol="0" anchor="t"/>
+          <a:lstStyle/>
+          <a:p>
+            <a:pPr algn="ctr" indent="0" marL="0">
+              <a:buNone/>
+            </a:pPr>
+            <a:r>
+              <a:rPr lang="en-US" sz="850" dirty="0">
+                <a:solidFill>
+                  <a:srgbClr val="475569"/>
+                </a:solidFill>
+                <a:latin typeface="Calibri" pitchFamily="34" charset="0"/>
+                <a:ea typeface="Calibri" pitchFamily="34" charset="-122"/>
+                <a:cs typeface="Calibri" pitchFamily="34" charset="-120"/>
+              </a:rPr>
+              <a:t>having the quality of</a:t>
+            </a:r>
+            <a:endParaRPr lang="en-US" sz="850" dirty="0"/>
+          </a:p>
+        </p:txBody>
+      </p:sp>
+      <p:sp>
+        <p:nvSpPr>
+          <p:cNvPr id="29" name="Shape 27"/>
           <p:cNvSpPr/>
           <p:nvPr/>
         </p:nvSpPr>
@@ -31985,7 +31492,7 @@
       </p:sp>
       <p:sp>
         <p:nvSpPr>
-          <p:cNvPr id="26" name="Text 24"/>
+          <p:cNvPr id="30" name="Text 28"/>
           <p:cNvSpPr/>
           <p:nvPr/>
         </p:nvSpPr>
@@ -32024,7 +31531,7 @@
       </p:sp>
       <p:sp>
         <p:nvSpPr>
-          <p:cNvPr id="27" name="Shape 25"/>
+          <p:cNvPr id="31" name="Shape 29"/>
           <p:cNvSpPr/>
           <p:nvPr/>
         </p:nvSpPr>
@@ -32051,14 +31558,14 @@
       </p:sp>
       <p:sp>
         <p:nvSpPr>
-          <p:cNvPr id="28" name="Shape 26"/>
-          <p:cNvSpPr/>
-          <p:nvPr/>
-        </p:nvSpPr>
-        <p:spPr>
-          <a:xfrm>
-            <a:off x="2313432" y="3364992"/>
-            <a:ext cx="1645920" cy="475488"/>
+          <p:cNvPr id="32" name="Shape 30"/>
+          <p:cNvSpPr/>
+          <p:nvPr/>
+        </p:nvSpPr>
+        <p:spPr>
+          <a:xfrm>
+            <a:off x="1975104" y="3364992"/>
+            <a:ext cx="1554480" cy="475488"/>
           </a:xfrm>
           <a:prstGeom prst="rect">
             <a:avLst>
@@ -32078,14 +31585,14 @@
       </p:sp>
       <p:sp>
         <p:nvSpPr>
-          <p:cNvPr id="29" name="Text 27"/>
-          <p:cNvSpPr/>
-          <p:nvPr/>
-        </p:nvSpPr>
-        <p:spPr>
-          <a:xfrm>
-            <a:off x="2313432" y="3364992"/>
-            <a:ext cx="1645920" cy="475488"/>
+          <p:cNvPr id="33" name="Text 31"/>
+          <p:cNvSpPr/>
+          <p:nvPr/>
+        </p:nvSpPr>
+        <p:spPr>
+          <a:xfrm>
+            <a:off x="1975104" y="3364992"/>
+            <a:ext cx="1554480" cy="475488"/>
           </a:xfrm>
           <a:prstGeom prst="rect">
             <a:avLst/>
@@ -32117,14 +31624,14 @@
       </p:sp>
       <p:sp>
         <p:nvSpPr>
-          <p:cNvPr id="30" name="Text 28"/>
-          <p:cNvSpPr/>
-          <p:nvPr/>
-        </p:nvSpPr>
-        <p:spPr>
-          <a:xfrm>
-            <a:off x="3959352" y="3364992"/>
-            <a:ext cx="411480" cy="475488"/>
+          <p:cNvPr id="34" name="Text 32"/>
+          <p:cNvSpPr/>
+          <p:nvPr/>
+        </p:nvSpPr>
+        <p:spPr>
+          <a:xfrm>
+            <a:off x="3529584" y="3364992"/>
+            <a:ext cx="73152" cy="475488"/>
           </a:xfrm>
           <a:prstGeom prst="rect">
             <a:avLst/>
@@ -32156,14 +31663,14 @@
       </p:sp>
       <p:sp>
         <p:nvSpPr>
-          <p:cNvPr id="31" name="Shape 29"/>
-          <p:cNvSpPr/>
-          <p:nvPr/>
-        </p:nvSpPr>
-        <p:spPr>
-          <a:xfrm>
-            <a:off x="4370832" y="3364992"/>
-            <a:ext cx="1645920" cy="475488"/>
+          <p:cNvPr id="35" name="Shape 33"/>
+          <p:cNvSpPr/>
+          <p:nvPr/>
+        </p:nvSpPr>
+        <p:spPr>
+          <a:xfrm>
+            <a:off x="3602736" y="3364992"/>
+            <a:ext cx="1554480" cy="475488"/>
           </a:xfrm>
           <a:prstGeom prst="rect">
             <a:avLst>
@@ -32183,14 +31690,14 @@
       </p:sp>
       <p:sp>
         <p:nvSpPr>
-          <p:cNvPr id="32" name="Text 30"/>
-          <p:cNvSpPr/>
-          <p:nvPr/>
-        </p:nvSpPr>
-        <p:spPr>
-          <a:xfrm>
-            <a:off x="4370832" y="3364992"/>
-            <a:ext cx="1645920" cy="475488"/>
+          <p:cNvPr id="36" name="Text 34"/>
+          <p:cNvSpPr/>
+          <p:nvPr/>
+        </p:nvSpPr>
+        <p:spPr>
+          <a:xfrm>
+            <a:off x="3602736" y="3364992"/>
+            <a:ext cx="1554480" cy="475488"/>
           </a:xfrm>
           <a:prstGeom prst="rect">
             <a:avLst/>
@@ -32214,7 +31721,7 @@
                 <a:ea typeface="Trebuchet MS" pitchFamily="34" charset="-122"/>
                 <a:cs typeface="Trebuchet MS" pitchFamily="34" charset="-120"/>
               </a:rPr>
-              <a:t>fec</a:t>
+              <a:t>ef</a:t>
             </a:r>
             <a:endParaRPr lang="en-US" sz="1400" dirty="0"/>
           </a:p>
@@ -32222,14 +31729,14 @@
       </p:sp>
       <p:sp>
         <p:nvSpPr>
-          <p:cNvPr id="33" name="Text 31"/>
-          <p:cNvSpPr/>
-          <p:nvPr/>
-        </p:nvSpPr>
-        <p:spPr>
-          <a:xfrm>
-            <a:off x="6016752" y="3364992"/>
-            <a:ext cx="411480" cy="475488"/>
+          <p:cNvPr id="37" name="Text 35"/>
+          <p:cNvSpPr/>
+          <p:nvPr/>
+        </p:nvSpPr>
+        <p:spPr>
+          <a:xfrm>
+            <a:off x="5157216" y="3364992"/>
+            <a:ext cx="73152" cy="475488"/>
           </a:xfrm>
           <a:prstGeom prst="rect">
             <a:avLst/>
@@ -32261,14 +31768,14 @@
       </p:sp>
       <p:sp>
         <p:nvSpPr>
-          <p:cNvPr id="34" name="Shape 32"/>
-          <p:cNvSpPr/>
-          <p:nvPr/>
-        </p:nvSpPr>
-        <p:spPr>
-          <a:xfrm>
-            <a:off x="6428232" y="3364992"/>
-            <a:ext cx="1645920" cy="475488"/>
+          <p:cNvPr id="38" name="Shape 36"/>
+          <p:cNvSpPr/>
+          <p:nvPr/>
+        </p:nvSpPr>
+        <p:spPr>
+          <a:xfrm>
+            <a:off x="5230368" y="3364992"/>
+            <a:ext cx="1554480" cy="475488"/>
           </a:xfrm>
           <a:prstGeom prst="rect">
             <a:avLst>
@@ -32288,14 +31795,14 @@
       </p:sp>
       <p:sp>
         <p:nvSpPr>
-          <p:cNvPr id="35" name="Text 33"/>
-          <p:cNvSpPr/>
-          <p:nvPr/>
-        </p:nvSpPr>
-        <p:spPr>
-          <a:xfrm>
-            <a:off x="6428232" y="3364992"/>
-            <a:ext cx="1645920" cy="475488"/>
+          <p:cNvPr id="39" name="Text 37"/>
+          <p:cNvSpPr/>
+          <p:nvPr/>
+        </p:nvSpPr>
+        <p:spPr>
+          <a:xfrm>
+            <a:off x="5230368" y="3364992"/>
+            <a:ext cx="1554480" cy="475488"/>
           </a:xfrm>
           <a:prstGeom prst="rect">
             <a:avLst/>
@@ -32319,7 +31826,7 @@
                 <a:ea typeface="Trebuchet MS" pitchFamily="34" charset="-122"/>
                 <a:cs typeface="Trebuchet MS" pitchFamily="34" charset="-120"/>
               </a:rPr>
-              <a:t>tion</a:t>
+              <a:t>fec</a:t>
             </a:r>
             <a:endParaRPr lang="en-US" sz="1400" dirty="0"/>
           </a:p>
@@ -32327,7 +31834,112 @@
       </p:sp>
       <p:sp>
         <p:nvSpPr>
-          <p:cNvPr id="36" name="Shape 34"/>
+          <p:cNvPr id="40" name="Text 38"/>
+          <p:cNvSpPr/>
+          <p:nvPr/>
+        </p:nvSpPr>
+        <p:spPr>
+          <a:xfrm>
+            <a:off x="6784848" y="3364992"/>
+            <a:ext cx="73152" cy="475488"/>
+          </a:xfrm>
+          <a:prstGeom prst="rect">
+            <a:avLst/>
+          </a:prstGeom>
+          <a:noFill/>
+          <a:ln/>
+        </p:spPr>
+        <p:txBody>
+          <a:bodyPr wrap="square" lIns="0" tIns="0" rIns="0" bIns="0" rtlCol="0" anchor="ctr"/>
+          <a:lstStyle/>
+          <a:p>
+            <a:pPr algn="ctr" indent="0" marL="0">
+              <a:buNone/>
+            </a:pPr>
+            <a:r>
+              <a:rPr lang="en-US" sz="1600" b="1" dirty="0">
+                <a:solidFill>
+                  <a:srgbClr val="0D9488"/>
+                </a:solidFill>
+                <a:latin typeface="Trebuchet MS" pitchFamily="34" charset="0"/>
+                <a:ea typeface="Trebuchet MS" pitchFamily="34" charset="-122"/>
+                <a:cs typeface="Trebuchet MS" pitchFamily="34" charset="-120"/>
+              </a:rPr>
+              <a:t>·</a:t>
+            </a:r>
+            <a:endParaRPr lang="en-US" sz="1600" dirty="0"/>
+          </a:p>
+        </p:txBody>
+      </p:sp>
+      <p:sp>
+        <p:nvSpPr>
+          <p:cNvPr id="41" name="Shape 39"/>
+          <p:cNvSpPr/>
+          <p:nvPr/>
+        </p:nvSpPr>
+        <p:spPr>
+          <a:xfrm>
+            <a:off x="6858000" y="3364992"/>
+            <a:ext cx="1554480" cy="475488"/>
+          </a:xfrm>
+          <a:prstGeom prst="rect">
+            <a:avLst>
+              <a:gd name="adj" fmla="val 9615"/>
+            </a:avLst>
+          </a:prstGeom>
+          <a:solidFill>
+            <a:srgbClr val="FFFFFF"/>
+          </a:solidFill>
+          <a:ln w="12700">
+            <a:solidFill>
+              <a:srgbClr val="0D9488"/>
+            </a:solidFill>
+            <a:prstDash val="solid"/>
+          </a:ln>
+        </p:spPr>
+      </p:sp>
+      <p:sp>
+        <p:nvSpPr>
+          <p:cNvPr id="42" name="Text 40"/>
+          <p:cNvSpPr/>
+          <p:nvPr/>
+        </p:nvSpPr>
+        <p:spPr>
+          <a:xfrm>
+            <a:off x="6858000" y="3364992"/>
+            <a:ext cx="1554480" cy="475488"/>
+          </a:xfrm>
+          <a:prstGeom prst="rect">
+            <a:avLst/>
+          </a:prstGeom>
+          <a:noFill/>
+          <a:ln/>
+        </p:spPr>
+        <p:txBody>
+          <a:bodyPr wrap="square" lIns="0" tIns="0" rIns="0" bIns="0" rtlCol="0" anchor="ctr"/>
+          <a:lstStyle/>
+          <a:p>
+            <a:pPr algn="ctr" indent="0" marL="0">
+              <a:buNone/>
+            </a:pPr>
+            <a:r>
+              <a:rPr lang="en-US" sz="1400" b="1" dirty="0">
+                <a:solidFill>
+                  <a:srgbClr val="0D9488"/>
+                </a:solidFill>
+                <a:latin typeface="Trebuchet MS" pitchFamily="34" charset="0"/>
+                <a:ea typeface="Trebuchet MS" pitchFamily="34" charset="-122"/>
+                <a:cs typeface="Trebuchet MS" pitchFamily="34" charset="-120"/>
+              </a:rPr>
+              <a:t>tive</a:t>
+            </a:r>
+            <a:endParaRPr lang="en-US" sz="1400" dirty="0"/>
+          </a:p>
+        </p:txBody>
+      </p:sp>
+      <p:sp>
+        <p:nvSpPr>
+          <p:cNvPr id="43" name="Shape 41"/>
           <p:cNvSpPr/>
           <p:nvPr/>
         </p:nvSpPr>
@@ -32354,7 +31966,7 @@
       </p:sp>
       <p:sp>
         <p:nvSpPr>
-          <p:cNvPr id="37" name="Text 35"/>
+          <p:cNvPr id="44" name="Text 42"/>
           <p:cNvSpPr/>
           <p:nvPr/>
         </p:nvSpPr>
@@ -32393,7 +32005,7 @@
       </p:sp>
       <p:sp>
         <p:nvSpPr>
-          <p:cNvPr id="38" name="Shape 36"/>
+          <p:cNvPr id="45" name="Shape 43"/>
           <p:cNvSpPr/>
           <p:nvPr/>
         </p:nvSpPr>
@@ -32420,7 +32032,7 @@
       </p:sp>
       <p:sp>
         <p:nvSpPr>
-          <p:cNvPr id="39" name="Text 37"/>
+          <p:cNvPr id="46" name="Text 44"/>
           <p:cNvSpPr/>
           <p:nvPr/>
         </p:nvSpPr>
@@ -32743,7 +32355,7 @@
                 <a:ea typeface="Calibri" pitchFamily="34" charset="-122"/>
                 <a:cs typeface="Calibri" pitchFamily="34" charset="-120"/>
               </a:rPr>
-              <a:t>Word Labs  •  wordlabs.app  •  Root: 'fect' = make, do, accomplish</a:t>
+              <a:t>Word Labs  •  wordlabs.app  •  Root: 'fect' = do, make, perform</a:t>
             </a:r>
             <a:endParaRPr lang="en-US" sz="800" dirty="0"/>
           </a:p>
@@ -32882,7 +32494,7 @@
                 <a:ea typeface="Trebuchet MS" pitchFamily="34" charset="-122"/>
                 <a:cs typeface="Trebuchet MS" pitchFamily="34" charset="-120"/>
               </a:rPr>
-              <a:t>infection</a:t>
+              <a:t>ineffective</a:t>
             </a:r>
             <a:endParaRPr lang="en-US" sz="2800" dirty="0"/>
           </a:p>
@@ -32962,8 +32574,8 @@
         </p:nvSpPr>
         <p:spPr>
           <a:xfrm>
-            <a:off x="2221992" y="2258568"/>
-            <a:ext cx="1828800" cy="292608"/>
+            <a:off x="1989734" y="2258568"/>
+            <a:ext cx="1581912" cy="292608"/>
           </a:xfrm>
           <a:prstGeom prst="rect">
             <a:avLst>
@@ -32996,8 +32608,8 @@
         </p:nvSpPr>
         <p:spPr>
           <a:xfrm>
-            <a:off x="2221992" y="2258568"/>
-            <a:ext cx="1828800" cy="292608"/>
+            <a:off x="1989734" y="2258568"/>
+            <a:ext cx="1581912" cy="292608"/>
           </a:xfrm>
           <a:prstGeom prst="rect">
             <a:avLst/>
@@ -33035,8 +32647,8 @@
         </p:nvSpPr>
         <p:spPr>
           <a:xfrm>
-            <a:off x="2221992" y="2569464"/>
-            <a:ext cx="1828800" cy="201168"/>
+            <a:off x="1989734" y="2569464"/>
+            <a:ext cx="1581912" cy="201168"/>
           </a:xfrm>
           <a:prstGeom prst="rect">
             <a:avLst/>
@@ -33060,7 +32672,7 @@
                 <a:ea typeface="Calibri" pitchFamily="34" charset="-122"/>
                 <a:cs typeface="Calibri" pitchFamily="34" charset="-120"/>
               </a:rPr>
-              <a:t>into, upon</a:t>
+              <a:t>not</a:t>
             </a:r>
             <a:endParaRPr lang="en-US" sz="850" dirty="0"/>
           </a:p>
@@ -33074,8 +32686,8 @@
         </p:nvSpPr>
         <p:spPr>
           <a:xfrm>
-            <a:off x="4370832" y="2258568"/>
-            <a:ext cx="1828800" cy="292608"/>
+            <a:off x="3659429" y="2258568"/>
+            <a:ext cx="1581912" cy="292608"/>
           </a:xfrm>
           <a:prstGeom prst="rect">
             <a:avLst>
@@ -33083,11 +32695,11 @@
             </a:avLst>
           </a:prstGeom>
           <a:solidFill>
-            <a:srgbClr val="CCFBF1"/>
+            <a:srgbClr val="FCE7F3"/>
           </a:solidFill>
           <a:ln w="19050">
             <a:solidFill>
-              <a:srgbClr val="0D9488"/>
+              <a:srgbClr val="DB2777"/>
             </a:solidFill>
             <a:prstDash val="solid"/>
           </a:ln>
@@ -33108,8 +32720,8 @@
         </p:nvSpPr>
         <p:spPr>
           <a:xfrm>
-            <a:off x="4370832" y="2258568"/>
-            <a:ext cx="1828800" cy="292608"/>
+            <a:off x="3659429" y="2258568"/>
+            <a:ext cx="1581912" cy="292608"/>
           </a:xfrm>
           <a:prstGeom prst="rect">
             <a:avLst/>
@@ -33127,13 +32739,13 @@
             <a:r>
               <a:rPr lang="en-US" sz="1300" b="1" dirty="0">
                 <a:solidFill>
-                  <a:srgbClr val="0F766E"/>
+                  <a:srgbClr val="9D174D"/>
                 </a:solidFill>
                 <a:latin typeface="Trebuchet MS" pitchFamily="34" charset="0"/>
                 <a:ea typeface="Trebuchet MS" pitchFamily="34" charset="-122"/>
                 <a:cs typeface="Trebuchet MS" pitchFamily="34" charset="-120"/>
               </a:rPr>
-              <a:t>fect</a:t>
+              <a:t>ef</a:t>
             </a:r>
             <a:endParaRPr lang="en-US" sz="1300" dirty="0"/>
           </a:p>
@@ -33147,8 +32759,8 @@
         </p:nvSpPr>
         <p:spPr>
           <a:xfrm>
-            <a:off x="4370832" y="2569464"/>
-            <a:ext cx="1828800" cy="201168"/>
+            <a:off x="3659429" y="2569464"/>
+            <a:ext cx="1581912" cy="201168"/>
           </a:xfrm>
           <a:prstGeom prst="rect">
             <a:avLst/>
@@ -33172,7 +32784,7 @@
                 <a:ea typeface="Calibri" pitchFamily="34" charset="-122"/>
                 <a:cs typeface="Calibri" pitchFamily="34" charset="-120"/>
               </a:rPr>
-              <a:t>make, do</a:t>
+              <a:t>out</a:t>
             </a:r>
             <a:endParaRPr lang="en-US" sz="850" dirty="0"/>
           </a:p>
@@ -33180,14 +32792,53 @@
       </p:sp>
       <p:sp>
         <p:nvSpPr>
-          <p:cNvPr id="22" name="Shape 20"/>
-          <p:cNvSpPr/>
-          <p:nvPr/>
-        </p:nvSpPr>
-        <p:spPr>
-          <a:xfrm>
-            <a:off x="6519672" y="2258568"/>
-            <a:ext cx="1828800" cy="292608"/>
+          <p:cNvPr id="22" name="Text 20"/>
+          <p:cNvSpPr/>
+          <p:nvPr/>
+        </p:nvSpPr>
+        <p:spPr>
+          <a:xfrm>
+            <a:off x="3659429" y="2752344"/>
+            <a:ext cx="1581912" cy="182880"/>
+          </a:xfrm>
+          <a:prstGeom prst="rect">
+            <a:avLst/>
+          </a:prstGeom>
+          <a:noFill/>
+          <a:ln/>
+        </p:spPr>
+        <p:txBody>
+          <a:bodyPr wrap="square" lIns="0" tIns="0" rIns="0" bIns="0" rtlCol="0" anchor="t"/>
+          <a:lstStyle/>
+          <a:p>
+            <a:pPr algn="ctr" indent="0" marL="0">
+              <a:buNone/>
+            </a:pPr>
+            <a:r>
+              <a:rPr lang="en-US" sz="700" i="1" dirty="0">
+                <a:solidFill>
+                  <a:srgbClr val="94A3B8"/>
+                </a:solidFill>
+                <a:latin typeface="Calibri" pitchFamily="34" charset="0"/>
+                <a:ea typeface="Calibri" pitchFamily="34" charset="-122"/>
+                <a:cs typeface="Calibri" pitchFamily="34" charset="-120"/>
+              </a:rPr>
+              <a:t>ex → ef before 'f'</a:t>
+            </a:r>
+            <a:endParaRPr lang="en-US" sz="700" dirty="0"/>
+          </a:p>
+        </p:txBody>
+      </p:sp>
+      <p:sp>
+        <p:nvSpPr>
+          <p:cNvPr id="23" name="Shape 21"/>
+          <p:cNvSpPr/>
+          <p:nvPr/>
+        </p:nvSpPr>
+        <p:spPr>
+          <a:xfrm>
+            <a:off x="5329123" y="2258568"/>
+            <a:ext cx="1581912" cy="292608"/>
           </a:xfrm>
           <a:prstGeom prst="rect">
             <a:avLst>
@@ -33195,11 +32846,11 @@
             </a:avLst>
           </a:prstGeom>
           <a:solidFill>
-            <a:srgbClr val="FCE7F3"/>
+            <a:srgbClr val="CCFBF1"/>
           </a:solidFill>
           <a:ln w="19050">
             <a:solidFill>
-              <a:srgbClr val="DB2777"/>
+              <a:srgbClr val="0D9488"/>
             </a:solidFill>
             <a:prstDash val="solid"/>
           </a:ln>
@@ -33214,14 +32865,14 @@
       </p:sp>
       <p:sp>
         <p:nvSpPr>
-          <p:cNvPr id="23" name="Text 21"/>
-          <p:cNvSpPr/>
-          <p:nvPr/>
-        </p:nvSpPr>
-        <p:spPr>
-          <a:xfrm>
-            <a:off x="6519672" y="2258568"/>
-            <a:ext cx="1828800" cy="292608"/>
+          <p:cNvPr id="24" name="Text 22"/>
+          <p:cNvSpPr/>
+          <p:nvPr/>
+        </p:nvSpPr>
+        <p:spPr>
+          <a:xfrm>
+            <a:off x="5329123" y="2258568"/>
+            <a:ext cx="1581912" cy="292608"/>
           </a:xfrm>
           <a:prstGeom prst="rect">
             <a:avLst/>
@@ -33239,13 +32890,13 @@
             <a:r>
               <a:rPr lang="en-US" sz="1300" b="1" dirty="0">
                 <a:solidFill>
-                  <a:srgbClr val="9D174D"/>
+                  <a:srgbClr val="0F766E"/>
                 </a:solidFill>
                 <a:latin typeface="Trebuchet MS" pitchFamily="34" charset="0"/>
                 <a:ea typeface="Trebuchet MS" pitchFamily="34" charset="-122"/>
                 <a:cs typeface="Trebuchet MS" pitchFamily="34" charset="-120"/>
               </a:rPr>
-              <a:t>ion</a:t>
+              <a:t>fect</a:t>
             </a:r>
             <a:endParaRPr lang="en-US" sz="1300" dirty="0"/>
           </a:p>
@@ -33253,14 +32904,14 @@
       </p:sp>
       <p:sp>
         <p:nvSpPr>
-          <p:cNvPr id="24" name="Text 22"/>
-          <p:cNvSpPr/>
-          <p:nvPr/>
-        </p:nvSpPr>
-        <p:spPr>
-          <a:xfrm>
-            <a:off x="6519672" y="2569464"/>
-            <a:ext cx="1828800" cy="201168"/>
+          <p:cNvPr id="25" name="Text 23"/>
+          <p:cNvSpPr/>
+          <p:nvPr/>
+        </p:nvSpPr>
+        <p:spPr>
+          <a:xfrm>
+            <a:off x="5329123" y="2569464"/>
+            <a:ext cx="1581912" cy="201168"/>
           </a:xfrm>
           <a:prstGeom prst="rect">
             <a:avLst/>
@@ -33284,7 +32935,7 @@
                 <a:ea typeface="Calibri" pitchFamily="34" charset="-122"/>
                 <a:cs typeface="Calibri" pitchFamily="34" charset="-120"/>
               </a:rPr>
-              <a:t>state or result of</a:t>
+              <a:t>do, make</a:t>
             </a:r>
             <a:endParaRPr lang="en-US" sz="850" dirty="0"/>
           </a:p>
@@ -33292,7 +32943,119 @@
       </p:sp>
       <p:sp>
         <p:nvSpPr>
-          <p:cNvPr id="25" name="Shape 23"/>
+          <p:cNvPr id="26" name="Shape 24"/>
+          <p:cNvSpPr/>
+          <p:nvPr/>
+        </p:nvSpPr>
+        <p:spPr>
+          <a:xfrm>
+            <a:off x="6998818" y="2258568"/>
+            <a:ext cx="1581912" cy="292608"/>
+          </a:xfrm>
+          <a:prstGeom prst="rect">
+            <a:avLst>
+              <a:gd name="adj" fmla="val 25000"/>
+            </a:avLst>
+          </a:prstGeom>
+          <a:solidFill>
+            <a:srgbClr val="FCE7F3"/>
+          </a:solidFill>
+          <a:ln w="19050">
+            <a:solidFill>
+              <a:srgbClr val="DB2777"/>
+            </a:solidFill>
+            <a:prstDash val="solid"/>
+          </a:ln>
+          <a:effectLst>
+            <a:outerShdw sx="100000" sy="100000" kx="0" ky="0" algn="bl" rotWithShape="0" blurRad="101600" dist="38100" dir="8100000">
+              <a:srgbClr val="000000">
+                <a:alpha val="12000"/>
+              </a:srgbClr>
+            </a:outerShdw>
+          </a:effectLst>
+        </p:spPr>
+      </p:sp>
+      <p:sp>
+        <p:nvSpPr>
+          <p:cNvPr id="27" name="Text 25"/>
+          <p:cNvSpPr/>
+          <p:nvPr/>
+        </p:nvSpPr>
+        <p:spPr>
+          <a:xfrm>
+            <a:off x="6998818" y="2258568"/>
+            <a:ext cx="1581912" cy="292608"/>
+          </a:xfrm>
+          <a:prstGeom prst="rect">
+            <a:avLst/>
+          </a:prstGeom>
+          <a:noFill/>
+          <a:ln/>
+        </p:spPr>
+        <p:txBody>
+          <a:bodyPr wrap="square" lIns="0" tIns="0" rIns="0" bIns="0" rtlCol="0" anchor="ctr"/>
+          <a:lstStyle/>
+          <a:p>
+            <a:pPr algn="ctr" indent="0" marL="0">
+              <a:buNone/>
+            </a:pPr>
+            <a:r>
+              <a:rPr lang="en-US" sz="1300" b="1" dirty="0">
+                <a:solidFill>
+                  <a:srgbClr val="9D174D"/>
+                </a:solidFill>
+                <a:latin typeface="Trebuchet MS" pitchFamily="34" charset="0"/>
+                <a:ea typeface="Trebuchet MS" pitchFamily="34" charset="-122"/>
+                <a:cs typeface="Trebuchet MS" pitchFamily="34" charset="-120"/>
+              </a:rPr>
+              <a:t>ive</a:t>
+            </a:r>
+            <a:endParaRPr lang="en-US" sz="1300" dirty="0"/>
+          </a:p>
+        </p:txBody>
+      </p:sp>
+      <p:sp>
+        <p:nvSpPr>
+          <p:cNvPr id="28" name="Text 26"/>
+          <p:cNvSpPr/>
+          <p:nvPr/>
+        </p:nvSpPr>
+        <p:spPr>
+          <a:xfrm>
+            <a:off x="6998818" y="2569464"/>
+            <a:ext cx="1581912" cy="201168"/>
+          </a:xfrm>
+          <a:prstGeom prst="rect">
+            <a:avLst/>
+          </a:prstGeom>
+          <a:noFill/>
+          <a:ln/>
+        </p:spPr>
+        <p:txBody>
+          <a:bodyPr wrap="square" lIns="0" tIns="0" rIns="0" bIns="0" rtlCol="0" anchor="t"/>
+          <a:lstStyle/>
+          <a:p>
+            <a:pPr algn="ctr" indent="0" marL="0">
+              <a:buNone/>
+            </a:pPr>
+            <a:r>
+              <a:rPr lang="en-US" sz="850" dirty="0">
+                <a:solidFill>
+                  <a:srgbClr val="475569"/>
+                </a:solidFill>
+                <a:latin typeface="Calibri" pitchFamily="34" charset="0"/>
+                <a:ea typeface="Calibri" pitchFamily="34" charset="-122"/>
+                <a:cs typeface="Calibri" pitchFamily="34" charset="-120"/>
+              </a:rPr>
+              <a:t>having the quality of</a:t>
+            </a:r>
+            <a:endParaRPr lang="en-US" sz="850" dirty="0"/>
+          </a:p>
+        </p:txBody>
+      </p:sp>
+      <p:sp>
+        <p:nvSpPr>
+          <p:cNvPr id="29" name="Shape 27"/>
           <p:cNvSpPr/>
           <p:nvPr/>
         </p:nvSpPr>
@@ -33319,7 +33082,7 @@
       </p:sp>
       <p:sp>
         <p:nvSpPr>
-          <p:cNvPr id="26" name="Text 24"/>
+          <p:cNvPr id="30" name="Text 28"/>
           <p:cNvSpPr/>
           <p:nvPr/>
         </p:nvSpPr>
@@ -33358,7 +33121,7 @@
       </p:sp>
       <p:sp>
         <p:nvSpPr>
-          <p:cNvPr id="27" name="Shape 25"/>
+          <p:cNvPr id="31" name="Shape 29"/>
           <p:cNvSpPr/>
           <p:nvPr/>
         </p:nvSpPr>
@@ -33385,14 +33148,14 @@
       </p:sp>
       <p:sp>
         <p:nvSpPr>
-          <p:cNvPr id="28" name="Shape 26"/>
-          <p:cNvSpPr/>
-          <p:nvPr/>
-        </p:nvSpPr>
-        <p:spPr>
-          <a:xfrm>
-            <a:off x="2313432" y="3364992"/>
-            <a:ext cx="1645920" cy="475488"/>
+          <p:cNvPr id="32" name="Shape 30"/>
+          <p:cNvSpPr/>
+          <p:nvPr/>
+        </p:nvSpPr>
+        <p:spPr>
+          <a:xfrm>
+            <a:off x="1975104" y="3364992"/>
+            <a:ext cx="1554480" cy="475488"/>
           </a:xfrm>
           <a:prstGeom prst="rect">
             <a:avLst>
@@ -33412,14 +33175,14 @@
       </p:sp>
       <p:sp>
         <p:nvSpPr>
-          <p:cNvPr id="29" name="Text 27"/>
-          <p:cNvSpPr/>
-          <p:nvPr/>
-        </p:nvSpPr>
-        <p:spPr>
-          <a:xfrm>
-            <a:off x="2313432" y="3364992"/>
-            <a:ext cx="1645920" cy="475488"/>
+          <p:cNvPr id="33" name="Text 31"/>
+          <p:cNvSpPr/>
+          <p:nvPr/>
+        </p:nvSpPr>
+        <p:spPr>
+          <a:xfrm>
+            <a:off x="1975104" y="3364992"/>
+            <a:ext cx="1554480" cy="475488"/>
           </a:xfrm>
           <a:prstGeom prst="rect">
             <a:avLst/>
@@ -33451,14 +33214,14 @@
       </p:sp>
       <p:sp>
         <p:nvSpPr>
-          <p:cNvPr id="30" name="Text 28"/>
-          <p:cNvSpPr/>
-          <p:nvPr/>
-        </p:nvSpPr>
-        <p:spPr>
-          <a:xfrm>
-            <a:off x="3959352" y="3364992"/>
-            <a:ext cx="411480" cy="475488"/>
+          <p:cNvPr id="34" name="Text 32"/>
+          <p:cNvSpPr/>
+          <p:nvPr/>
+        </p:nvSpPr>
+        <p:spPr>
+          <a:xfrm>
+            <a:off x="3529584" y="3364992"/>
+            <a:ext cx="73152" cy="475488"/>
           </a:xfrm>
           <a:prstGeom prst="rect">
             <a:avLst/>
@@ -33490,14 +33253,14 @@
       </p:sp>
       <p:sp>
         <p:nvSpPr>
-          <p:cNvPr id="31" name="Shape 29"/>
-          <p:cNvSpPr/>
-          <p:nvPr/>
-        </p:nvSpPr>
-        <p:spPr>
-          <a:xfrm>
-            <a:off x="4370832" y="3364992"/>
-            <a:ext cx="1645920" cy="475488"/>
+          <p:cNvPr id="35" name="Shape 33"/>
+          <p:cNvSpPr/>
+          <p:nvPr/>
+        </p:nvSpPr>
+        <p:spPr>
+          <a:xfrm>
+            <a:off x="3602736" y="3364992"/>
+            <a:ext cx="1554480" cy="475488"/>
           </a:xfrm>
           <a:prstGeom prst="rect">
             <a:avLst>
@@ -33517,14 +33280,14 @@
       </p:sp>
       <p:sp>
         <p:nvSpPr>
-          <p:cNvPr id="32" name="Text 30"/>
-          <p:cNvSpPr/>
-          <p:nvPr/>
-        </p:nvSpPr>
-        <p:spPr>
-          <a:xfrm>
-            <a:off x="4370832" y="3364992"/>
-            <a:ext cx="1645920" cy="475488"/>
+          <p:cNvPr id="36" name="Text 34"/>
+          <p:cNvSpPr/>
+          <p:nvPr/>
+        </p:nvSpPr>
+        <p:spPr>
+          <a:xfrm>
+            <a:off x="3602736" y="3364992"/>
+            <a:ext cx="1554480" cy="475488"/>
           </a:xfrm>
           <a:prstGeom prst="rect">
             <a:avLst/>
@@ -33548,7 +33311,7 @@
                 <a:ea typeface="Trebuchet MS" pitchFamily="34" charset="-122"/>
                 <a:cs typeface="Trebuchet MS" pitchFamily="34" charset="-120"/>
               </a:rPr>
-              <a:t>fec</a:t>
+              <a:t>ef</a:t>
             </a:r>
             <a:endParaRPr lang="en-US" sz="1400" dirty="0"/>
           </a:p>
@@ -33556,14 +33319,14 @@
       </p:sp>
       <p:sp>
         <p:nvSpPr>
-          <p:cNvPr id="33" name="Text 31"/>
-          <p:cNvSpPr/>
-          <p:nvPr/>
-        </p:nvSpPr>
-        <p:spPr>
-          <a:xfrm>
-            <a:off x="6016752" y="3364992"/>
-            <a:ext cx="411480" cy="475488"/>
+          <p:cNvPr id="37" name="Text 35"/>
+          <p:cNvSpPr/>
+          <p:nvPr/>
+        </p:nvSpPr>
+        <p:spPr>
+          <a:xfrm>
+            <a:off x="5157216" y="3364992"/>
+            <a:ext cx="73152" cy="475488"/>
           </a:xfrm>
           <a:prstGeom prst="rect">
             <a:avLst/>
@@ -33595,14 +33358,14 @@
       </p:sp>
       <p:sp>
         <p:nvSpPr>
-          <p:cNvPr id="34" name="Shape 32"/>
-          <p:cNvSpPr/>
-          <p:nvPr/>
-        </p:nvSpPr>
-        <p:spPr>
-          <a:xfrm>
-            <a:off x="6428232" y="3364992"/>
-            <a:ext cx="1645920" cy="475488"/>
+          <p:cNvPr id="38" name="Shape 36"/>
+          <p:cNvSpPr/>
+          <p:nvPr/>
+        </p:nvSpPr>
+        <p:spPr>
+          <a:xfrm>
+            <a:off x="5230368" y="3364992"/>
+            <a:ext cx="1554480" cy="475488"/>
           </a:xfrm>
           <a:prstGeom prst="rect">
             <a:avLst>
@@ -33622,14 +33385,14 @@
       </p:sp>
       <p:sp>
         <p:nvSpPr>
-          <p:cNvPr id="35" name="Text 33"/>
-          <p:cNvSpPr/>
-          <p:nvPr/>
-        </p:nvSpPr>
-        <p:spPr>
-          <a:xfrm>
-            <a:off x="6428232" y="3364992"/>
-            <a:ext cx="1645920" cy="475488"/>
+          <p:cNvPr id="39" name="Text 37"/>
+          <p:cNvSpPr/>
+          <p:nvPr/>
+        </p:nvSpPr>
+        <p:spPr>
+          <a:xfrm>
+            <a:off x="5230368" y="3364992"/>
+            <a:ext cx="1554480" cy="475488"/>
           </a:xfrm>
           <a:prstGeom prst="rect">
             <a:avLst/>
@@ -33653,7 +33416,7 @@
                 <a:ea typeface="Trebuchet MS" pitchFamily="34" charset="-122"/>
                 <a:cs typeface="Trebuchet MS" pitchFamily="34" charset="-120"/>
               </a:rPr>
-              <a:t>tion</a:t>
+              <a:t>fec</a:t>
             </a:r>
             <a:endParaRPr lang="en-US" sz="1400" dirty="0"/>
           </a:p>
@@ -33661,7 +33424,112 @@
       </p:sp>
       <p:sp>
         <p:nvSpPr>
-          <p:cNvPr id="36" name="Shape 34"/>
+          <p:cNvPr id="40" name="Text 38"/>
+          <p:cNvSpPr/>
+          <p:nvPr/>
+        </p:nvSpPr>
+        <p:spPr>
+          <a:xfrm>
+            <a:off x="6784848" y="3364992"/>
+            <a:ext cx="73152" cy="475488"/>
+          </a:xfrm>
+          <a:prstGeom prst="rect">
+            <a:avLst/>
+          </a:prstGeom>
+          <a:noFill/>
+          <a:ln/>
+        </p:spPr>
+        <p:txBody>
+          <a:bodyPr wrap="square" lIns="0" tIns="0" rIns="0" bIns="0" rtlCol="0" anchor="ctr"/>
+          <a:lstStyle/>
+          <a:p>
+            <a:pPr algn="ctr" indent="0" marL="0">
+              <a:buNone/>
+            </a:pPr>
+            <a:r>
+              <a:rPr lang="en-US" sz="1600" b="1" dirty="0">
+                <a:solidFill>
+                  <a:srgbClr val="0D9488"/>
+                </a:solidFill>
+                <a:latin typeface="Trebuchet MS" pitchFamily="34" charset="0"/>
+                <a:ea typeface="Trebuchet MS" pitchFamily="34" charset="-122"/>
+                <a:cs typeface="Trebuchet MS" pitchFamily="34" charset="-120"/>
+              </a:rPr>
+              <a:t>·</a:t>
+            </a:r>
+            <a:endParaRPr lang="en-US" sz="1600" dirty="0"/>
+          </a:p>
+        </p:txBody>
+      </p:sp>
+      <p:sp>
+        <p:nvSpPr>
+          <p:cNvPr id="41" name="Shape 39"/>
+          <p:cNvSpPr/>
+          <p:nvPr/>
+        </p:nvSpPr>
+        <p:spPr>
+          <a:xfrm>
+            <a:off x="6858000" y="3364992"/>
+            <a:ext cx="1554480" cy="475488"/>
+          </a:xfrm>
+          <a:prstGeom prst="rect">
+            <a:avLst>
+              <a:gd name="adj" fmla="val 9615"/>
+            </a:avLst>
+          </a:prstGeom>
+          <a:solidFill>
+            <a:srgbClr val="FFFFFF"/>
+          </a:solidFill>
+          <a:ln w="12700">
+            <a:solidFill>
+              <a:srgbClr val="0D9488"/>
+            </a:solidFill>
+            <a:prstDash val="solid"/>
+          </a:ln>
+        </p:spPr>
+      </p:sp>
+      <p:sp>
+        <p:nvSpPr>
+          <p:cNvPr id="42" name="Text 40"/>
+          <p:cNvSpPr/>
+          <p:nvPr/>
+        </p:nvSpPr>
+        <p:spPr>
+          <a:xfrm>
+            <a:off x="6858000" y="3364992"/>
+            <a:ext cx="1554480" cy="475488"/>
+          </a:xfrm>
+          <a:prstGeom prst="rect">
+            <a:avLst/>
+          </a:prstGeom>
+          <a:noFill/>
+          <a:ln/>
+        </p:spPr>
+        <p:txBody>
+          <a:bodyPr wrap="square" lIns="0" tIns="0" rIns="0" bIns="0" rtlCol="0" anchor="ctr"/>
+          <a:lstStyle/>
+          <a:p>
+            <a:pPr algn="ctr" indent="0" marL="0">
+              <a:buNone/>
+            </a:pPr>
+            <a:r>
+              <a:rPr lang="en-US" sz="1400" b="1" dirty="0">
+                <a:solidFill>
+                  <a:srgbClr val="0D9488"/>
+                </a:solidFill>
+                <a:latin typeface="Trebuchet MS" pitchFamily="34" charset="0"/>
+                <a:ea typeface="Trebuchet MS" pitchFamily="34" charset="-122"/>
+                <a:cs typeface="Trebuchet MS" pitchFamily="34" charset="-120"/>
+              </a:rPr>
+              <a:t>tive</a:t>
+            </a:r>
+            <a:endParaRPr lang="en-US" sz="1400" dirty="0"/>
+          </a:p>
+        </p:txBody>
+      </p:sp>
+      <p:sp>
+        <p:nvSpPr>
+          <p:cNvPr id="43" name="Shape 41"/>
           <p:cNvSpPr/>
           <p:nvPr/>
         </p:nvSpPr>
@@ -33688,7 +33556,7 @@
       </p:sp>
       <p:sp>
         <p:nvSpPr>
-          <p:cNvPr id="37" name="Text 35"/>
+          <p:cNvPr id="44" name="Text 42"/>
           <p:cNvSpPr/>
           <p:nvPr/>
         </p:nvSpPr>
@@ -33727,7 +33595,7 @@
       </p:sp>
       <p:sp>
         <p:nvSpPr>
-          <p:cNvPr id="38" name="Shape 36"/>
+          <p:cNvPr id="45" name="Shape 43"/>
           <p:cNvSpPr/>
           <p:nvPr/>
         </p:nvSpPr>
@@ -33754,14 +33622,14 @@
       </p:sp>
       <p:sp>
         <p:nvSpPr>
-          <p:cNvPr id="39" name="Shape 37"/>
-          <p:cNvSpPr/>
-          <p:nvPr/>
-        </p:nvSpPr>
-        <p:spPr>
-          <a:xfrm>
-            <a:off x="2124837" y="4169664"/>
-            <a:ext cx="685800" cy="384048"/>
+          <p:cNvPr id="46" name="Shape 44"/>
+          <p:cNvSpPr/>
+          <p:nvPr/>
+        </p:nvSpPr>
+        <p:spPr>
+          <a:xfrm>
+            <a:off x="1951828" y="4169664"/>
+            <a:ext cx="603504" cy="384048"/>
           </a:xfrm>
           <a:prstGeom prst="rect">
             <a:avLst>
@@ -33781,14 +33649,14 @@
       </p:sp>
       <p:sp>
         <p:nvSpPr>
-          <p:cNvPr id="40" name="Text 38"/>
-          <p:cNvSpPr/>
-          <p:nvPr/>
-        </p:nvSpPr>
-        <p:spPr>
-          <a:xfrm>
-            <a:off x="2124837" y="4169664"/>
-            <a:ext cx="685800" cy="384048"/>
+          <p:cNvPr id="47" name="Text 45"/>
+          <p:cNvSpPr/>
+          <p:nvPr/>
+        </p:nvSpPr>
+        <p:spPr>
+          <a:xfrm>
+            <a:off x="1951828" y="4169664"/>
+            <a:ext cx="603504" cy="384048"/>
           </a:xfrm>
           <a:prstGeom prst="rect">
             <a:avLst/>
@@ -33820,14 +33688,14 @@
       </p:sp>
       <p:sp>
         <p:nvSpPr>
-          <p:cNvPr id="41" name="Shape 39"/>
-          <p:cNvSpPr/>
-          <p:nvPr/>
-        </p:nvSpPr>
-        <p:spPr>
-          <a:xfrm>
-            <a:off x="3033522" y="4169664"/>
-            <a:ext cx="685800" cy="384048"/>
+          <p:cNvPr id="48" name="Shape 46"/>
+          <p:cNvSpPr/>
+          <p:nvPr/>
+        </p:nvSpPr>
+        <p:spPr>
+          <a:xfrm>
+            <a:off x="2605209" y="4169664"/>
+            <a:ext cx="603504" cy="384048"/>
           </a:xfrm>
           <a:prstGeom prst="rect">
             <a:avLst>
@@ -33847,14 +33715,14 @@
       </p:sp>
       <p:sp>
         <p:nvSpPr>
-          <p:cNvPr id="42" name="Text 40"/>
-          <p:cNvSpPr/>
-          <p:nvPr/>
-        </p:nvSpPr>
-        <p:spPr>
-          <a:xfrm>
-            <a:off x="3033522" y="4169664"/>
-            <a:ext cx="685800" cy="384048"/>
+          <p:cNvPr id="49" name="Text 47"/>
+          <p:cNvSpPr/>
+          <p:nvPr/>
+        </p:nvSpPr>
+        <p:spPr>
+          <a:xfrm>
+            <a:off x="2605209" y="4169664"/>
+            <a:ext cx="603504" cy="384048"/>
           </a:xfrm>
           <a:prstGeom prst="rect">
             <a:avLst/>
@@ -33886,14 +33754,14 @@
       </p:sp>
       <p:sp>
         <p:nvSpPr>
-          <p:cNvPr id="43" name="Shape 41"/>
-          <p:cNvSpPr/>
-          <p:nvPr/>
-        </p:nvSpPr>
-        <p:spPr>
-          <a:xfrm>
-            <a:off x="3942207" y="4169664"/>
-            <a:ext cx="685800" cy="384048"/>
+          <p:cNvPr id="50" name="Shape 48"/>
+          <p:cNvSpPr/>
+          <p:nvPr/>
+        </p:nvSpPr>
+        <p:spPr>
+          <a:xfrm>
+            <a:off x="3258589" y="4169664"/>
+            <a:ext cx="603504" cy="384048"/>
           </a:xfrm>
           <a:prstGeom prst="rect">
             <a:avLst>
@@ -33913,14 +33781,14 @@
       </p:sp>
       <p:sp>
         <p:nvSpPr>
-          <p:cNvPr id="44" name="Text 42"/>
-          <p:cNvSpPr/>
-          <p:nvPr/>
-        </p:nvSpPr>
-        <p:spPr>
-          <a:xfrm>
-            <a:off x="3942207" y="4169664"/>
-            <a:ext cx="685800" cy="384048"/>
+          <p:cNvPr id="51" name="Text 49"/>
+          <p:cNvSpPr/>
+          <p:nvPr/>
+        </p:nvSpPr>
+        <p:spPr>
+          <a:xfrm>
+            <a:off x="3258589" y="4169664"/>
+            <a:ext cx="603504" cy="384048"/>
           </a:xfrm>
           <a:prstGeom prst="rect">
             <a:avLst/>
@@ -33944,7 +33812,7 @@
                 <a:ea typeface="Trebuchet MS" pitchFamily="34" charset="-122"/>
                 <a:cs typeface="Trebuchet MS" pitchFamily="34" charset="-120"/>
               </a:rPr>
-              <a:t>f</a:t>
+              <a:t>e</a:t>
             </a:r>
             <a:endParaRPr lang="en-US" sz="900" dirty="0"/>
           </a:p>
@@ -33952,14 +33820,14 @@
       </p:sp>
       <p:sp>
         <p:nvSpPr>
-          <p:cNvPr id="45" name="Shape 43"/>
-          <p:cNvSpPr/>
-          <p:nvPr/>
-        </p:nvSpPr>
-        <p:spPr>
-          <a:xfrm>
-            <a:off x="4850892" y="4169664"/>
-            <a:ext cx="685800" cy="384048"/>
+          <p:cNvPr id="52" name="Shape 50"/>
+          <p:cNvSpPr/>
+          <p:nvPr/>
+        </p:nvSpPr>
+        <p:spPr>
+          <a:xfrm>
+            <a:off x="3911969" y="4169664"/>
+            <a:ext cx="603504" cy="384048"/>
           </a:xfrm>
           <a:prstGeom prst="rect">
             <a:avLst>
@@ -33979,14 +33847,14 @@
       </p:sp>
       <p:sp>
         <p:nvSpPr>
-          <p:cNvPr id="46" name="Text 44"/>
-          <p:cNvSpPr/>
-          <p:nvPr/>
-        </p:nvSpPr>
-        <p:spPr>
-          <a:xfrm>
-            <a:off x="4850892" y="4169664"/>
-            <a:ext cx="685800" cy="384048"/>
+          <p:cNvPr id="53" name="Text 51"/>
+          <p:cNvSpPr/>
+          <p:nvPr/>
+        </p:nvSpPr>
+        <p:spPr>
+          <a:xfrm>
+            <a:off x="3911969" y="4169664"/>
+            <a:ext cx="603504" cy="384048"/>
           </a:xfrm>
           <a:prstGeom prst="rect">
             <a:avLst/>
@@ -34010,7 +33878,7 @@
                 <a:ea typeface="Trebuchet MS" pitchFamily="34" charset="-122"/>
                 <a:cs typeface="Trebuchet MS" pitchFamily="34" charset="-120"/>
               </a:rPr>
-              <a:t>e</a:t>
+              <a:t>ff</a:t>
             </a:r>
             <a:endParaRPr lang="en-US" sz="900" dirty="0"/>
           </a:p>
@@ -34018,14 +33886,14 @@
       </p:sp>
       <p:sp>
         <p:nvSpPr>
-          <p:cNvPr id="47" name="Shape 45"/>
-          <p:cNvSpPr/>
-          <p:nvPr/>
-        </p:nvSpPr>
-        <p:spPr>
-          <a:xfrm>
-            <a:off x="5759577" y="4169664"/>
-            <a:ext cx="685800" cy="384048"/>
+          <p:cNvPr id="54" name="Shape 52"/>
+          <p:cNvSpPr/>
+          <p:nvPr/>
+        </p:nvSpPr>
+        <p:spPr>
+          <a:xfrm>
+            <a:off x="4565350" y="4169664"/>
+            <a:ext cx="603504" cy="384048"/>
           </a:xfrm>
           <a:prstGeom prst="rect">
             <a:avLst>
@@ -34045,14 +33913,14 @@
       </p:sp>
       <p:sp>
         <p:nvSpPr>
-          <p:cNvPr id="48" name="Text 46"/>
-          <p:cNvSpPr/>
-          <p:nvPr/>
-        </p:nvSpPr>
-        <p:spPr>
-          <a:xfrm>
-            <a:off x="5759577" y="4169664"/>
-            <a:ext cx="685800" cy="384048"/>
+          <p:cNvPr id="55" name="Text 53"/>
+          <p:cNvSpPr/>
+          <p:nvPr/>
+        </p:nvSpPr>
+        <p:spPr>
+          <a:xfrm>
+            <a:off x="4565350" y="4169664"/>
+            <a:ext cx="603504" cy="384048"/>
           </a:xfrm>
           <a:prstGeom prst="rect">
             <a:avLst/>
@@ -34076,6 +33944,72 @@
                 <a:ea typeface="Trebuchet MS" pitchFamily="34" charset="-122"/>
                 <a:cs typeface="Trebuchet MS" pitchFamily="34" charset="-120"/>
               </a:rPr>
+              <a:t>e</a:t>
+            </a:r>
+            <a:endParaRPr lang="en-US" sz="900" dirty="0"/>
+          </a:p>
+        </p:txBody>
+      </p:sp>
+      <p:sp>
+        <p:nvSpPr>
+          <p:cNvPr id="56" name="Shape 54"/>
+          <p:cNvSpPr/>
+          <p:nvPr/>
+        </p:nvSpPr>
+        <p:spPr>
+          <a:xfrm>
+            <a:off x="5218730" y="4169664"/>
+            <a:ext cx="603504" cy="384048"/>
+          </a:xfrm>
+          <a:prstGeom prst="rect">
+            <a:avLst>
+              <a:gd name="adj" fmla="val 9524"/>
+            </a:avLst>
+          </a:prstGeom>
+          <a:solidFill>
+            <a:srgbClr val="FFFFFF"/>
+          </a:solidFill>
+          <a:ln w="12700">
+            <a:solidFill>
+              <a:srgbClr val="DB2777"/>
+            </a:solidFill>
+            <a:prstDash val="solid"/>
+          </a:ln>
+        </p:spPr>
+      </p:sp>
+      <p:sp>
+        <p:nvSpPr>
+          <p:cNvPr id="57" name="Text 55"/>
+          <p:cNvSpPr/>
+          <p:nvPr/>
+        </p:nvSpPr>
+        <p:spPr>
+          <a:xfrm>
+            <a:off x="5218730" y="4169664"/>
+            <a:ext cx="603504" cy="384048"/>
+          </a:xfrm>
+          <a:prstGeom prst="rect">
+            <a:avLst/>
+          </a:prstGeom>
+          <a:noFill/>
+          <a:ln/>
+        </p:spPr>
+        <p:txBody>
+          <a:bodyPr wrap="square" lIns="0" tIns="0" rIns="0" bIns="0" rtlCol="0" anchor="ctr"/>
+          <a:lstStyle/>
+          <a:p>
+            <a:pPr algn="ctr" indent="0" marL="0">
+              <a:buNone/>
+            </a:pPr>
+            <a:r>
+              <a:rPr lang="en-US" sz="900" b="1" dirty="0">
+                <a:solidFill>
+                  <a:srgbClr val="9D174D"/>
+                </a:solidFill>
+                <a:latin typeface="Trebuchet MS" pitchFamily="34" charset="0"/>
+                <a:ea typeface="Trebuchet MS" pitchFamily="34" charset="-122"/>
+                <a:cs typeface="Trebuchet MS" pitchFamily="34" charset="-120"/>
+              </a:rPr>
               <a:t>c</a:t>
             </a:r>
             <a:endParaRPr lang="en-US" sz="900" dirty="0"/>
@@ -34084,14 +34018,14 @@
       </p:sp>
       <p:sp>
         <p:nvSpPr>
-          <p:cNvPr id="49" name="Text 47"/>
-          <p:cNvSpPr/>
-          <p:nvPr/>
-        </p:nvSpPr>
-        <p:spPr>
-          <a:xfrm>
-            <a:off x="5759577" y="4572000"/>
-            <a:ext cx="685800" cy="219456"/>
+          <p:cNvPr id="58" name="Text 56"/>
+          <p:cNvSpPr/>
+          <p:nvPr/>
+        </p:nvSpPr>
+        <p:spPr>
+          <a:xfrm>
+            <a:off x="5218730" y="4572000"/>
+            <a:ext cx="603504" cy="219456"/>
           </a:xfrm>
           <a:prstGeom prst="rect">
             <a:avLst/>
@@ -34123,14 +34057,14 @@
       </p:sp>
       <p:sp>
         <p:nvSpPr>
-          <p:cNvPr id="50" name="Shape 48"/>
-          <p:cNvSpPr/>
-          <p:nvPr/>
-        </p:nvSpPr>
-        <p:spPr>
-          <a:xfrm>
-            <a:off x="6668262" y="4169664"/>
-            <a:ext cx="685800" cy="384048"/>
+          <p:cNvPr id="59" name="Shape 57"/>
+          <p:cNvSpPr/>
+          <p:nvPr/>
+        </p:nvSpPr>
+        <p:spPr>
+          <a:xfrm>
+            <a:off x="5872111" y="4169664"/>
+            <a:ext cx="603504" cy="384048"/>
           </a:xfrm>
           <a:prstGeom prst="rect">
             <a:avLst>
@@ -34150,14 +34084,14 @@
       </p:sp>
       <p:sp>
         <p:nvSpPr>
-          <p:cNvPr id="51" name="Text 49"/>
-          <p:cNvSpPr/>
-          <p:nvPr/>
-        </p:nvSpPr>
-        <p:spPr>
-          <a:xfrm>
-            <a:off x="6668262" y="4169664"/>
-            <a:ext cx="685800" cy="384048"/>
+          <p:cNvPr id="60" name="Text 58"/>
+          <p:cNvSpPr/>
+          <p:nvPr/>
+        </p:nvSpPr>
+        <p:spPr>
+          <a:xfrm>
+            <a:off x="5872111" y="4169664"/>
+            <a:ext cx="603504" cy="384048"/>
           </a:xfrm>
           <a:prstGeom prst="rect">
             <a:avLst/>
@@ -34189,14 +34123,14 @@
       </p:sp>
       <p:sp>
         <p:nvSpPr>
-          <p:cNvPr id="52" name="Shape 50"/>
-          <p:cNvSpPr/>
-          <p:nvPr/>
-        </p:nvSpPr>
-        <p:spPr>
-          <a:xfrm>
-            <a:off x="7576947" y="4169664"/>
-            <a:ext cx="685800" cy="384048"/>
+          <p:cNvPr id="61" name="Shape 59"/>
+          <p:cNvSpPr/>
+          <p:nvPr/>
+        </p:nvSpPr>
+        <p:spPr>
+          <a:xfrm>
+            <a:off x="6525491" y="4169664"/>
+            <a:ext cx="603504" cy="384048"/>
           </a:xfrm>
           <a:prstGeom prst="rect">
             <a:avLst>
@@ -34216,14 +34150,14 @@
       </p:sp>
       <p:sp>
         <p:nvSpPr>
-          <p:cNvPr id="53" name="Text 51"/>
-          <p:cNvSpPr/>
-          <p:nvPr/>
-        </p:nvSpPr>
-        <p:spPr>
-          <a:xfrm>
-            <a:off x="7576947" y="4169664"/>
-            <a:ext cx="685800" cy="384048"/>
+          <p:cNvPr id="62" name="Text 60"/>
+          <p:cNvSpPr/>
+          <p:nvPr/>
+        </p:nvSpPr>
+        <p:spPr>
+          <a:xfrm>
+            <a:off x="6525491" y="4169664"/>
+            <a:ext cx="603504" cy="384048"/>
           </a:xfrm>
           <a:prstGeom prst="rect">
             <a:avLst/>
@@ -34247,7 +34181,7 @@
                 <a:ea typeface="Trebuchet MS" pitchFamily="34" charset="-122"/>
                 <a:cs typeface="Trebuchet MS" pitchFamily="34" charset="-120"/>
               </a:rPr>
-              <a:t>ion</a:t>
+              <a:t>i</a:t>
             </a:r>
             <a:endParaRPr lang="en-US" sz="900" dirty="0"/>
           </a:p>
@@ -34255,40 +34189,133 @@
       </p:sp>
       <p:sp>
         <p:nvSpPr>
-          <p:cNvPr id="54" name="Text 52"/>
-          <p:cNvSpPr/>
-          <p:nvPr/>
-        </p:nvSpPr>
-        <p:spPr>
-          <a:xfrm>
-            <a:off x="7576947" y="4572000"/>
-            <a:ext cx="685800" cy="219456"/>
-          </a:xfrm>
-          <a:prstGeom prst="rect">
-            <a:avLst/>
-          </a:prstGeom>
-          <a:noFill/>
-          <a:ln/>
-        </p:spPr>
-        <p:txBody>
-          <a:bodyPr wrap="square" lIns="0" tIns="0" rIns="0" bIns="0" rtlCol="0" anchor="t"/>
-          <a:lstStyle/>
-          <a:p>
-            <a:pPr algn="ctr" indent="0" marL="0">
-              <a:buNone/>
-            </a:pPr>
-            <a:r>
-              <a:rPr lang="en-US" sz="750" i="1" dirty="0">
-                <a:solidFill>
-                  <a:srgbClr val="94A3B8"/>
-                </a:solidFill>
-                <a:latin typeface="Calibri" pitchFamily="34" charset="0"/>
-                <a:ea typeface="Calibri" pitchFamily="34" charset="-122"/>
-                <a:cs typeface="Calibri" pitchFamily="34" charset="-120"/>
-              </a:rPr>
-              <a:t>/shun/</a:t>
-            </a:r>
-            <a:endParaRPr lang="en-US" sz="750" dirty="0"/>
+          <p:cNvPr id="63" name="Shape 61"/>
+          <p:cNvSpPr/>
+          <p:nvPr/>
+        </p:nvSpPr>
+        <p:spPr>
+          <a:xfrm>
+            <a:off x="7178871" y="4169664"/>
+            <a:ext cx="603504" cy="384048"/>
+          </a:xfrm>
+          <a:prstGeom prst="rect">
+            <a:avLst>
+              <a:gd name="adj" fmla="val 9524"/>
+            </a:avLst>
+          </a:prstGeom>
+          <a:solidFill>
+            <a:srgbClr val="FFFFFF"/>
+          </a:solidFill>
+          <a:ln w="12700">
+            <a:solidFill>
+              <a:srgbClr val="DB2777"/>
+            </a:solidFill>
+            <a:prstDash val="solid"/>
+          </a:ln>
+        </p:spPr>
+      </p:sp>
+      <p:sp>
+        <p:nvSpPr>
+          <p:cNvPr id="64" name="Text 62"/>
+          <p:cNvSpPr/>
+          <p:nvPr/>
+        </p:nvSpPr>
+        <p:spPr>
+          <a:xfrm>
+            <a:off x="7178871" y="4169664"/>
+            <a:ext cx="603504" cy="384048"/>
+          </a:xfrm>
+          <a:prstGeom prst="rect">
+            <a:avLst/>
+          </a:prstGeom>
+          <a:noFill/>
+          <a:ln/>
+        </p:spPr>
+        <p:txBody>
+          <a:bodyPr wrap="square" lIns="0" tIns="0" rIns="0" bIns="0" rtlCol="0" anchor="ctr"/>
+          <a:lstStyle/>
+          <a:p>
+            <a:pPr algn="ctr" indent="0" marL="0">
+              <a:buNone/>
+            </a:pPr>
+            <a:r>
+              <a:rPr lang="en-US" sz="900" b="1" dirty="0">
+                <a:solidFill>
+                  <a:srgbClr val="9D174D"/>
+                </a:solidFill>
+                <a:latin typeface="Trebuchet MS" pitchFamily="34" charset="0"/>
+                <a:ea typeface="Trebuchet MS" pitchFamily="34" charset="-122"/>
+                <a:cs typeface="Trebuchet MS" pitchFamily="34" charset="-120"/>
+              </a:rPr>
+              <a:t>v</a:t>
+            </a:r>
+            <a:endParaRPr lang="en-US" sz="900" dirty="0"/>
+          </a:p>
+        </p:txBody>
+      </p:sp>
+      <p:sp>
+        <p:nvSpPr>
+          <p:cNvPr id="65" name="Shape 63"/>
+          <p:cNvSpPr/>
+          <p:nvPr/>
+        </p:nvSpPr>
+        <p:spPr>
+          <a:xfrm>
+            <a:off x="7832252" y="4169664"/>
+            <a:ext cx="603504" cy="384048"/>
+          </a:xfrm>
+          <a:prstGeom prst="rect">
+            <a:avLst>
+              <a:gd name="adj" fmla="val 9524"/>
+            </a:avLst>
+          </a:prstGeom>
+          <a:solidFill>
+            <a:srgbClr val="FFFFFF"/>
+          </a:solidFill>
+          <a:ln w="12700">
+            <a:solidFill>
+              <a:srgbClr val="DB2777"/>
+            </a:solidFill>
+            <a:prstDash val="solid"/>
+          </a:ln>
+        </p:spPr>
+      </p:sp>
+      <p:sp>
+        <p:nvSpPr>
+          <p:cNvPr id="66" name="Text 64"/>
+          <p:cNvSpPr/>
+          <p:nvPr/>
+        </p:nvSpPr>
+        <p:spPr>
+          <a:xfrm>
+            <a:off x="7832252" y="4169664"/>
+            <a:ext cx="603504" cy="384048"/>
+          </a:xfrm>
+          <a:prstGeom prst="rect">
+            <a:avLst/>
+          </a:prstGeom>
+          <a:noFill/>
+          <a:ln/>
+        </p:spPr>
+        <p:txBody>
+          <a:bodyPr wrap="square" lIns="0" tIns="0" rIns="0" bIns="0" rtlCol="0" anchor="ctr"/>
+          <a:lstStyle/>
+          <a:p>
+            <a:pPr algn="ctr" indent="0" marL="0">
+              <a:buNone/>
+            </a:pPr>
+            <a:r>
+              <a:rPr lang="en-US" sz="900" b="1" dirty="0">
+                <a:solidFill>
+                  <a:srgbClr val="9D174D"/>
+                </a:solidFill>
+                <a:latin typeface="Trebuchet MS" pitchFamily="34" charset="0"/>
+                <a:ea typeface="Trebuchet MS" pitchFamily="34" charset="-122"/>
+                <a:cs typeface="Trebuchet MS" pitchFamily="34" charset="-120"/>
+              </a:rPr>
+              <a:t>e</a:t>
+            </a:r>
+            <a:endParaRPr lang="en-US" sz="900" dirty="0"/>
           </a:p>
         </p:txBody>
       </p:sp>
@@ -34578,7 +34605,7 @@
                 <a:ea typeface="Calibri" pitchFamily="34" charset="-122"/>
                 <a:cs typeface="Calibri" pitchFamily="34" charset="-120"/>
               </a:rPr>
-              <a:t>Word Labs  •  wordlabs.app  •  Root: 'fect' = make, do, accomplish</a:t>
+              <a:t>Word Labs  •  wordlabs.app  •  Root: 'fect' = do, make, perform</a:t>
             </a:r>
             <a:endParaRPr lang="en-US" sz="800" dirty="0"/>
           </a:p>
@@ -35747,7 +35774,7 @@
                 <a:ea typeface="Calibri" pitchFamily="34" charset="-122"/>
                 <a:cs typeface="Calibri" pitchFamily="34" charset="-120"/>
               </a:rPr>
-              <a:t>Word Labs  •  wordlabs.app  •  Root: 'fect' = make, do, accomplish</a:t>
+              <a:t>Word Labs  •  wordlabs.app  •  Root: 'fect' = do, make, perform</a:t>
             </a:r>
             <a:endParaRPr lang="en-US" sz="800" dirty="0"/>
           </a:p>
@@ -36240,7 +36267,7 @@
                 <a:ea typeface="Trebuchet MS" pitchFamily="34" charset="-122"/>
                 <a:cs typeface="Trebuchet MS" pitchFamily="34" charset="-120"/>
               </a:rPr>
-              <a:t>in-</a:t>
+              <a:t>de-</a:t>
             </a:r>
             <a:endParaRPr lang="en-US" sz="1300" dirty="0"/>
           </a:p>
@@ -36393,7 +36420,7 @@
                 <a:ea typeface="Trebuchet MS" pitchFamily="34" charset="-122"/>
                 <a:cs typeface="Trebuchet MS" pitchFamily="34" charset="-120"/>
               </a:rPr>
-              <a:t>de-</a:t>
+              <a:t>af-</a:t>
             </a:r>
             <a:endParaRPr lang="en-US" sz="1300" dirty="0"/>
           </a:p>
@@ -36546,7 +36573,7 @@
                 <a:ea typeface="Trebuchet MS" pitchFamily="34" charset="-122"/>
                 <a:cs typeface="Trebuchet MS" pitchFamily="34" charset="-120"/>
               </a:rPr>
-              <a:t>af-</a:t>
+              <a:t>in-</a:t>
             </a:r>
             <a:endParaRPr lang="en-US" sz="1300" dirty="0"/>
           </a:p>
@@ -36788,7 +36815,7 @@
                 <a:ea typeface="Trebuchet MS" pitchFamily="34" charset="-122"/>
                 <a:cs typeface="Trebuchet MS" pitchFamily="34" charset="-120"/>
               </a:rPr>
-              <a:t>-s</a:t>
+              <a:t>-ness</a:t>
             </a:r>
             <a:endParaRPr lang="en-US" sz="1300" dirty="0"/>
           </a:p>
@@ -36959,7 +36986,7 @@
                 <a:ea typeface="Trebuchet MS" pitchFamily="34" charset="-122"/>
                 <a:cs typeface="Trebuchet MS" pitchFamily="34" charset="-120"/>
               </a:rPr>
-              <a:t>effect</a:t>
+              <a:t>affect</a:t>
             </a:r>
             <a:endParaRPr lang="en-US" sz="1200" dirty="0"/>
           </a:p>
@@ -37025,7 +37052,7 @@
                 <a:ea typeface="Trebuchet MS" pitchFamily="34" charset="-122"/>
                 <a:cs typeface="Trebuchet MS" pitchFamily="34" charset="-120"/>
               </a:rPr>
-              <a:t>affect</a:t>
+              <a:t>effect</a:t>
             </a:r>
             <a:endParaRPr lang="en-US" sz="1200" dirty="0"/>
           </a:p>
@@ -37647,7 +37674,7 @@
                 <a:ea typeface="Calibri" pitchFamily="34" charset="-122"/>
                 <a:cs typeface="Calibri" pitchFamily="34" charset="-120"/>
               </a:rPr>
-              <a:t>Word Labs  •  wordlabs.app  •  Root: 'fect' = make, do, accomplish</a:t>
+              <a:t>Word Labs  •  wordlabs.app  •  Root: 'fect' = do, make, perform</a:t>
             </a:r>
             <a:endParaRPr lang="en-US" sz="800" dirty="0"/>
           </a:p>
@@ -37811,7 +37838,7 @@
                 <a:ea typeface="Calibri" pitchFamily="34" charset="-122"/>
                 <a:cs typeface="Calibri" pitchFamily="34" charset="-120"/>
               </a:rPr>
-              <a:t>The core part of a word carrying its basic meaning. For example, 'fect' means 'make, do, accomplish'.</a:t>
+              <a:t>The core part of a word carrying its basic meaning. For example, 'fect' means 'do, make, perform'.</a:t>
             </a:r>
             <a:endParaRPr lang="en-US" sz="1350" dirty="0"/>
           </a:p>
@@ -38431,7 +38458,7 @@
                 <a:ea typeface="Calibri" pitchFamily="34" charset="-122"/>
                 <a:cs typeface="Calibri" pitchFamily="34" charset="-120"/>
               </a:rPr>
-              <a:t>Word Labs  •  wordlabs.app  •  Root: 'fect' = make, do, accomplish</a:t>
+              <a:t>Word Labs  •  wordlabs.app  •  Root: 'fect' = do, make, perform</a:t>
             </a:r>
             <a:endParaRPr lang="en-US" sz="800" dirty="0"/>
           </a:p>
@@ -38543,7 +38570,7 @@
                 <a:ea typeface="Calibri" pitchFamily="34" charset="-122"/>
                 <a:cs typeface="Calibri" pitchFamily="34" charset="-120"/>
               </a:rPr>
-              <a:t>1.  The root 'fect' comes from a Latin word meaning to make or do.</a:t>
+              <a:t>1.  The word 'infection' contains the root 'fect' plus a suffix.</a:t>
             </a:r>
             <a:endParaRPr lang="en-US" sz="1300" dirty="0"/>
           </a:p>
@@ -38682,7 +38709,7 @@
                 <a:ea typeface="Calibri" pitchFamily="34" charset="-122"/>
                 <a:cs typeface="Calibri" pitchFamily="34" charset="-120"/>
               </a:rPr>
-              <a:t>2.  The word 'perfect' means something that is broken or faulty.</a:t>
+              <a:t>2.  The word 'perfect' does not contain the root 'fect'.</a:t>
             </a:r>
             <a:endParaRPr lang="en-US" sz="1300" dirty="0"/>
           </a:p>
@@ -38821,7 +38848,7 @@
                 <a:ea typeface="Calibri" pitchFamily="34" charset="-122"/>
                 <a:cs typeface="Calibri" pitchFamily="34" charset="-120"/>
               </a:rPr>
-              <a:t>3.  The prefix 'in' in 'infect' means into or upon, so infect means to bring germs into something.</a:t>
+              <a:t>3.  The prefix 'in' can be added to 'fect' to make the word 'infect'.</a:t>
             </a:r>
             <a:endParaRPr lang="en-US" sz="1300" dirty="0"/>
           </a:p>
@@ -38960,7 +38987,7 @@
                 <a:ea typeface="Calibri" pitchFamily="34" charset="-122"/>
                 <a:cs typeface="Calibri" pitchFamily="34" charset="-120"/>
               </a:rPr>
-              <a:t>4.  The suffix '-ive' can be added to 'fect' words to make adjectives, like 'effective'.</a:t>
+              <a:t>4.  The root 'fect' means to see or look at something.</a:t>
             </a:r>
             <a:endParaRPr lang="en-US" sz="1300" dirty="0"/>
           </a:p>
@@ -38983,11 +39010,11 @@
             </a:avLst>
           </a:prstGeom>
           <a:solidFill>
-            <a:srgbClr val="DCFCE7"/>
-          </a:solidFill>
-          <a:ln w="12700">
-            <a:solidFill>
-              <a:srgbClr val="16A34A"/>
+            <a:srgbClr val="FEE2E2"/>
+          </a:solidFill>
+          <a:ln w="12700">
+            <a:solidFill>
+              <a:srgbClr val="DC2626"/>
             </a:solidFill>
             <a:prstDash val="solid"/>
           </a:ln>
@@ -39020,13 +39047,13 @@
             <a:r>
               <a:rPr lang="en-US" sz="1100" b="1" dirty="0">
                 <a:solidFill>
-                  <a:srgbClr val="16A34A"/>
+                  <a:srgbClr val="DC2626"/>
                 </a:solidFill>
                 <a:latin typeface="Trebuchet MS" pitchFamily="34" charset="0"/>
                 <a:ea typeface="Trebuchet MS" pitchFamily="34" charset="-122"/>
                 <a:cs typeface="Trebuchet MS" pitchFamily="34" charset="-120"/>
               </a:rPr>
-              <a:t>TRUE</a:t>
+              <a:t>FALSE</a:t>
             </a:r>
             <a:endParaRPr lang="en-US" sz="1100" dirty="0"/>
           </a:p>
@@ -39099,7 +39126,7 @@
                 <a:ea typeface="Calibri" pitchFamily="34" charset="-122"/>
                 <a:cs typeface="Calibri" pitchFamily="34" charset="-120"/>
               </a:rPr>
-              <a:t>5.  The root 'fect' comes from a Greek word.</a:t>
+              <a:t>5.  The root 'fect' comes from a Latin word meaning to do or make.</a:t>
             </a:r>
             <a:endParaRPr lang="en-US" sz="1300" dirty="0"/>
           </a:p>
@@ -39122,11 +39149,11 @@
             </a:avLst>
           </a:prstGeom>
           <a:solidFill>
-            <a:srgbClr val="FEE2E2"/>
-          </a:solidFill>
-          <a:ln w="12700">
-            <a:solidFill>
-              <a:srgbClr val="DC2626"/>
+            <a:srgbClr val="DCFCE7"/>
+          </a:solidFill>
+          <a:ln w="12700">
+            <a:solidFill>
+              <a:srgbClr val="16A34A"/>
             </a:solidFill>
             <a:prstDash val="solid"/>
           </a:ln>
@@ -39159,13 +39186,13 @@
             <a:r>
               <a:rPr lang="en-US" sz="1100" b="1" dirty="0">
                 <a:solidFill>
-                  <a:srgbClr val="DC2626"/>
+                  <a:srgbClr val="16A34A"/>
                 </a:solidFill>
                 <a:latin typeface="Trebuchet MS" pitchFamily="34" charset="0"/>
                 <a:ea typeface="Trebuchet MS" pitchFamily="34" charset="-122"/>
                 <a:cs typeface="Trebuchet MS" pitchFamily="34" charset="-120"/>
               </a:rPr>
-              <a:t>FALSE</a:t>
+              <a:t>TRUE</a:t>
             </a:r>
             <a:endParaRPr lang="en-US" sz="1100" dirty="0"/>
           </a:p>
@@ -39457,7 +39484,7 @@
                 <a:ea typeface="Calibri" pitchFamily="34" charset="-122"/>
                 <a:cs typeface="Calibri" pitchFamily="34" charset="-120"/>
               </a:rPr>
-              <a:t>Word Labs  •  wordlabs.app  •  Root: 'fect' = make, do, accomplish</a:t>
+              <a:t>Word Labs  •  wordlabs.app  •  Root: 'fect' = do, make, perform</a:t>
             </a:r>
             <a:endParaRPr lang="en-US" sz="800" dirty="0"/>
           </a:p>
@@ -39594,7 +39621,7 @@
                 <a:ea typeface="Trebuchet MS" pitchFamily="34" charset="-122"/>
                 <a:cs typeface="Trebuchet MS" pitchFamily="34" charset="-120"/>
               </a:rPr>
-              <a:t>make, do, accomplish</a:t>
+              <a:t>do, make, perform</a:t>
             </a:r>
             <a:endParaRPr lang="en-US" sz="2000" dirty="0"/>
           </a:p>
@@ -39804,7 +39831,7 @@
                 <a:ea typeface="Trebuchet MS" pitchFamily="34" charset="-122"/>
                 <a:cs typeface="Trebuchet MS" pitchFamily="34" charset="-120"/>
               </a:rPr>
-              <a:t>effect</a:t>
+              <a:t>affect</a:t>
             </a:r>
             <a:endParaRPr lang="en-US" sz="1300" dirty="0"/>
           </a:p>
@@ -39870,7 +39897,7 @@
                 <a:ea typeface="Trebuchet MS" pitchFamily="34" charset="-122"/>
                 <a:cs typeface="Trebuchet MS" pitchFamily="34" charset="-120"/>
               </a:rPr>
-              <a:t>affect</a:t>
+              <a:t>effect</a:t>
             </a:r>
             <a:endParaRPr lang="en-US" sz="1300" dirty="0"/>
           </a:p>
@@ -40426,7 +40453,7 @@
                 <a:ea typeface="Calibri" pitchFamily="34" charset="-122"/>
                 <a:cs typeface="Calibri" pitchFamily="34" charset="-120"/>
               </a:rPr>
-              <a:t>Word Labs  •  wordlabs.app  •  Root: 'fect' = make, do, accomplish</a:t>
+              <a:t>Word Labs  •  wordlabs.app  •  Root: 'fect' = do, make, perform</a:t>
             </a:r>
             <a:endParaRPr lang="en-US" sz="800" dirty="0"/>
           </a:p>
@@ -40919,7 +40946,7 @@
                 <a:ea typeface="Trebuchet MS" pitchFamily="34" charset="-122"/>
                 <a:cs typeface="Trebuchet MS" pitchFamily="34" charset="-120"/>
               </a:rPr>
-              <a:t>in-</a:t>
+              <a:t>de-</a:t>
             </a:r>
             <a:endParaRPr lang="en-US" sz="1300" dirty="0"/>
           </a:p>
@@ -41072,7 +41099,7 @@
                 <a:ea typeface="Trebuchet MS" pitchFamily="34" charset="-122"/>
                 <a:cs typeface="Trebuchet MS" pitchFamily="34" charset="-120"/>
               </a:rPr>
-              <a:t>de-</a:t>
+              <a:t>af-</a:t>
             </a:r>
             <a:endParaRPr lang="en-US" sz="1300" dirty="0"/>
           </a:p>
@@ -41225,7 +41252,7 @@
                 <a:ea typeface="Trebuchet MS" pitchFamily="34" charset="-122"/>
                 <a:cs typeface="Trebuchet MS" pitchFamily="34" charset="-120"/>
               </a:rPr>
-              <a:t>af-</a:t>
+              <a:t>in-</a:t>
             </a:r>
             <a:endParaRPr lang="en-US" sz="1300" dirty="0"/>
           </a:p>
@@ -41467,7 +41494,7 @@
                 <a:ea typeface="Trebuchet MS" pitchFamily="34" charset="-122"/>
                 <a:cs typeface="Trebuchet MS" pitchFamily="34" charset="-120"/>
               </a:rPr>
-              <a:t>-s</a:t>
+              <a:t>-ness</a:t>
             </a:r>
             <a:endParaRPr lang="en-US" sz="1300" dirty="0"/>
           </a:p>
@@ -42200,7 +42227,7 @@
                 <a:ea typeface="Calibri" pitchFamily="34" charset="-122"/>
                 <a:cs typeface="Calibri" pitchFamily="34" charset="-120"/>
               </a:rPr>
-              <a:t>Word Labs  •  wordlabs.app  •  Root: 'fect' = make, do, accomplish</a:t>
+              <a:t>Word Labs  •  wordlabs.app  •  Root: 'fect' = do, make, perform</a:t>
             </a:r>
             <a:endParaRPr lang="en-US" sz="800" dirty="0"/>
           </a:p>
@@ -42378,7 +42405,7 @@
                 <a:ea typeface="Calibri" pitchFamily="34" charset="-122"/>
                 <a:cs typeface="Calibri" pitchFamily="34" charset="-120"/>
               </a:rPr>
-              <a:t>Without any mistakes or flaws; completely right.</a:t>
+              <a:t>Something that has no mistakes or flaws at all.</a:t>
             </a:r>
             <a:endParaRPr lang="en-US" sz="1200" dirty="0"/>
           </a:p>
@@ -42451,7 +42478,7 @@
                 <a:ea typeface="Trebuchet MS" pitchFamily="34" charset="-122"/>
                 <a:cs typeface="Trebuchet MS" pitchFamily="34" charset="-120"/>
               </a:rPr>
-              <a:t>effect</a:t>
+              <a:t>affect</a:t>
             </a:r>
             <a:endParaRPr lang="en-US" sz="1200" dirty="0"/>
           </a:p>
@@ -42517,7 +42544,7 @@
                 <a:ea typeface="Calibri" pitchFamily="34" charset="-122"/>
                 <a:cs typeface="Calibri" pitchFamily="34" charset="-120"/>
               </a:rPr>
-              <a:t>A fault or problem that stops something working properly.</a:t>
+              <a:t>A fault or problem with something that stops it working properly.</a:t>
             </a:r>
             <a:endParaRPr lang="en-US" sz="1200" dirty="0"/>
           </a:p>
@@ -42590,7 +42617,7 @@
                 <a:ea typeface="Trebuchet MS" pitchFamily="34" charset="-122"/>
                 <a:cs typeface="Trebuchet MS" pitchFamily="34" charset="-120"/>
               </a:rPr>
-              <a:t>affect</a:t>
+              <a:t>effect</a:t>
             </a:r>
             <a:endParaRPr lang="en-US" sz="1200" dirty="0"/>
           </a:p>
@@ -42656,7 +42683,7 @@
                 <a:ea typeface="Calibri" pitchFamily="34" charset="-122"/>
                 <a:cs typeface="Calibri" pitchFamily="34" charset="-120"/>
               </a:rPr>
-              <a:t>To have an impact on something or someone.</a:t>
+              <a:t>The result or change that is caused by something.</a:t>
             </a:r>
             <a:endParaRPr lang="en-US" sz="1200" dirty="0"/>
           </a:p>
@@ -42795,7 +42822,7 @@
                 <a:ea typeface="Calibri" pitchFamily="34" charset="-122"/>
                 <a:cs typeface="Calibri" pitchFamily="34" charset="-120"/>
               </a:rPr>
-              <a:t>To spread germs or disease to a person, animal, or place.</a:t>
+              <a:t>To pass on germs or illness to another person or animal.</a:t>
             </a:r>
             <a:endParaRPr lang="en-US" sz="1200" dirty="0"/>
           </a:p>
@@ -42934,7 +42961,7 @@
                 <a:ea typeface="Calibri" pitchFamily="34" charset="-122"/>
                 <a:cs typeface="Calibri" pitchFamily="34" charset="-120"/>
               </a:rPr>
-              <a:t>Working well and getting the result you want.</a:t>
+              <a:t>Something that works well and gets the result you wanted.</a:t>
             </a:r>
             <a:endParaRPr lang="en-US" sz="1200" dirty="0"/>
           </a:p>
@@ -43073,7 +43100,7 @@
                 <a:ea typeface="Calibri" pitchFamily="34" charset="-122"/>
                 <a:cs typeface="Calibri" pitchFamily="34" charset="-120"/>
               </a:rPr>
-              <a:t>The state of being completely without any faults.</a:t>
+              <a:t>The state of being completely without any faults or errors.</a:t>
             </a:r>
             <a:endParaRPr lang="en-US" sz="1200" dirty="0"/>
           </a:p>
@@ -43212,7 +43239,7 @@
                 <a:ea typeface="Calibri" pitchFamily="34" charset="-122"/>
                 <a:cs typeface="Calibri" pitchFamily="34" charset="-120"/>
               </a:rPr>
-              <a:t>A result or change that happens because of something else.</a:t>
+              <a:t>To have an impact on something or change it in some way.</a:t>
             </a:r>
             <a:endParaRPr lang="en-US" sz="1200" dirty="0"/>
           </a:p>
@@ -43504,7 +43531,7 @@
                 <a:ea typeface="Calibri" pitchFamily="34" charset="-122"/>
                 <a:cs typeface="Calibri" pitchFamily="34" charset="-120"/>
               </a:rPr>
-              <a:t>Word Labs  •  wordlabs.app  •  Root: 'fect' = make, do, accomplish</a:t>
+              <a:t>Word Labs  •  wordlabs.app  •  Root: 'fect' = do, make, perform</a:t>
             </a:r>
             <a:endParaRPr lang="en-US" sz="800" dirty="0"/>
           </a:p>
@@ -43707,7 +43734,7 @@
                 <a:ea typeface="Calibri" pitchFamily="34" charset="-122"/>
                 <a:cs typeface="Calibri" pitchFamily="34" charset="-120"/>
               </a:rPr>
-              <a:t>The scientist studied the effect of sunlight on the growth of plants in the garden.</a:t>
+              <a:t>The cold weather can affect how well you concentrate during a maths test.</a:t>
             </a:r>
             <a:endParaRPr lang="en-US" sz="1500" dirty="0"/>
           </a:p>
@@ -43871,7 +43898,7 @@
                 <a:ea typeface="Calibri" pitchFamily="34" charset="-122"/>
                 <a:cs typeface="Calibri" pitchFamily="34" charset="-120"/>
               </a:rPr>
-              <a:t>The doctor told us that a virus can infect many people very quickly if we don't wash our hands.</a:t>
+              <a:t>The doctor said the cut on her knee was starting to show signs of infection.</a:t>
             </a:r>
             <a:endParaRPr lang="en-US" sz="1500" dirty="0"/>
           </a:p>
@@ -44035,7 +44062,7 @@
                 <a:ea typeface="Calibri" pitchFamily="34" charset="-122"/>
                 <a:cs typeface="Calibri" pitchFamily="34" charset="-120"/>
               </a:rPr>
-              <a:t>She practised her gymnastics routine every day because she wanted to achieve perfection.</a:t>
+              <a:t>He practised his speech until every word was perfect.</a:t>
             </a:r>
             <a:endParaRPr lang="en-US" sz="1500" dirty="0"/>
           </a:p>
